--- a/dialogue-datasets-en.pptx
+++ b/dialogue-datasets-en.pptx
@@ -5315,29 +5315,29 @@
         </p:nvSpPr>
         <p:spPr>
           <a:xfrm>
-            <a:off x="713231" y="5682996"/>
-            <a:ext cx="1060704" cy="210312"/>
-          </a:xfrm>
-          <a:prstGeom prst="rect">
-            <a:avLst/>
-          </a:prstGeom>
-          <a:noFill/>
-        </p:spPr>
-        <p:txBody>
-          <a:bodyPr wrap="square" lIns="0" rIns="0" tIns="0" bIns="0" anchor="t">
-            <a:spAutoFit/>
+            <a:off x="713231" y="5641848"/>
+            <a:ext cx="1060704" cy="310896"/>
+          </a:xfrm>
+          <a:prstGeom prst="rect">
+            <a:avLst/>
+          </a:prstGeom>
+          <a:noFill/>
+        </p:spPr>
+        <p:txBody>
+          <a:bodyPr wrap="square" lIns="0" rIns="0" tIns="0" bIns="0" anchor="ctr">
+            <a:noAutofit/>
           </a:bodyPr>
           <a:lstStyle/>
           <a:p>
             <a:pPr algn="ctr">
               <a:lnSpc>
-                <a:spcPct val="108000"/>
-              </a:lnSpc>
-              <a:spcBef>
-                <a:spcPts val="0"/>
-              </a:spcBef>
-              <a:spcAft>
-                <a:spcPts val="200"/>
+                <a:spcPct val="100000"/>
+              </a:lnSpc>
+              <a:spcBef>
+                <a:spcPts val="0"/>
+              </a:spcBef>
+              <a:spcAft>
+                <a:spcPts val="0"/>
               </a:spcAft>
               <a:defRPr lang="en-US" sz="1050" b="1">
                 <a:solidFill>
@@ -5405,29 +5405,29 @@
         </p:nvSpPr>
         <p:spPr>
           <a:xfrm>
-            <a:off x="2075688" y="5682996"/>
-            <a:ext cx="1060704" cy="210312"/>
-          </a:xfrm>
-          <a:prstGeom prst="rect">
-            <a:avLst/>
-          </a:prstGeom>
-          <a:noFill/>
-        </p:spPr>
-        <p:txBody>
-          <a:bodyPr wrap="square" lIns="0" rIns="0" tIns="0" bIns="0" anchor="t">
-            <a:spAutoFit/>
+            <a:off x="2075688" y="5641848"/>
+            <a:ext cx="1060704" cy="310896"/>
+          </a:xfrm>
+          <a:prstGeom prst="rect">
+            <a:avLst/>
+          </a:prstGeom>
+          <a:noFill/>
+        </p:spPr>
+        <p:txBody>
+          <a:bodyPr wrap="square" lIns="0" rIns="0" tIns="0" bIns="0" anchor="ctr">
+            <a:noAutofit/>
           </a:bodyPr>
           <a:lstStyle/>
           <a:p>
             <a:pPr algn="ctr">
               <a:lnSpc>
-                <a:spcPct val="108000"/>
-              </a:lnSpc>
-              <a:spcBef>
-                <a:spcPts val="0"/>
-              </a:spcBef>
-              <a:spcAft>
-                <a:spcPts val="200"/>
+                <a:spcPct val="100000"/>
+              </a:lnSpc>
+              <a:spcBef>
+                <a:spcPts val="0"/>
+              </a:spcBef>
+              <a:spcAft>
+                <a:spcPts val="0"/>
               </a:spcAft>
               <a:defRPr lang="en-US" sz="1050" b="1">
                 <a:solidFill>
@@ -5495,29 +5495,29 @@
         </p:nvSpPr>
         <p:spPr>
           <a:xfrm>
-            <a:off x="3438144" y="5682996"/>
-            <a:ext cx="1490472" cy="210312"/>
-          </a:xfrm>
-          <a:prstGeom prst="rect">
-            <a:avLst/>
-          </a:prstGeom>
-          <a:noFill/>
-        </p:spPr>
-        <p:txBody>
-          <a:bodyPr wrap="square" lIns="0" rIns="0" tIns="0" bIns="0" anchor="t">
-            <a:spAutoFit/>
+            <a:off x="3438144" y="5641848"/>
+            <a:ext cx="1490472" cy="310896"/>
+          </a:xfrm>
+          <a:prstGeom prst="rect">
+            <a:avLst/>
+          </a:prstGeom>
+          <a:noFill/>
+        </p:spPr>
+        <p:txBody>
+          <a:bodyPr wrap="square" lIns="0" rIns="0" tIns="0" bIns="0" anchor="ctr">
+            <a:noAutofit/>
           </a:bodyPr>
           <a:lstStyle/>
           <a:p>
             <a:pPr algn="ctr">
               <a:lnSpc>
-                <a:spcPct val="108000"/>
-              </a:lnSpc>
-              <a:spcBef>
-                <a:spcPts val="0"/>
-              </a:spcBef>
-              <a:spcAft>
-                <a:spcPts val="200"/>
+                <a:spcPct val="100000"/>
+              </a:lnSpc>
+              <a:spcBef>
+                <a:spcPts val="0"/>
+              </a:spcBef>
+              <a:spcAft>
+                <a:spcPts val="0"/>
               </a:spcAft>
               <a:defRPr lang="en-US" sz="1050" b="1">
                 <a:solidFill>
@@ -5898,29 +5898,29 @@
         </p:nvSpPr>
         <p:spPr>
           <a:xfrm>
-            <a:off x="8558784" y="4402836"/>
-            <a:ext cx="1545336" cy="210312"/>
-          </a:xfrm>
-          <a:prstGeom prst="rect">
-            <a:avLst/>
-          </a:prstGeom>
-          <a:noFill/>
-        </p:spPr>
-        <p:txBody>
-          <a:bodyPr wrap="square" lIns="0" rIns="0" tIns="0" bIns="0" anchor="t">
-            <a:spAutoFit/>
+            <a:off x="8558784" y="4361688"/>
+            <a:ext cx="1545336" cy="310896"/>
+          </a:xfrm>
+          <a:prstGeom prst="rect">
+            <a:avLst/>
+          </a:prstGeom>
+          <a:noFill/>
+        </p:spPr>
+        <p:txBody>
+          <a:bodyPr wrap="square" lIns="0" rIns="0" tIns="0" bIns="0" anchor="ctr">
+            <a:noAutofit/>
           </a:bodyPr>
           <a:lstStyle/>
           <a:p>
             <a:pPr algn="ctr">
               <a:lnSpc>
-                <a:spcPct val="108000"/>
-              </a:lnSpc>
-              <a:spcBef>
-                <a:spcPts val="0"/>
-              </a:spcBef>
-              <a:spcAft>
-                <a:spcPts val="200"/>
+                <a:spcPct val="100000"/>
+              </a:lnSpc>
+              <a:spcBef>
+                <a:spcPts val="0"/>
+              </a:spcBef>
+              <a:spcAft>
+                <a:spcPts val="0"/>
               </a:spcAft>
               <a:defRPr lang="en-US" sz="1050" b="1">
                 <a:solidFill>
@@ -12759,29 +12759,29 @@
         </p:nvSpPr>
         <p:spPr>
           <a:xfrm>
-            <a:off x="886968" y="5198364"/>
-            <a:ext cx="1161288" cy="210312"/>
-          </a:xfrm>
-          <a:prstGeom prst="rect">
-            <a:avLst/>
-          </a:prstGeom>
-          <a:noFill/>
-        </p:spPr>
-        <p:txBody>
-          <a:bodyPr wrap="square" lIns="0" rIns="0" tIns="0" bIns="0" anchor="t">
-            <a:spAutoFit/>
+            <a:off x="886968" y="5157216"/>
+            <a:ext cx="1161288" cy="310896"/>
+          </a:xfrm>
+          <a:prstGeom prst="rect">
+            <a:avLst/>
+          </a:prstGeom>
+          <a:noFill/>
+        </p:spPr>
+        <p:txBody>
+          <a:bodyPr wrap="square" lIns="0" rIns="0" tIns="0" bIns="0" anchor="ctr">
+            <a:noAutofit/>
           </a:bodyPr>
           <a:lstStyle/>
           <a:p>
             <a:pPr algn="ctr">
               <a:lnSpc>
-                <a:spcPct val="108000"/>
-              </a:lnSpc>
-              <a:spcBef>
-                <a:spcPts val="0"/>
-              </a:spcBef>
-              <a:spcAft>
-                <a:spcPts val="200"/>
+                <a:spcPct val="100000"/>
+              </a:lnSpc>
+              <a:spcBef>
+                <a:spcPts val="0"/>
+              </a:spcBef>
+              <a:spcAft>
+                <a:spcPts val="0"/>
               </a:spcAft>
               <a:defRPr lang="en-US" sz="1050" b="1">
                 <a:solidFill>
@@ -13075,29 +13075,29 @@
         </p:nvSpPr>
         <p:spPr>
           <a:xfrm>
-            <a:off x="4645152" y="5198364"/>
-            <a:ext cx="1161288" cy="210312"/>
-          </a:xfrm>
-          <a:prstGeom prst="rect">
-            <a:avLst/>
-          </a:prstGeom>
-          <a:noFill/>
-        </p:spPr>
-        <p:txBody>
-          <a:bodyPr wrap="square" lIns="0" rIns="0" tIns="0" bIns="0" anchor="t">
-            <a:spAutoFit/>
+            <a:off x="4645152" y="5157216"/>
+            <a:ext cx="1161288" cy="310896"/>
+          </a:xfrm>
+          <a:prstGeom prst="rect">
+            <a:avLst/>
+          </a:prstGeom>
+          <a:noFill/>
+        </p:spPr>
+        <p:txBody>
+          <a:bodyPr wrap="square" lIns="0" rIns="0" tIns="0" bIns="0" anchor="ctr">
+            <a:noAutofit/>
           </a:bodyPr>
           <a:lstStyle/>
           <a:p>
             <a:pPr algn="ctr">
               <a:lnSpc>
-                <a:spcPct val="108000"/>
-              </a:lnSpc>
-              <a:spcBef>
-                <a:spcPts val="0"/>
-              </a:spcBef>
-              <a:spcAft>
-                <a:spcPts val="200"/>
+                <a:spcPct val="100000"/>
+              </a:lnSpc>
+              <a:spcBef>
+                <a:spcPts val="0"/>
+              </a:spcBef>
+              <a:spcAft>
+                <a:spcPts val="0"/>
               </a:spcAft>
               <a:defRPr lang="en-US" sz="1050" b="1">
                 <a:solidFill>
@@ -13391,29 +13391,29 @@
         </p:nvSpPr>
         <p:spPr>
           <a:xfrm>
-            <a:off x="8403336" y="5198364"/>
-            <a:ext cx="1161288" cy="210312"/>
-          </a:xfrm>
-          <a:prstGeom prst="rect">
-            <a:avLst/>
-          </a:prstGeom>
-          <a:noFill/>
-        </p:spPr>
-        <p:txBody>
-          <a:bodyPr wrap="square" lIns="0" rIns="0" tIns="0" bIns="0" anchor="t">
-            <a:spAutoFit/>
+            <a:off x="8403336" y="5157216"/>
+            <a:ext cx="1161288" cy="310896"/>
+          </a:xfrm>
+          <a:prstGeom prst="rect">
+            <a:avLst/>
+          </a:prstGeom>
+          <a:noFill/>
+        </p:spPr>
+        <p:txBody>
+          <a:bodyPr wrap="square" lIns="0" rIns="0" tIns="0" bIns="0" anchor="ctr">
+            <a:noAutofit/>
           </a:bodyPr>
           <a:lstStyle/>
           <a:p>
             <a:pPr algn="ctr">
               <a:lnSpc>
-                <a:spcPct val="108000"/>
-              </a:lnSpc>
-              <a:spcBef>
-                <a:spcPts val="0"/>
-              </a:spcBef>
-              <a:spcAft>
-                <a:spcPts val="200"/>
+                <a:spcPct val="100000"/>
+              </a:lnSpc>
+              <a:spcBef>
+                <a:spcPts val="0"/>
+              </a:spcBef>
+              <a:spcAft>
+                <a:spcPts val="0"/>
               </a:spcAft>
               <a:defRPr lang="en-US" sz="1050" b="1">
                 <a:solidFill>

--- a/dialogue-datasets-en.pptx
+++ b/dialogue-datasets-en.pptx
@@ -4,24 +4,27 @@
   <p:sldMasterIdLst>
     <p:sldMasterId id="2147483648" r:id="rId1"/>
   </p:sldMasterIdLst>
+  <p:notesMasterIdLst>
+    <p:notesMasterId r:id="rId17"/>
+  </p:notesMasterIdLst>
   <p:sldIdLst>
-    <p:sldId id="256" r:id="rId7"/>
-    <p:sldId id="257" r:id="rId9"/>
-    <p:sldId id="258" r:id="rId10"/>
-    <p:sldId id="259" r:id="rId11"/>
-    <p:sldId id="260" r:id="rId12"/>
-    <p:sldId id="261" r:id="rId13"/>
-    <p:sldId id="262" r:id="rId14"/>
-    <p:sldId id="263" r:id="rId15"/>
-    <p:sldId id="264" r:id="rId16"/>
-    <p:sldId id="265" r:id="rId17"/>
-    <p:sldId id="266" r:id="rId18"/>
-    <p:sldId id="267" r:id="rId19"/>
-    <p:sldId id="268" r:id="rId20"/>
-    <p:sldId id="269" r:id="rId21"/>
-    <p:sldId id="270" r:id="rId22"/>
+    <p:sldId id="256" r:id="rId2"/>
+    <p:sldId id="257" r:id="rId3"/>
+    <p:sldId id="258" r:id="rId4"/>
+    <p:sldId id="259" r:id="rId5"/>
+    <p:sldId id="260" r:id="rId6"/>
+    <p:sldId id="261" r:id="rId7"/>
+    <p:sldId id="262" r:id="rId8"/>
+    <p:sldId id="263" r:id="rId9"/>
+    <p:sldId id="264" r:id="rId10"/>
+    <p:sldId id="265" r:id="rId11"/>
+    <p:sldId id="266" r:id="rId12"/>
+    <p:sldId id="267" r:id="rId13"/>
+    <p:sldId id="268" r:id="rId14"/>
+    <p:sldId id="269" r:id="rId15"/>
+    <p:sldId id="270" r:id="rId16"/>
   </p:sldIdLst>
-  <p:sldSz cx="12191999" cy="6858000" type="screen4x3"/>
+  <p:sldSz cx="12192000" cy="6858000"/>
   <p:notesSz cx="6858000" cy="9144000"/>
   <p:defaultTextStyle>
     <a:defPPr>
@@ -118,11 +121,27 @@
       </a:defRPr>
     </a:lvl9pPr>
   </p:defaultTextStyle>
+  <p:extLst>
+    <p:ext uri="{EFAFB233-063F-42B5-8137-9DF3F51BA10A}">
+      <p15:sldGuideLst xmlns:p15="http://schemas.microsoft.com/office/powerpoint/2012/main">
+        <p15:guide id="1" orient="horz" pos="2160">
+          <p15:clr>
+            <a:srgbClr val="A4A3A4"/>
+          </p15:clr>
+        </p15:guide>
+        <p15:guide id="2" pos="2880">
+          <p15:clr>
+            <a:srgbClr val="A4A3A4"/>
+          </p15:clr>
+        </p15:guide>
+      </p15:sldGuideLst>
+    </p:ext>
+  </p:extLst>
 </p:presentation>
 </file>
 
 <file path=ppt/notesMasters/notesMaster1.xml><?xml version="1.0" encoding="utf-8"?>
-<p:notesMaster xmlns:a="http://schemas.openxmlformats.org/drawingml/2006/main" xmlns:p="http://schemas.openxmlformats.org/presentationml/2006/main" xmlns:r="http://schemas.openxmlformats.org/officeDocument/2006/relationships">
+<p:notesMaster xmlns:a="http://schemas.openxmlformats.org/drawingml/2006/main" xmlns:r="http://schemas.openxmlformats.org/officeDocument/2006/relationships" xmlns:p="http://schemas.openxmlformats.org/presentationml/2006/main">
   <p:cSld>
     <p:bg>
       <p:bgRef idx="1001">
@@ -143,241 +162,16 @@
           <a:chExt cx="0" cy="0"/>
         </a:xfrm>
       </p:grpSpPr>
-      <p:sp>
-        <p:nvSpPr>
-          <p:cNvPr id="2" name="Header Placeholder 1"/>
-          <p:cNvSpPr>
-            <a:spLocks noGrp="1"/>
-          </p:cNvSpPr>
-          <p:nvPr>
-            <p:ph type="hdr" sz="quarter"/>
-          </p:nvPr>
-        </p:nvSpPr>
-        <p:spPr>
-          <a:xfrm>
-            <a:off x="0" y="0"/>
-            <a:ext cx="2971800" cy="457200"/>
-          </a:xfrm>
-          <a:prstGeom prst="rect">
-            <a:avLst/>
-          </a:prstGeom>
-        </p:spPr>
-        <p:txBody>
-          <a:bodyPr vert="horz" lIns="91440" tIns="45720" rIns="91440" bIns="45720" rtlCol="0"/>
-          <a:lstStyle>
-            <a:lvl1pPr algn="l">
-              <a:defRPr sz="1200"/>
-            </a:lvl1pPr>
-          </a:lstStyle>
-          <a:p>
-            <a:endParaRPr lang="en-US"/>
-          </a:p>
-        </p:txBody>
-      </p:sp>
-      <p:sp>
-        <p:nvSpPr>
-          <p:cNvPr id="3" name="Date Placeholder 2"/>
-          <p:cNvSpPr>
-            <a:spLocks noGrp="1"/>
-          </p:cNvSpPr>
-          <p:nvPr>
-            <p:ph type="dt" idx="1"/>
-          </p:nvPr>
-        </p:nvSpPr>
-        <p:spPr>
-          <a:xfrm>
-            <a:off x="3884613" y="0"/>
-            <a:ext cx="2971800" cy="457200"/>
-          </a:xfrm>
-          <a:prstGeom prst="rect">
-            <a:avLst/>
-          </a:prstGeom>
-        </p:spPr>
-        <p:txBody>
-          <a:bodyPr vert="horz" lIns="91440" tIns="45720" rIns="91440" bIns="45720" rtlCol="0"/>
-          <a:lstStyle>
-            <a:lvl1pPr algn="r">
-              <a:defRPr sz="1200"/>
-            </a:lvl1pPr>
-          </a:lstStyle>
-          <a:p>
-            <a:fld id="{0F89C1C7-3DCD-1040-A9CF-14679D8B5DDD}" type="datetimeFigureOut">
-              <a:rPr lang="en-US" smtClean="0"/>
-              <a:t>10/17/16</a:t>
-            </a:fld>
-            <a:endParaRPr lang="en-US"/>
-          </a:p>
-        </p:txBody>
-      </p:sp>
-      <p:sp>
-        <p:nvSpPr>
-          <p:cNvPr id="4" name="Slide Image Placeholder 3"/>
-          <p:cNvSpPr>
-            <a:spLocks noGrp="1" noRot="1" noChangeAspect="1"/>
-          </p:cNvSpPr>
-          <p:nvPr>
-            <p:ph type="sldImg" idx="2"/>
-          </p:nvPr>
-        </p:nvSpPr>
-        <p:spPr>
-          <a:xfrm>
-            <a:off x="1143000" y="685800"/>
-            <a:ext cx="4572000" cy="3429000"/>
-          </a:xfrm>
-          <a:prstGeom prst="rect">
-            <a:avLst/>
-          </a:prstGeom>
-          <a:noFill/>
-          <a:ln w="12700">
-            <a:solidFill>
-              <a:prstClr val="black"/>
-            </a:solidFill>
-          </a:ln>
-        </p:spPr>
-        <p:txBody>
-          <a:bodyPr vert="horz" lIns="91440" tIns="45720" rIns="91440" bIns="45720" rtlCol="0" anchor="ctr"/>
-          <a:lstStyle/>
-          <a:p>
-            <a:endParaRPr lang="en-US"/>
-          </a:p>
-        </p:txBody>
-      </p:sp>
-      <p:sp>
-        <p:nvSpPr>
-          <p:cNvPr id="5" name="Notes Placeholder 4"/>
-          <p:cNvSpPr>
-            <a:spLocks noGrp="1"/>
-          </p:cNvSpPr>
-          <p:nvPr>
-            <p:ph type="body" sz="quarter" idx="3"/>
-          </p:nvPr>
-        </p:nvSpPr>
-        <p:spPr>
-          <a:xfrm>
-            <a:off x="685800" y="4343400"/>
-            <a:ext cx="5486400" cy="4114800"/>
-          </a:xfrm>
-          <a:prstGeom prst="rect">
-            <a:avLst/>
-          </a:prstGeom>
-        </p:spPr>
-        <p:txBody>
-          <a:bodyPr vert="horz" lIns="91440" tIns="45720" rIns="91440" bIns="45720" rtlCol="0"/>
-          <a:lstStyle/>
-          <a:p>
-            <a:pPr lvl="0"/>
-            <a:r>
-              <a:rPr lang="en-US" smtClean="0"/>
-              <a:t>Click to edit Master text styles</a:t>
-            </a:r>
-          </a:p>
-          <a:p>
-            <a:pPr lvl="1"/>
-            <a:r>
-              <a:rPr lang="en-US" smtClean="0"/>
-              <a:t>Second level</a:t>
-            </a:r>
-          </a:p>
-          <a:p>
-            <a:pPr lvl="2"/>
-            <a:r>
-              <a:rPr lang="en-US" smtClean="0"/>
-              <a:t>Third level</a:t>
-            </a:r>
-          </a:p>
-          <a:p>
-            <a:pPr lvl="3"/>
-            <a:r>
-              <a:rPr lang="en-US" smtClean="0"/>
-              <a:t>Fourth level</a:t>
-            </a:r>
-          </a:p>
-          <a:p>
-            <a:pPr lvl="4"/>
-            <a:r>
-              <a:rPr lang="en-US" smtClean="0"/>
-              <a:t>Fifth level</a:t>
-            </a:r>
-            <a:endParaRPr lang="en-US"/>
-          </a:p>
-        </p:txBody>
-      </p:sp>
-      <p:sp>
-        <p:nvSpPr>
-          <p:cNvPr id="6" name="Footer Placeholder 5"/>
-          <p:cNvSpPr>
-            <a:spLocks noGrp="1"/>
-          </p:cNvSpPr>
-          <p:nvPr>
-            <p:ph type="ftr" sz="quarter" idx="4"/>
-          </p:nvPr>
-        </p:nvSpPr>
-        <p:spPr>
-          <a:xfrm>
-            <a:off x="0" y="8685213"/>
-            <a:ext cx="2971800" cy="457200"/>
-          </a:xfrm>
-          <a:prstGeom prst="rect">
-            <a:avLst/>
-          </a:prstGeom>
-        </p:spPr>
-        <p:txBody>
-          <a:bodyPr vert="horz" lIns="91440" tIns="45720" rIns="91440" bIns="45720" rtlCol="0" anchor="b"/>
-          <a:lstStyle>
-            <a:lvl1pPr algn="l">
-              <a:defRPr sz="1200"/>
-            </a:lvl1pPr>
-          </a:lstStyle>
-          <a:p>
-            <a:endParaRPr lang="en-US"/>
-          </a:p>
-        </p:txBody>
-      </p:sp>
-      <p:sp>
-        <p:nvSpPr>
-          <p:cNvPr id="7" name="Slide Number Placeholder 6"/>
-          <p:cNvSpPr>
-            <a:spLocks noGrp="1"/>
-          </p:cNvSpPr>
-          <p:nvPr>
-            <p:ph type="sldNum" sz="quarter" idx="5"/>
-          </p:nvPr>
-        </p:nvSpPr>
-        <p:spPr>
-          <a:xfrm>
-            <a:off x="3884613" y="8685213"/>
-            <a:ext cx="2971800" cy="457200"/>
-          </a:xfrm>
-          <a:prstGeom prst="rect">
-            <a:avLst/>
-          </a:prstGeom>
-        </p:spPr>
-        <p:txBody>
-          <a:bodyPr vert="horz" lIns="91440" tIns="45720" rIns="91440" bIns="45720" rtlCol="0" anchor="b"/>
-          <a:lstStyle>
-            <a:lvl1pPr algn="r">
-              <a:defRPr sz="1200"/>
-            </a:lvl1pPr>
-          </a:lstStyle>
-          <a:p>
-            <a:fld id="{BB5E49A5-4136-284D-997B-48E1D791AD67}" type="slidenum">
-              <a:rPr lang="en-US" smtClean="0"/>
-              <a:t>‹#›</a:t>
-            </a:fld>
-            <a:endParaRPr lang="en-US"/>
-          </a:p>
-        </p:txBody>
-      </p:sp>
     </p:spTree>
     <p:extLst>
       <p:ext uri="{BB962C8B-B14F-4D97-AF65-F5344CB8AC3E}">
-        <p14:creationId xmlns:p14="http://schemas.microsoft.com/office/powerpoint/2010/main" val="2623252185"/>
+        <p14:creationId xmlns:p14="http://schemas.microsoft.com/office/powerpoint/2010/main" val="3181773419"/>
       </p:ext>
     </p:extLst>
   </p:cSld>
   <p:clrMap bg1="lt1" tx1="dk1" bg2="lt2" tx2="dk2" accent1="accent1" accent2="accent2" accent3="accent3" accent4="accent4" accent5="accent5" accent6="accent6" hlink="hlink" folHlink="folHlink"/>
   <p:notesStyle>
-    <a:lvl1pPr marL="0" algn="l" defTabSz="457200" rtl="0" eaLnBrk="1" latinLnBrk="0" hangingPunct="1">
+    <a:lvl1pPr marL="0" algn="l" defTabSz="914400" rtl="0" eaLnBrk="1" latinLnBrk="0" hangingPunct="1">
       <a:defRPr sz="1200" kern="1200">
         <a:solidFill>
           <a:schemeClr val="tx1"/>
@@ -387,7 +181,7 @@
         <a:cs typeface="+mn-cs"/>
       </a:defRPr>
     </a:lvl1pPr>
-    <a:lvl2pPr marL="457200" algn="l" defTabSz="457200" rtl="0" eaLnBrk="1" latinLnBrk="0" hangingPunct="1">
+    <a:lvl2pPr marL="457200" algn="l" defTabSz="914400" rtl="0" eaLnBrk="1" latinLnBrk="0" hangingPunct="1">
       <a:defRPr sz="1200" kern="1200">
         <a:solidFill>
           <a:schemeClr val="tx1"/>
@@ -397,7 +191,7 @@
         <a:cs typeface="+mn-cs"/>
       </a:defRPr>
     </a:lvl2pPr>
-    <a:lvl3pPr marL="914400" algn="l" defTabSz="457200" rtl="0" eaLnBrk="1" latinLnBrk="0" hangingPunct="1">
+    <a:lvl3pPr marL="914400" algn="l" defTabSz="914400" rtl="0" eaLnBrk="1" latinLnBrk="0" hangingPunct="1">
       <a:defRPr sz="1200" kern="1200">
         <a:solidFill>
           <a:schemeClr val="tx1"/>
@@ -407,7 +201,7 @@
         <a:cs typeface="+mn-cs"/>
       </a:defRPr>
     </a:lvl3pPr>
-    <a:lvl4pPr marL="1371600" algn="l" defTabSz="457200" rtl="0" eaLnBrk="1" latinLnBrk="0" hangingPunct="1">
+    <a:lvl4pPr marL="1371600" algn="l" defTabSz="914400" rtl="0" eaLnBrk="1" latinLnBrk="0" hangingPunct="1">
       <a:defRPr sz="1200" kern="1200">
         <a:solidFill>
           <a:schemeClr val="tx1"/>
@@ -417,7 +211,7 @@
         <a:cs typeface="+mn-cs"/>
       </a:defRPr>
     </a:lvl4pPr>
-    <a:lvl5pPr marL="1828800" algn="l" defTabSz="457200" rtl="0" eaLnBrk="1" latinLnBrk="0" hangingPunct="1">
+    <a:lvl5pPr marL="1828800" algn="l" defTabSz="914400" rtl="0" eaLnBrk="1" latinLnBrk="0" hangingPunct="1">
       <a:defRPr sz="1200" kern="1200">
         <a:solidFill>
           <a:schemeClr val="tx1"/>
@@ -427,7 +221,7 @@
         <a:cs typeface="+mn-cs"/>
       </a:defRPr>
     </a:lvl5pPr>
-    <a:lvl6pPr marL="2286000" algn="l" defTabSz="457200" rtl="0" eaLnBrk="1" latinLnBrk="0" hangingPunct="1">
+    <a:lvl6pPr marL="2286000" algn="l" defTabSz="914400" rtl="0" eaLnBrk="1" latinLnBrk="0" hangingPunct="1">
       <a:defRPr sz="1200" kern="1200">
         <a:solidFill>
           <a:schemeClr val="tx1"/>
@@ -437,7 +231,7 @@
         <a:cs typeface="+mn-cs"/>
       </a:defRPr>
     </a:lvl6pPr>
-    <a:lvl7pPr marL="2743200" algn="l" defTabSz="457200" rtl="0" eaLnBrk="1" latinLnBrk="0" hangingPunct="1">
+    <a:lvl7pPr marL="2743200" algn="l" defTabSz="914400" rtl="0" eaLnBrk="1" latinLnBrk="0" hangingPunct="1">
       <a:defRPr sz="1200" kern="1200">
         <a:solidFill>
           <a:schemeClr val="tx1"/>
@@ -447,7 +241,7 @@
         <a:cs typeface="+mn-cs"/>
       </a:defRPr>
     </a:lvl7pPr>
-    <a:lvl8pPr marL="3200400" algn="l" defTabSz="457200" rtl="0" eaLnBrk="1" latinLnBrk="0" hangingPunct="1">
+    <a:lvl8pPr marL="3200400" algn="l" defTabSz="914400" rtl="0" eaLnBrk="1" latinLnBrk="0" hangingPunct="1">
       <a:defRPr sz="1200" kern="1200">
         <a:solidFill>
           <a:schemeClr val="tx1"/>
@@ -457,7 +251,7 @@
         <a:cs typeface="+mn-cs"/>
       </a:defRPr>
     </a:lvl8pPr>
-    <a:lvl9pPr marL="3657600" algn="l" defTabSz="457200" rtl="0" eaLnBrk="1" latinLnBrk="0" hangingPunct="1">
+    <a:lvl9pPr marL="3657600" algn="l" defTabSz="914400" rtl="0" eaLnBrk="1" latinLnBrk="0" hangingPunct="1">
       <a:defRPr sz="1200" kern="1200">
         <a:solidFill>
           <a:schemeClr val="tx1"/>
@@ -472,7 +266,7 @@
 </file>
 
 <file path=ppt/notesSlides/notesSlide1.xml><?xml version="1.0" encoding="utf-8"?>
-<p:notes xmlns:a="http://schemas.openxmlformats.org/drawingml/2006/main" xmlns:p="http://schemas.openxmlformats.org/presentationml/2006/main" xmlns:r="http://schemas.openxmlformats.org/officeDocument/2006/relationships">
+<p:notes xmlns:a="http://schemas.openxmlformats.org/drawingml/2006/main" xmlns:r="http://schemas.openxmlformats.org/officeDocument/2006/relationships" xmlns:p="http://schemas.openxmlformats.org/presentationml/2006/main">
   <p:cSld>
     <p:spTree>
       <p:nvGrpSpPr>
@@ -492,7 +286,7 @@
         <p:nvSpPr>
           <p:cNvPr id="2" name="Slide Image Placeholder 1"/>
           <p:cNvSpPr>
-            <a:spLocks noGrp="1"/>
+            <a:spLocks noGrp="1" noRot="1" noChangeAspect="1"/>
           </p:cNvSpPr>
           <p:nvPr>
             <p:ph type="sldImg" idx="2"/>
@@ -507,7 +301,7 @@
             <a:spLocks noGrp="1"/>
           </p:cNvSpPr>
           <p:nvPr>
-            <p:ph type="body" idx="3" sz="quarter"/>
+            <p:ph type="body" sz="quarter" idx="3"/>
           </p:nvPr>
         </p:nvSpPr>
         <p:spPr/>
@@ -519,7 +313,9 @@
               <a:t>This presentation describes the implemented dialogue generator and its separate CLI trainer. It generates controlled English-language dialogues with known state. Trained-model quality requires separate evaluation; no training results are claimed here.</a:t>
             </a:r>
           </a:p>
-          <a:p/>
+          <a:p>
+            <a:endParaRPr/>
+          </a:p>
           <a:p>
             <a:r>
               <a:t>Project sources:</a:t>
@@ -535,7 +331,9 @@
               <a:t>ui/app_main/chat_dataset.py</a:t>
             </a:r>
           </a:p>
-          <a:p/>
+          <a:p>
+            <a:endParaRPr/>
+          </a:p>
           <a:p>
             <a:r>
               <a:t>Implementation snapshot: 11 October 2026. Slide examples may be abbreviated for presentation.</a:t>
@@ -550,7 +348,7 @@
             <a:spLocks noGrp="1"/>
           </p:cNvSpPr>
           <p:nvPr>
-            <p:ph type="sldNum" idx="5" sz="quarter"/>
+            <p:ph type="sldNum" sz="quarter" idx="5"/>
           </p:nvPr>
         </p:nvSpPr>
         <p:spPr/>
@@ -564,7 +362,7 @@
 </file>
 
 <file path=ppt/notesSlides/notesSlide10.xml><?xml version="1.0" encoding="utf-8"?>
-<p:notes xmlns:a="http://schemas.openxmlformats.org/drawingml/2006/main" xmlns:p="http://schemas.openxmlformats.org/presentationml/2006/main" xmlns:r="http://schemas.openxmlformats.org/officeDocument/2006/relationships">
+<p:notes xmlns:a="http://schemas.openxmlformats.org/drawingml/2006/main" xmlns:r="http://schemas.openxmlformats.org/officeDocument/2006/relationships" xmlns:p="http://schemas.openxmlformats.org/presentationml/2006/main">
   <p:cSld>
     <p:spTree>
       <p:nvGrpSpPr>
@@ -584,7 +382,7 @@
         <p:nvSpPr>
           <p:cNvPr id="2" name="Slide Image Placeholder 1"/>
           <p:cNvSpPr>
-            <a:spLocks noGrp="1"/>
+            <a:spLocks noGrp="1" noRot="1" noChangeAspect="1"/>
           </p:cNvSpPr>
           <p:nvPr>
             <p:ph type="sldImg" idx="2"/>
@@ -599,7 +397,7 @@
             <a:spLocks noGrp="1"/>
           </p:cNvSpPr>
           <p:nvPr>
-            <p:ph type="body" idx="3" sz="quarter"/>
+            <p:ph type="body" sz="quarter" idx="3"/>
           </p:nvPr>
         </p:nvSpPr>
         <p:spPr/>
@@ -611,7 +409,9 @@
               <a:t>The example has three messages: system, user and assistant. The im_start, im_end and pad special tokens are added to the GPT-2 tokenizer. Loss covers only the final assistant answer and its im_end token. System/user content, the role header and padding are masked with -100. The instructions are abbreviated on this slide; this is not the full training prompt. Outer record fields such as ID, task and scenario_key are not sent to the model.</a:t>
             </a:r>
           </a:p>
-          <a:p/>
+          <a:p>
+            <a:endParaRPr/>
+          </a:p>
           <a:p>
             <a:r>
               <a:t>Project sources:</a:t>
@@ -632,7 +432,9 @@
               <a:t>semantic_corpus/dialogue_generator/export.py</a:t>
             </a:r>
           </a:p>
-          <a:p/>
+          <a:p>
+            <a:endParaRPr/>
+          </a:p>
           <a:p>
             <a:r>
               <a:t>Implementation snapshot: 11 October 2026. Slide examples may be abbreviated for presentation.</a:t>
@@ -647,7 +449,7 @@
             <a:spLocks noGrp="1"/>
           </p:cNvSpPr>
           <p:nvPr>
-            <p:ph type="sldNum" idx="5" sz="quarter"/>
+            <p:ph type="sldNum" sz="quarter" idx="5"/>
           </p:nvPr>
         </p:nvSpPr>
         <p:spPr/>
@@ -661,7 +463,7 @@
 </file>
 
 <file path=ppt/notesSlides/notesSlide11.xml><?xml version="1.0" encoding="utf-8"?>
-<p:notes xmlns:a="http://schemas.openxmlformats.org/drawingml/2006/main" xmlns:p="http://schemas.openxmlformats.org/presentationml/2006/main" xmlns:r="http://schemas.openxmlformats.org/officeDocument/2006/relationships">
+<p:notes xmlns:a="http://schemas.openxmlformats.org/drawingml/2006/main" xmlns:r="http://schemas.openxmlformats.org/officeDocument/2006/relationships" xmlns:p="http://schemas.openxmlformats.org/presentationml/2006/main">
   <p:cSld>
     <p:spTree>
       <p:nvGrpSpPr>
@@ -681,7 +483,7 @@
         <p:nvSpPr>
           <p:cNvPr id="2" name="Slide Image Placeholder 1"/>
           <p:cNvSpPr>
-            <a:spLocks noGrp="1"/>
+            <a:spLocks noGrp="1" noRot="1" noChangeAspect="1"/>
           </p:cNvSpPr>
           <p:nvPr>
             <p:ph type="sldImg" idx="2"/>
@@ -696,7 +498,7 @@
             <a:spLocks noGrp="1"/>
           </p:cNvSpPr>
           <p:nvPr>
-            <p:ph type="body" idx="3" sz="quarter"/>
+            <p:ph type="body" sz="quarter" idx="3"/>
           </p:nvPr>
         </p:nvSpPr>
         <p:spPr/>
@@ -708,7 +510,9 @@
               <a:t>Current UI defaults: train=200, validation=20 and test=20 per task; user_assistant_only=True, mined_train=0, seed=42, max_length=768 and include_metadata=True. With 4,031 available predicate entries, train=15*200+3*4031=15093 and validation=test=16*20=320. These are calculated quotas, not results from a new run. If quotas cannot be filled after length filtering, generation fails. A positive Mined training dialogues value sets a separate exact quota; leaving it blank retains the regular per-task quota.</a:t>
             </a:r>
           </a:p>
-          <a:p/>
+          <a:p>
+            <a:endParaRPr/>
+          </a:p>
           <a:p>
             <a:r>
               <a:t>Project sources:</a:t>
@@ -724,7 +528,9 @@
               <a:t>semantic_corpus/dialogue_generator/export.py</a:t>
             </a:r>
           </a:p>
-          <a:p/>
+          <a:p>
+            <a:endParaRPr/>
+          </a:p>
           <a:p>
             <a:r>
               <a:t>Implementation snapshot: 11 October 2026. Slide examples may be abbreviated for presentation.</a:t>
@@ -739,7 +545,7 @@
             <a:spLocks noGrp="1"/>
           </p:cNvSpPr>
           <p:nvPr>
-            <p:ph type="sldNum" idx="5" sz="quarter"/>
+            <p:ph type="sldNum" sz="quarter" idx="5"/>
           </p:nvPr>
         </p:nvSpPr>
         <p:spPr/>
@@ -753,7 +559,7 @@
 </file>
 
 <file path=ppt/notesSlides/notesSlide12.xml><?xml version="1.0" encoding="utf-8"?>
-<p:notes xmlns:a="http://schemas.openxmlformats.org/drawingml/2006/main" xmlns:p="http://schemas.openxmlformats.org/presentationml/2006/main" xmlns:r="http://schemas.openxmlformats.org/officeDocument/2006/relationships">
+<p:notes xmlns:a="http://schemas.openxmlformats.org/drawingml/2006/main" xmlns:r="http://schemas.openxmlformats.org/officeDocument/2006/relationships" xmlns:p="http://schemas.openxmlformats.org/presentationml/2006/main">
   <p:cSld>
     <p:spTree>
       <p:nvGrpSpPr>
@@ -773,7 +579,7 @@
         <p:nvSpPr>
           <p:cNvPr id="2" name="Slide Image Placeholder 1"/>
           <p:cNvSpPr>
-            <a:spLocks noGrp="1"/>
+            <a:spLocks noGrp="1" noRot="1" noChangeAspect="1"/>
           </p:cNvSpPr>
           <p:nvPr>
             <p:ph type="sldImg" idx="2"/>
@@ -788,7 +594,7 @@
             <a:spLocks noGrp="1"/>
           </p:cNvSpPr>
           <p:nvPr>
-            <p:ph type="body" idx="3" sz="quarter"/>
+            <p:ph type="body" sz="quarter" idx="3"/>
           </p:nvPr>
         </p:nvSpPr>
         <p:spPr/>
@@ -800,7 +606,9 @@
               <a:t>Each of the three directories contains train.json, validation.json and test.json: arrays of records containing messages. Memory and History have one target answer per episode; Extraction has separate rows for transitions, deduplicated by prompt. The manifest records versions, seed, quotas and fingerprints. Episode JSONL files preserve the audit trail independently of Include metadata. Length reports are created when max_length is enabled.</a:t>
             </a:r>
           </a:p>
-          <a:p/>
+          <a:p>
+            <a:endParaRPr/>
+          </a:p>
           <a:p>
             <a:r>
               <a:t>Project sources:</a:t>
@@ -816,7 +624,9 @@
               <a:t>ui/app_main/chat_dataset.py</a:t>
             </a:r>
           </a:p>
-          <a:p/>
+          <a:p>
+            <a:endParaRPr/>
+          </a:p>
           <a:p>
             <a:r>
               <a:t>Implementation snapshot: 11 October 2026. Slide examples may be abbreviated for presentation.</a:t>
@@ -831,7 +641,7 @@
             <a:spLocks noGrp="1"/>
           </p:cNvSpPr>
           <p:nvPr>
-            <p:ph type="sldNum" idx="5" sz="quarter"/>
+            <p:ph type="sldNum" sz="quarter" idx="5"/>
           </p:nvPr>
         </p:nvSpPr>
         <p:spPr/>
@@ -845,7 +655,7 @@
 </file>
 
 <file path=ppt/notesSlides/notesSlide13.xml><?xml version="1.0" encoding="utf-8"?>
-<p:notes xmlns:a="http://schemas.openxmlformats.org/drawingml/2006/main" xmlns:p="http://schemas.openxmlformats.org/presentationml/2006/main" xmlns:r="http://schemas.openxmlformats.org/officeDocument/2006/relationships">
+<p:notes xmlns:a="http://schemas.openxmlformats.org/drawingml/2006/main" xmlns:r="http://schemas.openxmlformats.org/officeDocument/2006/relationships" xmlns:p="http://schemas.openxmlformats.org/presentationml/2006/main">
   <p:cSld>
     <p:spTree>
       <p:nvGrpSpPr>
@@ -865,7 +675,7 @@
         <p:nvSpPr>
           <p:cNvPr id="2" name="Slide Image Placeholder 1"/>
           <p:cNvSpPr>
-            <a:spLocks noGrp="1"/>
+            <a:spLocks noGrp="1" noRot="1" noChangeAspect="1"/>
           </p:cNvSpPr>
           <p:nvPr>
             <p:ph type="sldImg" idx="2"/>
@@ -880,7 +690,7 @@
             <a:spLocks noGrp="1"/>
           </p:cNvSpPr>
           <p:nvPr>
-            <p:ph type="body" idx="3" sz="quarter"/>
+            <p:ph type="body" sz="quarter" idx="3"/>
           </p:nvPr>
         </p:nvSpPr>
         <p:spPr/>
@@ -892,7 +702,9 @@
               <a:t>Episode.validate replays transitions and checks the final answer. The generator and trainer check duplicates and split overlap; task families, surface patterns and common vocabulary can still be shared. decode_update checks command format and application against the supplied state. The 768-token limit covers the complete ChatML example, including the system instruction and answer; the generator replaces the whole episode. The trainer does not truncate overlong records. These checks do not establish LLM quality or guarantee the semantic correctness of mined NLP analyses.</a:t>
             </a:r>
           </a:p>
-          <a:p/>
+          <a:p>
+            <a:endParaRPr/>
+          </a:p>
           <a:p>
             <a:r>
               <a:t>Project sources:</a:t>
@@ -918,7 +730,9 @@
               <a:t>semantic_corpus/dialogue_generator/trainer/data.py</a:t>
             </a:r>
           </a:p>
-          <a:p/>
+          <a:p>
+            <a:endParaRPr/>
+          </a:p>
           <a:p>
             <a:r>
               <a:t>Implementation snapshot: 11 October 2026. Slide examples may be abbreviated for presentation.</a:t>
@@ -933,7 +747,7 @@
             <a:spLocks noGrp="1"/>
           </p:cNvSpPr>
           <p:nvPr>
-            <p:ph type="sldNum" idx="5" sz="quarter"/>
+            <p:ph type="sldNum" sz="quarter" idx="5"/>
           </p:nvPr>
         </p:nvSpPr>
         <p:spPr/>
@@ -947,7 +761,7 @@
 </file>
 
 <file path=ppt/notesSlides/notesSlide14.xml><?xml version="1.0" encoding="utf-8"?>
-<p:notes xmlns:a="http://schemas.openxmlformats.org/drawingml/2006/main" xmlns:p="http://schemas.openxmlformats.org/presentationml/2006/main" xmlns:r="http://schemas.openxmlformats.org/officeDocument/2006/relationships">
+<p:notes xmlns:a="http://schemas.openxmlformats.org/drawingml/2006/main" xmlns:r="http://schemas.openxmlformats.org/officeDocument/2006/relationships" xmlns:p="http://schemas.openxmlformats.org/presentationml/2006/main">
   <p:cSld>
     <p:spTree>
       <p:nvGrpSpPr>
@@ -967,7 +781,7 @@
         <p:nvSpPr>
           <p:cNvPr id="2" name="Slide Image Placeholder 1"/>
           <p:cNvSpPr>
-            <a:spLocks noGrp="1"/>
+            <a:spLocks noGrp="1" noRot="1" noChangeAspect="1"/>
           </p:cNvSpPr>
           <p:nvPr>
             <p:ph type="sldImg" idx="2"/>
@@ -982,7 +796,7 @@
             <a:spLocks noGrp="1"/>
           </p:cNvSpPr>
           <p:nvPr>
-            <p:ph type="body" idx="3" sz="quarter"/>
+            <p:ph type="body" sz="quarter" idx="3"/>
           </p:nvPr>
         </p:nvSpPr>
         <p:spPr/>
@@ -994,7 +808,9 @@
               <a:t>The trainer uses standard pretrained gpt2 and transformers.Trainer. This command is an example, not a training run performed for this presentation. The extraction dataset directory must contain train.json and validation.json; the output directory must be new. GPU execution needs the appropriate PyTorch installation and requirements-training.txt dependencies. The trainer defaults to max_length=512, so explicitly use 768 for a dataset generated with that limit. Start from the same initial weights when comparing views independently. test.json is not used to select the best checkpoint.</a:t>
             </a:r>
           </a:p>
-          <a:p/>
+          <a:p>
+            <a:endParaRPr/>
+          </a:p>
           <a:p>
             <a:r>
               <a:t>Project sources:</a:t>
@@ -1015,7 +831,9 @@
               <a:t>semantic_corpus/dialogue_generator/trainer/README.md</a:t>
             </a:r>
           </a:p>
-          <a:p/>
+          <a:p>
+            <a:endParaRPr/>
+          </a:p>
           <a:p>
             <a:r>
               <a:t>Implementation snapshot: 11 October 2026. Slide examples may be abbreviated for presentation.</a:t>
@@ -1030,7 +848,7 @@
             <a:spLocks noGrp="1"/>
           </p:cNvSpPr>
           <p:nvPr>
-            <p:ph type="sldNum" idx="5" sz="quarter"/>
+            <p:ph type="sldNum" sz="quarter" idx="5"/>
           </p:nvPr>
         </p:nvSpPr>
         <p:spPr/>
@@ -1044,7 +862,7 @@
 </file>
 
 <file path=ppt/notesSlides/notesSlide15.xml><?xml version="1.0" encoding="utf-8"?>
-<p:notes xmlns:a="http://schemas.openxmlformats.org/drawingml/2006/main" xmlns:p="http://schemas.openxmlformats.org/presentationml/2006/main" xmlns:r="http://schemas.openxmlformats.org/officeDocument/2006/relationships">
+<p:notes xmlns:a="http://schemas.openxmlformats.org/drawingml/2006/main" xmlns:r="http://schemas.openxmlformats.org/officeDocument/2006/relationships" xmlns:p="http://schemas.openxmlformats.org/presentationml/2006/main">
   <p:cSld>
     <p:spTree>
       <p:nvGrpSpPr>
@@ -1064,7 +882,7 @@
         <p:nvSpPr>
           <p:cNvPr id="2" name="Slide Image Placeholder 1"/>
           <p:cNvSpPr>
-            <a:spLocks noGrp="1"/>
+            <a:spLocks noGrp="1" noRot="1" noChangeAspect="1"/>
           </p:cNvSpPr>
           <p:nvPr>
             <p:ph type="sldImg" idx="2"/>
@@ -1079,7 +897,7 @@
             <a:spLocks noGrp="1"/>
           </p:cNvSpPr>
           <p:nvPr>
-            <p:ph type="body" idx="3" sz="quarter"/>
+            <p:ph type="body" sz="quarter" idx="3"/>
           </p:nvPr>
         </p:nvSpPr>
         <p:spPr/>
@@ -1091,7 +909,9 @@
               <a:t>Memory/History: answer loss, exact match and breakdowns by task/outcome. Extraction: parse/apply validity, update and final-state match, and false updates on NO_CHANGE. Current Extraction evaluation receives the reference previous state and does not measure error accumulation in long autonomous dialogues. The next experiments proposed here are controlled tense expansion, separate compositional/quotation reports and end-to-end Extraction→Memory evaluation. No model-training results are invented in this presentation.</a:t>
             </a:r>
           </a:p>
-          <a:p/>
+          <a:p>
+            <a:endParaRPr/>
+          </a:p>
           <a:p>
             <a:r>
               <a:t>Project sources:</a:t>
@@ -1107,7 +927,9 @@
               <a:t>semantic_corpus/dialogue_generator/trainer/README.md</a:t>
             </a:r>
           </a:p>
-          <a:p/>
+          <a:p>
+            <a:endParaRPr/>
+          </a:p>
           <a:p>
             <a:r>
               <a:t>Implementation snapshot: 11 October 2026. Slide examples may be abbreviated for presentation.</a:t>
@@ -1122,7 +944,7 @@
             <a:spLocks noGrp="1"/>
           </p:cNvSpPr>
           <p:nvPr>
-            <p:ph type="sldNum" idx="5" sz="quarter"/>
+            <p:ph type="sldNum" sz="quarter" idx="5"/>
           </p:nvPr>
         </p:nvSpPr>
         <p:spPr/>
@@ -1136,7 +958,7 @@
 </file>
 
 <file path=ppt/notesSlides/notesSlide2.xml><?xml version="1.0" encoding="utf-8"?>
-<p:notes xmlns:a="http://schemas.openxmlformats.org/drawingml/2006/main" xmlns:p="http://schemas.openxmlformats.org/presentationml/2006/main" xmlns:r="http://schemas.openxmlformats.org/officeDocument/2006/relationships">
+<p:notes xmlns:a="http://schemas.openxmlformats.org/drawingml/2006/main" xmlns:r="http://schemas.openxmlformats.org/officeDocument/2006/relationships" xmlns:p="http://schemas.openxmlformats.org/presentationml/2006/main">
   <p:cSld>
     <p:spTree>
       <p:nvGrpSpPr>
@@ -1156,7 +978,7 @@
         <p:nvSpPr>
           <p:cNvPr id="2" name="Slide Image Placeholder 1"/>
           <p:cNvSpPr>
-            <a:spLocks noGrp="1"/>
+            <a:spLocks noGrp="1" noRot="1" noChangeAspect="1"/>
           </p:cNvSpPr>
           <p:nvPr>
             <p:ph type="sldImg" idx="2"/>
@@ -1171,7 +993,7 @@
             <a:spLocks noGrp="1"/>
           </p:cNvSpPr>
           <p:nvPr>
-            <p:ph type="body" idx="3" sz="quarter"/>
+            <p:ph type="body" sz="quarter" idx="3"/>
           </p:nvPr>
         </p:nvSpPr>
         <p:spPr/>
@@ -1183,7 +1005,9 @@
               <a:t>Training examples: a desire without a reported outcome yields unknown; explicit denial yields no; an explicit report of a purchase yields yes. Simulator truth concerns the dialogue content, not independent verification of the real world. The mined_predicates task also distinguishes an event report from completion.</a:t>
             </a:r>
           </a:p>
-          <a:p/>
+          <a:p>
+            <a:endParaRPr/>
+          </a:p>
           <a:p>
             <a:r>
               <a:t>Project sources:</a:t>
@@ -1199,7 +1023,9 @@
               <a:t>semantic_corpus/dialogue_generator/models.py</a:t>
             </a:r>
           </a:p>
-          <a:p/>
+          <a:p>
+            <a:endParaRPr/>
+          </a:p>
           <a:p>
             <a:r>
               <a:t>Implementation snapshot: 11 October 2026. Slide examples may be abbreviated for presentation.</a:t>
@@ -1214,7 +1040,7 @@
             <a:spLocks noGrp="1"/>
           </p:cNvSpPr>
           <p:nvPr>
-            <p:ph type="sldNum" idx="5" sz="quarter"/>
+            <p:ph type="sldNum" sz="quarter" idx="5"/>
           </p:nvPr>
         </p:nvSpPr>
         <p:spPr/>
@@ -1228,7 +1054,7 @@
 </file>
 
 <file path=ppt/notesSlides/notesSlide3.xml><?xml version="1.0" encoding="utf-8"?>
-<p:notes xmlns:a="http://schemas.openxmlformats.org/drawingml/2006/main" xmlns:p="http://schemas.openxmlformats.org/presentationml/2006/main" xmlns:r="http://schemas.openxmlformats.org/officeDocument/2006/relationships">
+<p:notes xmlns:a="http://schemas.openxmlformats.org/drawingml/2006/main" xmlns:r="http://schemas.openxmlformats.org/officeDocument/2006/relationships" xmlns:p="http://schemas.openxmlformats.org/presentationml/2006/main">
   <p:cSld>
     <p:spTree>
       <p:nvGrpSpPr>
@@ -1248,7 +1074,7 @@
         <p:nvSpPr>
           <p:cNvPr id="2" name="Slide Image Placeholder 1"/>
           <p:cNvSpPr>
-            <a:spLocks noGrp="1"/>
+            <a:spLocks noGrp="1" noRot="1" noChangeAspect="1"/>
           </p:cNvSpPr>
           <p:nvPr>
             <p:ph type="sldImg" idx="2"/>
@@ -1263,7 +1089,7 @@
             <a:spLocks noGrp="1"/>
           </p:cNvSpPr>
           <p:nvPr>
-            <p:ph type="body" idx="3" sz="quarter"/>
+            <p:ph type="body" sz="quarter" idx="3"/>
           </p:nvPr>
         </p:nvSpPr>
         <p:spPr/>
@@ -1275,7 +1101,9 @@
               <a:t>DialogueGenerator constructs an Episode, state transitions and a final Query. Episode.validate() replays updates and checks the answer. Generation uses stored resources without calling an LLM or HTTP teacher. Enabling the token limit additionally requires a locally cached tokenizer.</a:t>
             </a:r>
           </a:p>
-          <a:p/>
+          <a:p>
+            <a:endParaRPr/>
+          </a:p>
           <a:p>
             <a:r>
               <a:t>Project sources:</a:t>
@@ -1296,7 +1124,9 @@
               <a:t>semantic_corpus/dialogue_generator/export.py</a:t>
             </a:r>
           </a:p>
-          <a:p/>
+          <a:p>
+            <a:endParaRPr/>
+          </a:p>
           <a:p>
             <a:r>
               <a:t>Implementation snapshot: 11 October 2026. Slide examples may be abbreviated for presentation.</a:t>
@@ -1311,7 +1141,7 @@
             <a:spLocks noGrp="1"/>
           </p:cNvSpPr>
           <p:nvPr>
-            <p:ph type="sldNum" idx="5" sz="quarter"/>
+            <p:ph type="sldNum" sz="quarter" idx="5"/>
           </p:nvPr>
         </p:nvSpPr>
         <p:spPr/>
@@ -1325,7 +1155,7 @@
 </file>
 
 <file path=ppt/notesSlides/notesSlide4.xml><?xml version="1.0" encoding="utf-8"?>
-<p:notes xmlns:a="http://schemas.openxmlformats.org/drawingml/2006/main" xmlns:p="http://schemas.openxmlformats.org/presentationml/2006/main" xmlns:r="http://schemas.openxmlformats.org/officeDocument/2006/relationships">
+<p:notes xmlns:a="http://schemas.openxmlformats.org/drawingml/2006/main" xmlns:r="http://schemas.openxmlformats.org/officeDocument/2006/relationships" xmlns:p="http://schemas.openxmlformats.org/presentationml/2006/main">
   <p:cSld>
     <p:spTree>
       <p:nvGrpSpPr>
@@ -1345,7 +1175,7 @@
         <p:nvSpPr>
           <p:cNvPr id="2" name="Slide Image Placeholder 1"/>
           <p:cNvSpPr>
-            <a:spLocks noGrp="1"/>
+            <a:spLocks noGrp="1" noRot="1" noChangeAspect="1"/>
           </p:cNvSpPr>
           <p:nvPr>
             <p:ph type="sldImg" idx="2"/>
@@ -1360,7 +1190,7 @@
             <a:spLocks noGrp="1"/>
           </p:cNvSpPr>
           <p:nvPr>
-            <p:ph type="body" idx="3" sz="quarter"/>
+            <p:ph type="body" sz="quarter" idx="3"/>
           </p:nvPr>
         </p:nvSpPr>
         <p:spPr/>
@@ -1372,7 +1202,9 @@
               <a:t>The current working inventory has 4,031 available predicate entries. This is not a count of verified verb senses. BuiltInPool reads one physical shared bank at data/mined-templates/. Resources originally mined from eng-base and subsequent validated mining results accumulate there, with per-source provenance and committed byte ranges. UI mining adds validated resources to this shared pool. Syntactic validation does not establish semantic truth.</a:t>
             </a:r>
           </a:p>
-          <a:p/>
+          <a:p>
+            <a:endParaRPr/>
+          </a:p>
           <a:p>
             <a:r>
               <a:t>Project sources:</a:t>
@@ -1398,7 +1230,9 @@
               <a:t>ui/app_main/template_mining.py</a:t>
             </a:r>
           </a:p>
-          <a:p/>
+          <a:p>
+            <a:endParaRPr/>
+          </a:p>
           <a:p>
             <a:r>
               <a:t>Implementation snapshot: 11 October 2026. Slide examples may be abbreviated for presentation.</a:t>
@@ -1413,7 +1247,7 @@
             <a:spLocks noGrp="1"/>
           </p:cNvSpPr>
           <p:nvPr>
-            <p:ph type="sldNum" idx="5" sz="quarter"/>
+            <p:ph type="sldNum" sz="quarter" idx="5"/>
           </p:nvPr>
         </p:nvSpPr>
         <p:spPr/>
@@ -1427,7 +1261,7 @@
 </file>
 
 <file path=ppt/notesSlides/notesSlide5.xml><?xml version="1.0" encoding="utf-8"?>
-<p:notes xmlns:a="http://schemas.openxmlformats.org/drawingml/2006/main" xmlns:p="http://schemas.openxmlformats.org/presentationml/2006/main" xmlns:r="http://schemas.openxmlformats.org/officeDocument/2006/relationships">
+<p:notes xmlns:a="http://schemas.openxmlformats.org/drawingml/2006/main" xmlns:r="http://schemas.openxmlformats.org/officeDocument/2006/relationships" xmlns:p="http://schemas.openxmlformats.org/presentationml/2006/main">
   <p:cSld>
     <p:spTree>
       <p:nvGrpSpPr>
@@ -1447,7 +1281,7 @@
         <p:nvSpPr>
           <p:cNvPr id="2" name="Slide Image Placeholder 1"/>
           <p:cNvSpPr>
-            <a:spLocks noGrp="1"/>
+            <a:spLocks noGrp="1" noRot="1" noChangeAspect="1"/>
           </p:cNvSpPr>
           <p:nvPr>
             <p:ph type="sldImg" idx="2"/>
@@ -1462,7 +1296,7 @@
             <a:spLocks noGrp="1"/>
           </p:cNvSpPr>
           <p:nvPr>
-            <p:ph type="body" idx="3" sz="quarter"/>
+            <p:ph type="body" sz="quarter" idx="3"/>
           </p:nvPr>
         </p:nvSpPr>
         <p:spPr/>
@@ -1474,7 +1308,9 @@
               <a:t>The grouping on this slide is for presentation purposes; task codes are listed in generator.py and TASK_LABELS. The tasks are recall, correction, different_people, negation, desire_vs_done, option_reference, ambiguous_reference, unknown, suggestion_vs_done, topic_return, retraction, capability, event_scope, event_progress, event_updates, event_states and mined_predicates. The task count does not measure open-ended conversational ability.</a:t>
             </a:r>
           </a:p>
-          <a:p/>
+          <a:p>
+            <a:endParaRPr/>
+          </a:p>
           <a:p>
             <a:r>
               <a:t>Project sources:</a:t>
@@ -1490,7 +1326,9 @@
               <a:t>ui/app_main/chat_dataset.py</a:t>
             </a:r>
           </a:p>
-          <a:p/>
+          <a:p>
+            <a:endParaRPr/>
+          </a:p>
           <a:p>
             <a:r>
               <a:t>Implementation snapshot: 11 October 2026. Slide examples may be abbreviated for presentation.</a:t>
@@ -1505,7 +1343,7 @@
             <a:spLocks noGrp="1"/>
           </p:cNvSpPr>
           <p:nvPr>
-            <p:ph type="sldNum" idx="5" sz="quarter"/>
+            <p:ph type="sldNum" sz="quarter" idx="5"/>
           </p:nvPr>
         </p:nvSpPr>
         <p:spPr/>
@@ -1519,7 +1357,7 @@
 </file>
 
 <file path=ppt/notesSlides/notesSlide6.xml><?xml version="1.0" encoding="utf-8"?>
-<p:notes xmlns:a="http://schemas.openxmlformats.org/drawingml/2006/main" xmlns:p="http://schemas.openxmlformats.org/presentationml/2006/main" xmlns:r="http://schemas.openxmlformats.org/officeDocument/2006/relationships">
+<p:notes xmlns:a="http://schemas.openxmlformats.org/drawingml/2006/main" xmlns:r="http://schemas.openxmlformats.org/officeDocument/2006/relationships" xmlns:p="http://schemas.openxmlformats.org/presentationml/2006/main">
   <p:cSld>
     <p:spTree>
       <p:nvGrpSpPr>
@@ -1539,7 +1377,7 @@
         <p:nvSpPr>
           <p:cNvPr id="2" name="Slide Image Placeholder 1"/>
           <p:cNvSpPr>
-            <a:spLocks noGrp="1"/>
+            <a:spLocks noGrp="1" noRot="1" noChangeAspect="1"/>
           </p:cNvSpPr>
           <p:nvPr>
             <p:ph type="sldImg" idx="2"/>
@@ -1554,7 +1392,7 @@
             <a:spLocks noGrp="1"/>
           </p:cNvSpPr>
           <p:nvPr>
-            <p:ph type="body" idx="3" sz="quarter"/>
+            <p:ph type="body" sz="quarter" idx="3"/>
           </p:nvPr>
         </p:nvSpPr>
         <p:spPr/>
@@ -1566,7 +1404,9 @@
               <a:t>This diagram is explanatory, not a literal serialization of Event. Event stores a predicate, typed arguments, temporal context, operators, phase and tense. For mined events, reported denotes a past report of a predication; it does not guarantee achievement of an endpoint. Evidence references and IDs are added by code.</a:t>
             </a:r>
           </a:p>
-          <a:p/>
+          <a:p>
+            <a:endParaRPr/>
+          </a:p>
           <a:p>
             <a:r>
               <a:t>Project sources:</a:t>
@@ -1587,7 +1427,9 @@
               <a:t>semantic_corpus/dialogue_generator/mined_scenarios.py</a:t>
             </a:r>
           </a:p>
-          <a:p/>
+          <a:p>
+            <a:endParaRPr/>
+          </a:p>
           <a:p>
             <a:r>
               <a:t>Implementation snapshot: 11 October 2026. Slide examples may be abbreviated for presentation.</a:t>
@@ -1602,7 +1444,7 @@
             <a:spLocks noGrp="1"/>
           </p:cNvSpPr>
           <p:nvPr>
-            <p:ph type="sldNum" idx="5" sz="quarter"/>
+            <p:ph type="sldNum" sz="quarter" idx="5"/>
           </p:nvPr>
         </p:nvSpPr>
         <p:spPr/>
@@ -1616,7 +1458,7 @@
 </file>
 
 <file path=ppt/notesSlides/notesSlide7.xml><?xml version="1.0" encoding="utf-8"?>
-<p:notes xmlns:a="http://schemas.openxmlformats.org/drawingml/2006/main" xmlns:p="http://schemas.openxmlformats.org/presentationml/2006/main" xmlns:r="http://schemas.openxmlformats.org/officeDocument/2006/relationships">
+<p:notes xmlns:a="http://schemas.openxmlformats.org/drawingml/2006/main" xmlns:r="http://schemas.openxmlformats.org/officeDocument/2006/relationships" xmlns:p="http://schemas.openxmlformats.org/presentationml/2006/main">
   <p:cSld>
     <p:spTree>
       <p:nvGrpSpPr>
@@ -1636,7 +1478,7 @@
         <p:nvSpPr>
           <p:cNvPr id="2" name="Slide Image Placeholder 1"/>
           <p:cNvSpPr>
-            <a:spLocks noGrp="1"/>
+            <a:spLocks noGrp="1" noRot="1" noChangeAspect="1"/>
           </p:cNvSpPr>
           <p:nvPr>
             <p:ph type="sldImg" idx="2"/>
@@ -1651,7 +1493,7 @@
             <a:spLocks noGrp="1"/>
           </p:cNvSpPr>
           <p:nvPr>
-            <p:ph type="body" idx="3" sz="quarter"/>
+            <p:ph type="body" sz="quarter" idx="3"/>
           </p:nvPr>
         </p:nvSpPr>
         <p:spPr/>
@@ -1663,7 +1505,9 @@
               <a:t>These examples illustrate supported constructions, not exhaustive coverage for every verb. Handwritten event_* scenarios select tenses and operator profiles. For mined_predicates, recognized source scope, passive voice and independent clauses can be retained. General Synthetic corpus templates are not expanded into all tenses by default.</a:t>
             </a:r>
           </a:p>
-          <a:p/>
+          <a:p>
+            <a:endParaRPr/>
+          </a:p>
           <a:p>
             <a:r>
               <a:t>Project sources:</a:t>
@@ -1684,7 +1528,9 @@
               <a:t>semantic_corpus/dialogue_generator/mined_scope.py</a:t>
             </a:r>
           </a:p>
-          <a:p/>
+          <a:p>
+            <a:endParaRPr/>
+          </a:p>
           <a:p>
             <a:r>
               <a:t>Implementation snapshot: 11 October 2026. Slide examples may be abbreviated for presentation.</a:t>
@@ -1699,7 +1545,7 @@
             <a:spLocks noGrp="1"/>
           </p:cNvSpPr>
           <p:nvPr>
-            <p:ph type="sldNum" idx="5" sz="quarter"/>
+            <p:ph type="sldNum" sz="quarter" idx="5"/>
           </p:nvPr>
         </p:nvSpPr>
         <p:spPr/>
@@ -1713,7 +1559,7 @@
 </file>
 
 <file path=ppt/notesSlides/notesSlide8.xml><?xml version="1.0" encoding="utf-8"?>
-<p:notes xmlns:a="http://schemas.openxmlformats.org/drawingml/2006/main" xmlns:p="http://schemas.openxmlformats.org/presentationml/2006/main" xmlns:r="http://schemas.openxmlformats.org/officeDocument/2006/relationships">
+<p:notes xmlns:a="http://schemas.openxmlformats.org/drawingml/2006/main" xmlns:r="http://schemas.openxmlformats.org/officeDocument/2006/relationships" xmlns:p="http://schemas.openxmlformats.org/presentationml/2006/main">
   <p:cSld>
     <p:spTree>
       <p:nvGrpSpPr>
@@ -1733,7 +1579,7 @@
         <p:nvSpPr>
           <p:cNvPr id="2" name="Slide Image Placeholder 1"/>
           <p:cNvSpPr>
-            <a:spLocks noGrp="1"/>
+            <a:spLocks noGrp="1" noRot="1" noChangeAspect="1"/>
           </p:cNvSpPr>
           <p:nvPr>
             <p:ph type="sldImg" idx="2"/>
@@ -1748,7 +1594,7 @@
             <a:spLocks noGrp="1"/>
           </p:cNvSpPr>
           <p:nvPr>
-            <p:ph type="body" idx="3" sz="quarter"/>
+            <p:ph type="body" sz="quarter" idx="3"/>
           </p:nvPr>
         </p:nvSpPr>
         <p:spPr/>
@@ -1760,7 +1606,9 @@
               <a:t>Memory and History are paired tasks: the same Episode and final answer, but different input context. Memory receives simulator-provided reference state (an oracle), so Memory quality alone does not test extraction. Extraction is exported per transition and deduplicated separately; it can have more rows than episodes. All views contain system/user/assistant messages.</a:t>
             </a:r>
           </a:p>
-          <a:p/>
+          <a:p>
+            <a:endParaRPr/>
+          </a:p>
           <a:p>
             <a:r>
               <a:t>Project sources:</a:t>
@@ -1776,7 +1624,9 @@
               <a:t>semantic_corpus/dialogue_generator/export.py:extraction_row</a:t>
             </a:r>
           </a:p>
-          <a:p/>
+          <a:p>
+            <a:endParaRPr/>
+          </a:p>
           <a:p>
             <a:r>
               <a:t>Implementation snapshot: 11 October 2026. Slide examples may be abbreviated for presentation.</a:t>
@@ -1791,7 +1641,7 @@
             <a:spLocks noGrp="1"/>
           </p:cNvSpPr>
           <p:nvPr>
-            <p:ph type="sldNum" idx="5" sz="quarter"/>
+            <p:ph type="sldNum" sz="quarter" idx="5"/>
           </p:nvPr>
         </p:nvSpPr>
         <p:spPr/>
@@ -1805,7 +1655,7 @@
 </file>
 
 <file path=ppt/notesSlides/notesSlide9.xml><?xml version="1.0" encoding="utf-8"?>
-<p:notes xmlns:a="http://schemas.openxmlformats.org/drawingml/2006/main" xmlns:p="http://schemas.openxmlformats.org/presentationml/2006/main" xmlns:r="http://schemas.openxmlformats.org/officeDocument/2006/relationships">
+<p:notes xmlns:a="http://schemas.openxmlformats.org/drawingml/2006/main" xmlns:r="http://schemas.openxmlformats.org/officeDocument/2006/relationships" xmlns:p="http://schemas.openxmlformats.org/presentationml/2006/main">
   <p:cSld>
     <p:spTree>
       <p:nvGrpSpPr>
@@ -1825,7 +1675,7 @@
         <p:nvSpPr>
           <p:cNvPr id="2" name="Slide Image Placeholder 1"/>
           <p:cNvSpPr>
-            <a:spLocks noGrp="1"/>
+            <a:spLocks noGrp="1" noRot="1" noChangeAspect="1"/>
           </p:cNvSpPr>
           <p:nvPr>
             <p:ph type="sldImg" idx="2"/>
@@ -1840,7 +1690,7 @@
             <a:spLocks noGrp="1"/>
           </p:cNvSpPr>
           <p:nvPr>
-            <p:ph type="body" idx="3" sz="quarter"/>
+            <p:ph type="body" sz="quarter" idx="3"/>
           </p:nvPr>
         </p:nvSpPr>
         <p:spPr/>
@@ -1852,7 +1702,9 @@
               <a:t>The utterance and target were taken from DialogueGenerator/desire_vs_done when preparing the original presentation. decode_update checks that the command text produces exactly the reference delta. Only the relevant utterance is shown; full input also includes Current memory, Assistant actions and Last assistant message. This illustrates the original flat task. Typed events use EVENT/MINED; complex quotations use QUOTE.</a:t>
             </a:r>
           </a:p>
-          <a:p/>
+          <a:p>
+            <a:endParaRPr/>
+          </a:p>
           <a:p>
             <a:r>
               <a:t>Project sources:</a:t>
@@ -1868,7 +1720,9 @@
               <a:t>semantic_corpus/dialogue_generator/export.py:extraction_row</a:t>
             </a:r>
           </a:p>
-          <a:p/>
+          <a:p>
+            <a:endParaRPr/>
+          </a:p>
           <a:p>
             <a:r>
               <a:t>Implementation snapshot: 11 October 2026. Slide examples may be abbreviated for presentation.</a:t>
@@ -1883,7 +1737,7 @@
             <a:spLocks noGrp="1"/>
           </p:cNvSpPr>
           <p:nvPr>
-            <p:ph type="sldNum" idx="5" sz="quarter"/>
+            <p:ph type="sldNum" sz="quarter" idx="5"/>
           </p:nvPr>
         </p:nvSpPr>
         <p:spPr/>
@@ -1934,10 +1788,9 @@
           <a:lstStyle/>
           <a:p>
             <a:r>
-              <a:rPr lang="en-US" smtClean="0"/>
+              <a:rPr lang="en-US"/>
               <a:t>Click to edit Master title style</a:t>
             </a:r>
-            <a:endParaRPr lang="en-US"/>
           </a:p>
         </p:txBody>
       </p:sp>
@@ -2053,10 +1906,9 @@
           </a:lstStyle>
           <a:p>
             <a:r>
-              <a:rPr lang="en-US" smtClean="0"/>
+              <a:rPr lang="en-US"/>
               <a:t>Click to edit Master subtitle style</a:t>
             </a:r>
-            <a:endParaRPr lang="en-US"/>
           </a:p>
         </p:txBody>
       </p:sp>
@@ -2077,7 +1929,7 @@
           <a:p>
             <a:fld id="{5BCAD085-E8A6-8845-BD4E-CB4CCA059FC4}" type="datetimeFigureOut">
               <a:rPr lang="en-US" smtClean="0"/>
-              <a:t>1/27/13</a:t>
+              <a:t>10/12/2026</a:t>
             </a:fld>
             <a:endParaRPr lang="en-US"/>
           </a:p>
@@ -2171,10 +2023,9 @@
           <a:lstStyle/>
           <a:p>
             <a:r>
-              <a:rPr lang="en-US" smtClean="0"/>
+              <a:rPr lang="en-US"/>
               <a:t>Click to edit Master title style</a:t>
             </a:r>
-            <a:endParaRPr lang="en-US"/>
           </a:p>
         </p:txBody>
       </p:sp>
@@ -2195,38 +2046,37 @@
           <a:p>
             <a:pPr lvl="0"/>
             <a:r>
-              <a:rPr lang="en-US" smtClean="0"/>
+              <a:rPr lang="en-US"/>
               <a:t>Click to edit Master text styles</a:t>
             </a:r>
           </a:p>
           <a:p>
             <a:pPr lvl="1"/>
             <a:r>
-              <a:rPr lang="en-US" smtClean="0"/>
+              <a:rPr lang="en-US"/>
               <a:t>Second level</a:t>
             </a:r>
           </a:p>
           <a:p>
             <a:pPr lvl="2"/>
             <a:r>
-              <a:rPr lang="en-US" smtClean="0"/>
+              <a:rPr lang="en-US"/>
               <a:t>Third level</a:t>
             </a:r>
           </a:p>
           <a:p>
             <a:pPr lvl="3"/>
             <a:r>
-              <a:rPr lang="en-US" smtClean="0"/>
+              <a:rPr lang="en-US"/>
               <a:t>Fourth level</a:t>
             </a:r>
           </a:p>
           <a:p>
             <a:pPr lvl="4"/>
             <a:r>
-              <a:rPr lang="en-US" smtClean="0"/>
+              <a:rPr lang="en-US"/>
               <a:t>Fifth level</a:t>
             </a:r>
-            <a:endParaRPr lang="en-US"/>
           </a:p>
         </p:txBody>
       </p:sp>
@@ -2247,7 +2097,7 @@
           <a:p>
             <a:fld id="{5BCAD085-E8A6-8845-BD4E-CB4CCA059FC4}" type="datetimeFigureOut">
               <a:rPr lang="en-US" smtClean="0"/>
-              <a:t>1/27/13</a:t>
+              <a:t>10/12/2026</a:t>
             </a:fld>
             <a:endParaRPr lang="en-US"/>
           </a:p>
@@ -2346,10 +2196,9 @@
           <a:lstStyle/>
           <a:p>
             <a:r>
-              <a:rPr lang="en-US" smtClean="0"/>
+              <a:rPr lang="en-US"/>
               <a:t>Click to edit Master title style</a:t>
             </a:r>
-            <a:endParaRPr lang="en-US"/>
           </a:p>
         </p:txBody>
       </p:sp>
@@ -2375,38 +2224,37 @@
           <a:p>
             <a:pPr lvl="0"/>
             <a:r>
-              <a:rPr lang="en-US" smtClean="0"/>
+              <a:rPr lang="en-US"/>
               <a:t>Click to edit Master text styles</a:t>
             </a:r>
           </a:p>
           <a:p>
             <a:pPr lvl="1"/>
             <a:r>
-              <a:rPr lang="en-US" smtClean="0"/>
+              <a:rPr lang="en-US"/>
               <a:t>Second level</a:t>
             </a:r>
           </a:p>
           <a:p>
             <a:pPr lvl="2"/>
             <a:r>
-              <a:rPr lang="en-US" smtClean="0"/>
+              <a:rPr lang="en-US"/>
               <a:t>Third level</a:t>
             </a:r>
           </a:p>
           <a:p>
             <a:pPr lvl="3"/>
             <a:r>
-              <a:rPr lang="en-US" smtClean="0"/>
+              <a:rPr lang="en-US"/>
               <a:t>Fourth level</a:t>
             </a:r>
           </a:p>
           <a:p>
             <a:pPr lvl="4"/>
             <a:r>
-              <a:rPr lang="en-US" smtClean="0"/>
+              <a:rPr lang="en-US"/>
               <a:t>Fifth level</a:t>
             </a:r>
-            <a:endParaRPr lang="en-US"/>
           </a:p>
         </p:txBody>
       </p:sp>
@@ -2427,7 +2275,7 @@
           <a:p>
             <a:fld id="{5BCAD085-E8A6-8845-BD4E-CB4CCA059FC4}" type="datetimeFigureOut">
               <a:rPr lang="en-US" smtClean="0"/>
-              <a:t>1/27/13</a:t>
+              <a:t>10/12/2026</a:t>
             </a:fld>
             <a:endParaRPr lang="en-US"/>
           </a:p>
@@ -2521,10 +2369,9 @@
           <a:lstStyle/>
           <a:p>
             <a:r>
-              <a:rPr lang="en-US" smtClean="0"/>
+              <a:rPr lang="en-US"/>
               <a:t>Click to edit Master title style</a:t>
             </a:r>
-            <a:endParaRPr lang="en-US"/>
           </a:p>
         </p:txBody>
       </p:sp>
@@ -2545,38 +2392,37 @@
           <a:p>
             <a:pPr lvl="0"/>
             <a:r>
-              <a:rPr lang="en-US" smtClean="0"/>
+              <a:rPr lang="en-US"/>
               <a:t>Click to edit Master text styles</a:t>
             </a:r>
           </a:p>
           <a:p>
             <a:pPr lvl="1"/>
             <a:r>
-              <a:rPr lang="en-US" smtClean="0"/>
+              <a:rPr lang="en-US"/>
               <a:t>Second level</a:t>
             </a:r>
           </a:p>
           <a:p>
             <a:pPr lvl="2"/>
             <a:r>
-              <a:rPr lang="en-US" smtClean="0"/>
+              <a:rPr lang="en-US"/>
               <a:t>Third level</a:t>
             </a:r>
           </a:p>
           <a:p>
             <a:pPr lvl="3"/>
             <a:r>
-              <a:rPr lang="en-US" smtClean="0"/>
+              <a:rPr lang="en-US"/>
               <a:t>Fourth level</a:t>
             </a:r>
           </a:p>
           <a:p>
             <a:pPr lvl="4"/>
             <a:r>
-              <a:rPr lang="en-US" smtClean="0"/>
+              <a:rPr lang="en-US"/>
               <a:t>Fifth level</a:t>
             </a:r>
-            <a:endParaRPr lang="en-US"/>
           </a:p>
         </p:txBody>
       </p:sp>
@@ -2597,7 +2443,7 @@
           <a:p>
             <a:fld id="{5BCAD085-E8A6-8845-BD4E-CB4CCA059FC4}" type="datetimeFigureOut">
               <a:rPr lang="en-US" smtClean="0"/>
-              <a:t>1/27/13</a:t>
+              <a:t>10/12/2026</a:t>
             </a:fld>
             <a:endParaRPr lang="en-US"/>
           </a:p>
@@ -2700,10 +2546,9 @@
           </a:lstStyle>
           <a:p>
             <a:r>
-              <a:rPr lang="en-US" smtClean="0"/>
+              <a:rPr lang="en-US"/>
               <a:t>Click to edit Master title style</a:t>
             </a:r>
-            <a:endParaRPr lang="en-US"/>
           </a:p>
         </p:txBody>
       </p:sp>
@@ -2820,7 +2665,7 @@
           <a:p>
             <a:pPr lvl="0"/>
             <a:r>
-              <a:rPr lang="en-US" smtClean="0"/>
+              <a:rPr lang="en-US"/>
               <a:t>Click to edit Master text styles</a:t>
             </a:r>
           </a:p>
@@ -2843,7 +2688,7 @@
           <a:p>
             <a:fld id="{5BCAD085-E8A6-8845-BD4E-CB4CCA059FC4}" type="datetimeFigureOut">
               <a:rPr lang="en-US" smtClean="0"/>
-              <a:t>1/27/13</a:t>
+              <a:t>10/12/2026</a:t>
             </a:fld>
             <a:endParaRPr lang="en-US"/>
           </a:p>
@@ -2937,10 +2782,9 @@
           <a:lstStyle/>
           <a:p>
             <a:r>
-              <a:rPr lang="en-US" smtClean="0"/>
+              <a:rPr lang="en-US"/>
               <a:t>Click to edit Master title style</a:t>
             </a:r>
-            <a:endParaRPr lang="en-US"/>
           </a:p>
         </p:txBody>
       </p:sp>
@@ -2994,38 +2838,37 @@
           <a:p>
             <a:pPr lvl="0"/>
             <a:r>
-              <a:rPr lang="en-US" smtClean="0"/>
+              <a:rPr lang="en-US"/>
               <a:t>Click to edit Master text styles</a:t>
             </a:r>
           </a:p>
           <a:p>
             <a:pPr lvl="1"/>
             <a:r>
-              <a:rPr lang="en-US" smtClean="0"/>
+              <a:rPr lang="en-US"/>
               <a:t>Second level</a:t>
             </a:r>
           </a:p>
           <a:p>
             <a:pPr lvl="2"/>
             <a:r>
-              <a:rPr lang="en-US" smtClean="0"/>
+              <a:rPr lang="en-US"/>
               <a:t>Third level</a:t>
             </a:r>
           </a:p>
           <a:p>
             <a:pPr lvl="3"/>
             <a:r>
-              <a:rPr lang="en-US" smtClean="0"/>
+              <a:rPr lang="en-US"/>
               <a:t>Fourth level</a:t>
             </a:r>
           </a:p>
           <a:p>
             <a:pPr lvl="4"/>
             <a:r>
-              <a:rPr lang="en-US" smtClean="0"/>
+              <a:rPr lang="en-US"/>
               <a:t>Fifth level</a:t>
             </a:r>
-            <a:endParaRPr lang="en-US"/>
           </a:p>
         </p:txBody>
       </p:sp>
@@ -3079,38 +2922,37 @@
           <a:p>
             <a:pPr lvl="0"/>
             <a:r>
-              <a:rPr lang="en-US" smtClean="0"/>
+              <a:rPr lang="en-US"/>
               <a:t>Click to edit Master text styles</a:t>
             </a:r>
           </a:p>
           <a:p>
             <a:pPr lvl="1"/>
             <a:r>
-              <a:rPr lang="en-US" smtClean="0"/>
+              <a:rPr lang="en-US"/>
               <a:t>Second level</a:t>
             </a:r>
           </a:p>
           <a:p>
             <a:pPr lvl="2"/>
             <a:r>
-              <a:rPr lang="en-US" smtClean="0"/>
+              <a:rPr lang="en-US"/>
               <a:t>Third level</a:t>
             </a:r>
           </a:p>
           <a:p>
             <a:pPr lvl="3"/>
             <a:r>
-              <a:rPr lang="en-US" smtClean="0"/>
+              <a:rPr lang="en-US"/>
               <a:t>Fourth level</a:t>
             </a:r>
           </a:p>
           <a:p>
             <a:pPr lvl="4"/>
             <a:r>
-              <a:rPr lang="en-US" smtClean="0"/>
+              <a:rPr lang="en-US"/>
               <a:t>Fifth level</a:t>
             </a:r>
-            <a:endParaRPr lang="en-US"/>
           </a:p>
         </p:txBody>
       </p:sp>
@@ -3131,7 +2973,7 @@
           <a:p>
             <a:fld id="{5BCAD085-E8A6-8845-BD4E-CB4CCA059FC4}" type="datetimeFigureOut">
               <a:rPr lang="en-US" smtClean="0"/>
-              <a:t>1/27/13</a:t>
+              <a:t>10/12/2026</a:t>
             </a:fld>
             <a:endParaRPr lang="en-US"/>
           </a:p>
@@ -3229,10 +3071,9 @@
           </a:lstStyle>
           <a:p>
             <a:r>
-              <a:rPr lang="en-US" smtClean="0"/>
+              <a:rPr lang="en-US"/>
               <a:t>Click to edit Master title style</a:t>
             </a:r>
-            <a:endParaRPr lang="en-US"/>
           </a:p>
         </p:txBody>
       </p:sp>
@@ -3295,7 +3136,7 @@
           <a:p>
             <a:pPr lvl="0"/>
             <a:r>
-              <a:rPr lang="en-US" smtClean="0"/>
+              <a:rPr lang="en-US"/>
               <a:t>Click to edit Master text styles</a:t>
             </a:r>
           </a:p>
@@ -3351,38 +3192,37 @@
           <a:p>
             <a:pPr lvl="0"/>
             <a:r>
-              <a:rPr lang="en-US" smtClean="0"/>
+              <a:rPr lang="en-US"/>
               <a:t>Click to edit Master text styles</a:t>
             </a:r>
           </a:p>
           <a:p>
             <a:pPr lvl="1"/>
             <a:r>
-              <a:rPr lang="en-US" smtClean="0"/>
+              <a:rPr lang="en-US"/>
               <a:t>Second level</a:t>
             </a:r>
           </a:p>
           <a:p>
             <a:pPr lvl="2"/>
             <a:r>
-              <a:rPr lang="en-US" smtClean="0"/>
+              <a:rPr lang="en-US"/>
               <a:t>Third level</a:t>
             </a:r>
           </a:p>
           <a:p>
             <a:pPr lvl="3"/>
             <a:r>
-              <a:rPr lang="en-US" smtClean="0"/>
+              <a:rPr lang="en-US"/>
               <a:t>Fourth level</a:t>
             </a:r>
           </a:p>
           <a:p>
             <a:pPr lvl="4"/>
             <a:r>
-              <a:rPr lang="en-US" smtClean="0"/>
+              <a:rPr lang="en-US"/>
               <a:t>Fifth level</a:t>
             </a:r>
-            <a:endParaRPr lang="en-US"/>
           </a:p>
         </p:txBody>
       </p:sp>
@@ -3445,7 +3285,7 @@
           <a:p>
             <a:pPr lvl="0"/>
             <a:r>
-              <a:rPr lang="en-US" smtClean="0"/>
+              <a:rPr lang="en-US"/>
               <a:t>Click to edit Master text styles</a:t>
             </a:r>
           </a:p>
@@ -3501,38 +3341,37 @@
           <a:p>
             <a:pPr lvl="0"/>
             <a:r>
-              <a:rPr lang="en-US" smtClean="0"/>
+              <a:rPr lang="en-US"/>
               <a:t>Click to edit Master text styles</a:t>
             </a:r>
           </a:p>
           <a:p>
             <a:pPr lvl="1"/>
             <a:r>
-              <a:rPr lang="en-US" smtClean="0"/>
+              <a:rPr lang="en-US"/>
               <a:t>Second level</a:t>
             </a:r>
           </a:p>
           <a:p>
             <a:pPr lvl="2"/>
             <a:r>
-              <a:rPr lang="en-US" smtClean="0"/>
+              <a:rPr lang="en-US"/>
               <a:t>Third level</a:t>
             </a:r>
           </a:p>
           <a:p>
             <a:pPr lvl="3"/>
             <a:r>
-              <a:rPr lang="en-US" smtClean="0"/>
+              <a:rPr lang="en-US"/>
               <a:t>Fourth level</a:t>
             </a:r>
           </a:p>
           <a:p>
             <a:pPr lvl="4"/>
             <a:r>
-              <a:rPr lang="en-US" smtClean="0"/>
+              <a:rPr lang="en-US"/>
               <a:t>Fifth level</a:t>
             </a:r>
-            <a:endParaRPr lang="en-US"/>
           </a:p>
         </p:txBody>
       </p:sp>
@@ -3553,7 +3392,7 @@
           <a:p>
             <a:fld id="{5BCAD085-E8A6-8845-BD4E-CB4CCA059FC4}" type="datetimeFigureOut">
               <a:rPr lang="en-US" smtClean="0"/>
-              <a:t>1/27/13</a:t>
+              <a:t>10/12/2026</a:t>
             </a:fld>
             <a:endParaRPr lang="en-US"/>
           </a:p>
@@ -3647,10 +3486,9 @@
           <a:lstStyle/>
           <a:p>
             <a:r>
-              <a:rPr lang="en-US" smtClean="0"/>
+              <a:rPr lang="en-US"/>
               <a:t>Click to edit Master title style</a:t>
             </a:r>
-            <a:endParaRPr lang="en-US"/>
           </a:p>
         </p:txBody>
       </p:sp>
@@ -3671,7 +3509,7 @@
           <a:p>
             <a:fld id="{5BCAD085-E8A6-8845-BD4E-CB4CCA059FC4}" type="datetimeFigureOut">
               <a:rPr lang="en-US" smtClean="0"/>
-              <a:t>1/27/13</a:t>
+              <a:t>10/12/2026</a:t>
             </a:fld>
             <a:endParaRPr lang="en-US"/>
           </a:p>
@@ -3766,7 +3604,7 @@
           <a:p>
             <a:fld id="{5BCAD085-E8A6-8845-BD4E-CB4CCA059FC4}" type="datetimeFigureOut">
               <a:rPr lang="en-US" smtClean="0"/>
-              <a:t>1/27/13</a:t>
+              <a:t>10/12/2026</a:t>
             </a:fld>
             <a:endParaRPr lang="en-US"/>
           </a:p>
@@ -3869,10 +3707,9 @@
           </a:lstStyle>
           <a:p>
             <a:r>
-              <a:rPr lang="en-US" smtClean="0"/>
+              <a:rPr lang="en-US"/>
               <a:t>Click to edit Master title style</a:t>
             </a:r>
-            <a:endParaRPr lang="en-US"/>
           </a:p>
         </p:txBody>
       </p:sp>
@@ -3926,38 +3763,37 @@
           <a:p>
             <a:pPr lvl="0"/>
             <a:r>
-              <a:rPr lang="en-US" smtClean="0"/>
+              <a:rPr lang="en-US"/>
               <a:t>Click to edit Master text styles</a:t>
             </a:r>
           </a:p>
           <a:p>
             <a:pPr lvl="1"/>
             <a:r>
-              <a:rPr lang="en-US" smtClean="0"/>
+              <a:rPr lang="en-US"/>
               <a:t>Second level</a:t>
             </a:r>
           </a:p>
           <a:p>
             <a:pPr lvl="2"/>
             <a:r>
-              <a:rPr lang="en-US" smtClean="0"/>
+              <a:rPr lang="en-US"/>
               <a:t>Third level</a:t>
             </a:r>
           </a:p>
           <a:p>
             <a:pPr lvl="3"/>
             <a:r>
-              <a:rPr lang="en-US" smtClean="0"/>
+              <a:rPr lang="en-US"/>
               <a:t>Fourth level</a:t>
             </a:r>
           </a:p>
           <a:p>
             <a:pPr lvl="4"/>
             <a:r>
-              <a:rPr lang="en-US" smtClean="0"/>
+              <a:rPr lang="en-US"/>
               <a:t>Fifth level</a:t>
             </a:r>
-            <a:endParaRPr lang="en-US"/>
           </a:p>
         </p:txBody>
       </p:sp>
@@ -4020,7 +3856,7 @@
           <a:p>
             <a:pPr lvl="0"/>
             <a:r>
-              <a:rPr lang="en-US" smtClean="0"/>
+              <a:rPr lang="en-US"/>
               <a:t>Click to edit Master text styles</a:t>
             </a:r>
           </a:p>
@@ -4043,7 +3879,7 @@
           <a:p>
             <a:fld id="{5BCAD085-E8A6-8845-BD4E-CB4CCA059FC4}" type="datetimeFigureOut">
               <a:rPr lang="en-US" smtClean="0"/>
-              <a:t>1/27/13</a:t>
+              <a:t>10/12/2026</a:t>
             </a:fld>
             <a:endParaRPr lang="en-US"/>
           </a:p>
@@ -4146,10 +3982,9 @@
           </a:lstStyle>
           <a:p>
             <a:r>
-              <a:rPr lang="en-US" smtClean="0"/>
+              <a:rPr lang="en-US"/>
               <a:t>Click to edit Master title style</a:t>
             </a:r>
-            <a:endParaRPr lang="en-US"/>
           </a:p>
         </p:txBody>
       </p:sp>
@@ -4273,7 +4108,7 @@
           <a:p>
             <a:pPr lvl="0"/>
             <a:r>
-              <a:rPr lang="en-US" smtClean="0"/>
+              <a:rPr lang="en-US"/>
               <a:t>Click to edit Master text styles</a:t>
             </a:r>
           </a:p>
@@ -4296,7 +4131,7 @@
           <a:p>
             <a:fld id="{5BCAD085-E8A6-8845-BD4E-CB4CCA059FC4}" type="datetimeFigureOut">
               <a:rPr lang="en-US" smtClean="0"/>
-              <a:t>1/27/13</a:t>
+              <a:t>10/12/2026</a:t>
             </a:fld>
             <a:endParaRPr lang="en-US"/>
           </a:p>
@@ -4405,10 +4240,9 @@
           <a:lstStyle/>
           <a:p>
             <a:r>
-              <a:rPr lang="en-US" smtClean="0"/>
+              <a:rPr lang="en-US"/>
               <a:t>Click to edit Master title style</a:t>
             </a:r>
-            <a:endParaRPr lang="en-US"/>
           </a:p>
         </p:txBody>
       </p:sp>
@@ -4439,38 +4273,37 @@
           <a:p>
             <a:pPr lvl="0"/>
             <a:r>
-              <a:rPr lang="en-US" smtClean="0"/>
+              <a:rPr lang="en-US"/>
               <a:t>Click to edit Master text styles</a:t>
             </a:r>
           </a:p>
           <a:p>
             <a:pPr lvl="1"/>
             <a:r>
-              <a:rPr lang="en-US" smtClean="0"/>
+              <a:rPr lang="en-US"/>
               <a:t>Second level</a:t>
             </a:r>
           </a:p>
           <a:p>
             <a:pPr lvl="2"/>
             <a:r>
-              <a:rPr lang="en-US" smtClean="0"/>
+              <a:rPr lang="en-US"/>
               <a:t>Third level</a:t>
             </a:r>
           </a:p>
           <a:p>
             <a:pPr lvl="3"/>
             <a:r>
-              <a:rPr lang="en-US" smtClean="0"/>
+              <a:rPr lang="en-US"/>
               <a:t>Fourth level</a:t>
             </a:r>
           </a:p>
           <a:p>
             <a:pPr lvl="4"/>
             <a:r>
-              <a:rPr lang="en-US" smtClean="0"/>
+              <a:rPr lang="en-US"/>
               <a:t>Fifth level</a:t>
             </a:r>
-            <a:endParaRPr lang="en-US"/>
           </a:p>
         </p:txBody>
       </p:sp>
@@ -4509,7 +4342,7 @@
           <a:p>
             <a:fld id="{5BCAD085-E8A6-8845-BD4E-CB4CCA059FC4}" type="datetimeFigureOut">
               <a:rPr lang="en-US" smtClean="0"/>
-              <a:t>1/27/13</a:t>
+              <a:t>10/12/2026</a:t>
             </a:fld>
             <a:endParaRPr lang="en-US"/>
           </a:p>
@@ -4868,7 +4701,7 @@
 </file>
 
 <file path=ppt/slides/slide1.xml><?xml version="1.0" encoding="utf-8"?>
-<p:sld xmlns:a="http://schemas.openxmlformats.org/drawingml/2006/main" xmlns:p="http://schemas.openxmlformats.org/presentationml/2006/main" xmlns:r="http://schemas.openxmlformats.org/officeDocument/2006/relationships">
+<p:sld xmlns:a="http://schemas.openxmlformats.org/drawingml/2006/main" xmlns:r="http://schemas.openxmlformats.org/officeDocument/2006/relationships" xmlns:p="http://schemas.openxmlformats.org/presentationml/2006/main">
   <p:cSld>
     <p:bg>
       <p:bgPr>
@@ -4884,7 +4717,14 @@
         <p:cNvGrpSpPr/>
         <p:nvPr/>
       </p:nvGrpSpPr>
-      <p:grpSpPr/>
+      <p:grpSpPr>
+        <a:xfrm>
+          <a:off x="0" y="0"/>
+          <a:ext cx="0" cy="0"/>
+          <a:chOff x="0" y="0"/>
+          <a:chExt cx="0" cy="0"/>
+        </a:xfrm>
+      </p:grpSpPr>
       <p:sp>
         <p:nvSpPr>
           <p:cNvPr id="2" name="TextBox 1"/>
@@ -4894,15 +4734,15 @@
         <p:spPr>
           <a:xfrm>
             <a:off x="585216" y="365760"/>
-            <a:ext cx="10789920" cy="228600"/>
-          </a:xfrm>
-          <a:prstGeom prst="rect">
-            <a:avLst/>
-          </a:prstGeom>
-          <a:noFill/>
-        </p:spPr>
-        <p:txBody>
-          <a:bodyPr wrap="square" lIns="0" rIns="0" tIns="0" bIns="0" anchor="t">
+            <a:ext cx="10789920" cy="161391"/>
+          </a:xfrm>
+          <a:prstGeom prst="rect">
+            <a:avLst/>
+          </a:prstGeom>
+          <a:noFill/>
+        </p:spPr>
+        <p:txBody>
+          <a:bodyPr wrap="square" lIns="0" tIns="0" rIns="0" bIns="0" anchor="t">
             <a:spAutoFit/>
           </a:bodyPr>
           <a:lstStyle/>
@@ -4925,7 +4765,8 @@
               </a:defRPr>
             </a:pPr>
             <a:r>
-              <a:t>QA-SRL GEN PROJECT · 11 OCTOBER 2026</a:t>
+              <a:rPr dirty="0"/>
+              <a:t>AITETIQ · 11 OCTOBER 2026</a:t>
             </a:r>
           </a:p>
         </p:txBody>
@@ -4970,6 +4811,7 @@
           <a:lstStyle/>
           <a:p>
             <a:pPr algn="ctr"/>
+            <a:endParaRPr/>
           </a:p>
         </p:txBody>
       </p:sp>
@@ -5013,6 +4855,7 @@
           <a:lstStyle/>
           <a:p>
             <a:pPr algn="ctr"/>
+            <a:endParaRPr/>
           </a:p>
         </p:txBody>
       </p:sp>
@@ -5025,15 +4868,15 @@
         <p:spPr>
           <a:xfrm>
             <a:off x="594360" y="6528816"/>
-            <a:ext cx="8046720" cy="182880"/>
-          </a:xfrm>
-          <a:prstGeom prst="rect">
-            <a:avLst/>
-          </a:prstGeom>
-          <a:noFill/>
-        </p:spPr>
-        <p:txBody>
-          <a:bodyPr wrap="square" lIns="0" rIns="0" tIns="0" bIns="0" anchor="t">
+            <a:ext cx="8046720" cy="132216"/>
+          </a:xfrm>
+          <a:prstGeom prst="rect">
+            <a:avLst/>
+          </a:prstGeom>
+          <a:noFill/>
+        </p:spPr>
+        <p:txBody>
+          <a:bodyPr wrap="square" lIns="0" tIns="0" rIns="0" bIns="0" anchor="t">
             <a:spAutoFit/>
           </a:bodyPr>
           <a:lstStyle/>
@@ -5056,7 +4899,12 @@
               </a:defRPr>
             </a:pPr>
             <a:r>
-              <a:t>QA-SRL GEN  /  DIALOGUE DATASETS</a:t>
+              <a:rPr lang="en-US" dirty="0"/>
+              <a:t>AITETIQ</a:t>
+            </a:r>
+            <a:r>
+              <a:rPr dirty="0"/>
+              <a:t>  /  DIALOGUE DATASETS</a:t>
             </a:r>
           </a:p>
         </p:txBody>
@@ -5078,7 +4926,7 @@
           <a:noFill/>
         </p:spPr>
         <p:txBody>
-          <a:bodyPr wrap="square" lIns="0" rIns="0" tIns="0" bIns="0" anchor="t">
+          <a:bodyPr wrap="square" lIns="0" tIns="0" rIns="0" bIns="0" anchor="t">
             <a:spAutoFit/>
           </a:bodyPr>
           <a:lstStyle/>
@@ -5123,7 +4971,7 @@
           <a:noFill/>
         </p:spPr>
         <p:txBody>
-          <a:bodyPr wrap="square" lIns="0" rIns="0" tIns="0" bIns="0" anchor="t">
+          <a:bodyPr wrap="square" lIns="0" tIns="0" rIns="0" bIns="0" anchor="t">
             <a:spAutoFit/>
           </a:bodyPr>
           <a:lstStyle/>
@@ -5146,6 +4994,7 @@
               </a:defRPr>
             </a:pPr>
             <a:r>
+              <a:rPr dirty="0"/>
               <a:t>Building</a:t>
             </a:r>
           </a:p>
@@ -5168,6 +5017,7 @@
               </a:defRPr>
             </a:pPr>
             <a:r>
+              <a:rPr dirty="0"/>
               <a:t>dialogue</a:t>
             </a:r>
           </a:p>
@@ -5190,6 +5040,7 @@
               </a:defRPr>
             </a:pPr>
             <a:r>
+              <a:rPr dirty="0"/>
               <a:t>datasets</a:t>
             </a:r>
           </a:p>
@@ -5212,7 +5063,7 @@
           <a:noFill/>
         </p:spPr>
         <p:txBody>
-          <a:bodyPr wrap="square" lIns="0" rIns="0" tIns="0" bIns="0" anchor="t">
+          <a:bodyPr wrap="square" lIns="0" tIns="0" rIns="0" bIns="0" anchor="t">
             <a:spAutoFit/>
           </a:bodyPr>
           <a:lstStyle/>
@@ -5304,6 +5155,7 @@
           <a:lstStyle/>
           <a:p>
             <a:pPr algn="ctr"/>
+            <a:endParaRPr/>
           </a:p>
         </p:txBody>
       </p:sp>
@@ -5324,7 +5176,7 @@
           <a:noFill/>
         </p:spPr>
         <p:txBody>
-          <a:bodyPr wrap="square" lIns="0" rIns="0" tIns="0" bIns="0" anchor="ctr">
+          <a:bodyPr wrap="square" lIns="0" tIns="0" rIns="0" bIns="0" anchor="ctr">
             <a:noAutofit/>
           </a:bodyPr>
           <a:lstStyle/>
@@ -5394,6 +5246,7 @@
           <a:lstStyle/>
           <a:p>
             <a:pPr algn="ctr"/>
+            <a:endParaRPr/>
           </a:p>
         </p:txBody>
       </p:sp>
@@ -5414,7 +5267,7 @@
           <a:noFill/>
         </p:spPr>
         <p:txBody>
-          <a:bodyPr wrap="square" lIns="0" rIns="0" tIns="0" bIns="0" anchor="ctr">
+          <a:bodyPr wrap="square" lIns="0" tIns="0" rIns="0" bIns="0" anchor="ctr">
             <a:noAutofit/>
           </a:bodyPr>
           <a:lstStyle/>
@@ -5484,6 +5337,7 @@
           <a:lstStyle/>
           <a:p>
             <a:pPr algn="ctr"/>
+            <a:endParaRPr/>
           </a:p>
         </p:txBody>
       </p:sp>
@@ -5504,7 +5358,7 @@
           <a:noFill/>
         </p:spPr>
         <p:txBody>
-          <a:bodyPr wrap="square" lIns="0" rIns="0" tIns="0" bIns="0" anchor="ctr">
+          <a:bodyPr wrap="square" lIns="0" tIns="0" rIns="0" bIns="0" anchor="ctr">
             <a:noAutofit/>
           </a:bodyPr>
           <a:lstStyle/>
@@ -5574,6 +5428,7 @@
           <a:lstStyle/>
           <a:p>
             <a:pPr algn="ctr"/>
+            <a:endParaRPr/>
           </a:p>
         </p:txBody>
       </p:sp>
@@ -5594,7 +5449,7 @@
           <a:noFill/>
         </p:spPr>
         <p:txBody>
-          <a:bodyPr wrap="square" lIns="0" rIns="0" tIns="0" bIns="0" anchor="t">
+          <a:bodyPr wrap="square" lIns="0" tIns="0" rIns="0" bIns="0" anchor="t">
             <a:spAutoFit/>
           </a:bodyPr>
           <a:lstStyle/>
@@ -5664,6 +5519,7 @@
           <a:lstStyle/>
           <a:p>
             <a:pPr algn="ctr"/>
+            <a:endParaRPr/>
           </a:p>
         </p:txBody>
       </p:sp>
@@ -5684,7 +5540,7 @@
           <a:noFill/>
         </p:spPr>
         <p:txBody>
-          <a:bodyPr wrap="square" lIns="0" rIns="0" tIns="0" bIns="0" anchor="t">
+          <a:bodyPr wrap="square" lIns="0" tIns="0" rIns="0" bIns="0" anchor="t">
             <a:spAutoFit/>
           </a:bodyPr>
           <a:lstStyle/>
@@ -5729,7 +5585,7 @@
           <a:noFill/>
         </p:spPr>
         <p:txBody>
-          <a:bodyPr wrap="square" lIns="0" rIns="0" tIns="0" bIns="0" anchor="t">
+          <a:bodyPr wrap="square" lIns="0" tIns="0" rIns="0" bIns="0" anchor="t">
             <a:spAutoFit/>
           </a:bodyPr>
           <a:lstStyle/>
@@ -5797,6 +5653,7 @@
           <a:lstStyle/>
           <a:p>
             <a:pPr algn="ctr"/>
+            <a:endParaRPr/>
           </a:p>
         </p:txBody>
       </p:sp>
@@ -5817,7 +5674,7 @@
           <a:noFill/>
         </p:spPr>
         <p:txBody>
-          <a:bodyPr wrap="square" lIns="0" rIns="0" tIns="0" bIns="0" anchor="t">
+          <a:bodyPr wrap="square" lIns="0" tIns="0" rIns="0" bIns="0" anchor="t">
             <a:spAutoFit/>
           </a:bodyPr>
           <a:lstStyle/>
@@ -5887,6 +5744,7 @@
           <a:lstStyle/>
           <a:p>
             <a:pPr algn="ctr"/>
+            <a:endParaRPr/>
           </a:p>
         </p:txBody>
       </p:sp>
@@ -5907,7 +5765,7 @@
           <a:noFill/>
         </p:spPr>
         <p:txBody>
-          <a:bodyPr wrap="square" lIns="0" rIns="0" tIns="0" bIns="0" anchor="ctr">
+          <a:bodyPr wrap="square" lIns="0" tIns="0" rIns="0" bIns="0" anchor="ctr">
             <a:noAutofit/>
           </a:bodyPr>
           <a:lstStyle/>
@@ -5952,7 +5810,7 @@
           <a:noFill/>
         </p:spPr>
         <p:txBody>
-          <a:bodyPr wrap="square" lIns="0" rIns="0" tIns="0" bIns="0" anchor="t">
+          <a:bodyPr wrap="square" lIns="0" tIns="0" rIns="0" bIns="0" anchor="t">
             <a:spAutoFit/>
           </a:bodyPr>
           <a:lstStyle/>
@@ -5989,7 +5847,7 @@
 </file>
 
 <file path=ppt/slides/slide10.xml><?xml version="1.0" encoding="utf-8"?>
-<p:sld xmlns:a="http://schemas.openxmlformats.org/drawingml/2006/main" xmlns:p="http://schemas.openxmlformats.org/presentationml/2006/main" xmlns:r="http://schemas.openxmlformats.org/officeDocument/2006/relationships">
+<p:sld xmlns:a="http://schemas.openxmlformats.org/drawingml/2006/main" xmlns:r="http://schemas.openxmlformats.org/officeDocument/2006/relationships" xmlns:p="http://schemas.openxmlformats.org/presentationml/2006/main">
   <p:cSld>
     <p:bg>
       <p:bgPr>
@@ -6005,7 +5863,14 @@
         <p:cNvGrpSpPr/>
         <p:nvPr/>
       </p:nvGrpSpPr>
-      <p:grpSpPr/>
+      <p:grpSpPr>
+        <a:xfrm>
+          <a:off x="0" y="0"/>
+          <a:ext cx="0" cy="0"/>
+          <a:chOff x="0" y="0"/>
+          <a:chExt cx="0" cy="0"/>
+        </a:xfrm>
+      </p:grpSpPr>
       <p:sp>
         <p:nvSpPr>
           <p:cNvPr id="2" name="TextBox 1"/>
@@ -6023,7 +5888,7 @@
           <a:noFill/>
         </p:spPr>
         <p:txBody>
-          <a:bodyPr wrap="square" lIns="0" rIns="0" tIns="0" bIns="0" anchor="t">
+          <a:bodyPr wrap="square" lIns="0" tIns="0" rIns="0" bIns="0" anchor="t">
             <a:spAutoFit/>
           </a:bodyPr>
           <a:lstStyle/>
@@ -6068,7 +5933,7 @@
           <a:noFill/>
         </p:spPr>
         <p:txBody>
-          <a:bodyPr wrap="square" lIns="0" rIns="0" tIns="0" bIns="0" anchor="t">
+          <a:bodyPr wrap="square" lIns="0" tIns="0" rIns="0" bIns="0" anchor="t">
             <a:spAutoFit/>
           </a:bodyPr>
           <a:lstStyle/>
@@ -6113,7 +5978,7 @@
           <a:noFill/>
         </p:spPr>
         <p:txBody>
-          <a:bodyPr wrap="square" lIns="0" rIns="0" tIns="0" bIns="0" anchor="t">
+          <a:bodyPr wrap="square" lIns="0" tIns="0" rIns="0" bIns="0" anchor="t">
             <a:spAutoFit/>
           </a:bodyPr>
           <a:lstStyle/>
@@ -6181,6 +6046,7 @@
           <a:lstStyle/>
           <a:p>
             <a:pPr algn="ctr"/>
+            <a:endParaRPr/>
           </a:p>
         </p:txBody>
       </p:sp>
@@ -6224,6 +6090,7 @@
           <a:lstStyle/>
           <a:p>
             <a:pPr algn="ctr"/>
+            <a:endParaRPr/>
           </a:p>
         </p:txBody>
       </p:sp>
@@ -6236,15 +6103,15 @@
         <p:spPr>
           <a:xfrm>
             <a:off x="594360" y="6528816"/>
-            <a:ext cx="8046720" cy="182880"/>
-          </a:xfrm>
-          <a:prstGeom prst="rect">
-            <a:avLst/>
-          </a:prstGeom>
-          <a:noFill/>
-        </p:spPr>
-        <p:txBody>
-          <a:bodyPr wrap="square" lIns="0" rIns="0" tIns="0" bIns="0" anchor="t">
+            <a:ext cx="8046720" cy="132216"/>
+          </a:xfrm>
+          <a:prstGeom prst="rect">
+            <a:avLst/>
+          </a:prstGeom>
+          <a:noFill/>
+        </p:spPr>
+        <p:txBody>
+          <a:bodyPr wrap="square" lIns="0" tIns="0" rIns="0" bIns="0" anchor="t">
             <a:spAutoFit/>
           </a:bodyPr>
           <a:lstStyle/>
@@ -6267,7 +6134,8 @@
               </a:defRPr>
             </a:pPr>
             <a:r>
-              <a:t>QA-SRL GEN  /  DIALOGUE DATASETS</a:t>
+              <a:rPr dirty="0"/>
+              <a:t>AITETIQ  /  DIALOGUE DATASETS</a:t>
             </a:r>
           </a:p>
         </p:txBody>
@@ -6289,7 +6157,7 @@
           <a:noFill/>
         </p:spPr>
         <p:txBody>
-          <a:bodyPr wrap="square" lIns="0" rIns="0" tIns="0" bIns="0" anchor="t">
+          <a:bodyPr wrap="square" lIns="0" tIns="0" rIns="0" bIns="0" anchor="t">
             <a:spAutoFit/>
           </a:bodyPr>
           <a:lstStyle/>
@@ -6359,6 +6227,7 @@
           <a:lstStyle/>
           <a:p>
             <a:pPr algn="ctr"/>
+            <a:endParaRPr/>
           </a:p>
         </p:txBody>
       </p:sp>
@@ -6379,7 +6248,7 @@
           <a:noFill/>
         </p:spPr>
         <p:txBody>
-          <a:bodyPr wrap="square" lIns="0" rIns="0" tIns="0" bIns="0" anchor="t">
+          <a:bodyPr wrap="square" lIns="0" tIns="0" rIns="0" bIns="0" anchor="t">
             <a:spAutoFit/>
           </a:bodyPr>
           <a:lstStyle/>
@@ -6537,6 +6406,7 @@
           <a:lstStyle/>
           <a:p>
             <a:pPr algn="ctr"/>
+            <a:endParaRPr/>
           </a:p>
         </p:txBody>
       </p:sp>
@@ -6557,7 +6427,7 @@
           <a:noFill/>
         </p:spPr>
         <p:txBody>
-          <a:bodyPr wrap="square" lIns="0" rIns="0" tIns="0" bIns="0" anchor="t">
+          <a:bodyPr wrap="square" lIns="0" tIns="0" rIns="0" bIns="0" anchor="t">
             <a:spAutoFit/>
           </a:bodyPr>
           <a:lstStyle/>
@@ -6602,7 +6472,7 @@
           <a:noFill/>
         </p:spPr>
         <p:txBody>
-          <a:bodyPr wrap="square" lIns="0" rIns="0" tIns="0" bIns="0" anchor="t">
+          <a:bodyPr wrap="square" lIns="0" tIns="0" rIns="0" bIns="0" anchor="t">
             <a:spAutoFit/>
           </a:bodyPr>
           <a:lstStyle/>
@@ -6647,7 +6517,7 @@
           <a:noFill/>
         </p:spPr>
         <p:txBody>
-          <a:bodyPr wrap="square" lIns="0" rIns="0" tIns="0" bIns="0" anchor="t">
+          <a:bodyPr wrap="square" lIns="0" tIns="0" rIns="0" bIns="0" anchor="t">
             <a:spAutoFit/>
           </a:bodyPr>
           <a:lstStyle/>
@@ -6714,7 +6584,7 @@
           <a:noFill/>
         </p:spPr>
         <p:txBody>
-          <a:bodyPr wrap="square" lIns="0" rIns="0" tIns="0" bIns="0" anchor="t">
+          <a:bodyPr wrap="square" lIns="0" tIns="0" rIns="0" bIns="0" anchor="t">
             <a:spAutoFit/>
           </a:bodyPr>
           <a:lstStyle/>
@@ -6759,7 +6629,7 @@
           <a:noFill/>
         </p:spPr>
         <p:txBody>
-          <a:bodyPr wrap="square" lIns="0" rIns="0" tIns="0" bIns="0" anchor="t">
+          <a:bodyPr wrap="square" lIns="0" tIns="0" rIns="0" bIns="0" anchor="t">
             <a:spAutoFit/>
           </a:bodyPr>
           <a:lstStyle/>
@@ -6818,7 +6688,7 @@
 </file>
 
 <file path=ppt/slides/slide11.xml><?xml version="1.0" encoding="utf-8"?>
-<p:sld xmlns:a="http://schemas.openxmlformats.org/drawingml/2006/main" xmlns:p="http://schemas.openxmlformats.org/presentationml/2006/main" xmlns:r="http://schemas.openxmlformats.org/officeDocument/2006/relationships">
+<p:sld xmlns:a="http://schemas.openxmlformats.org/drawingml/2006/main" xmlns:r="http://schemas.openxmlformats.org/officeDocument/2006/relationships" xmlns:p="http://schemas.openxmlformats.org/presentationml/2006/main">
   <p:cSld>
     <p:bg>
       <p:bgPr>
@@ -6834,7 +6704,14 @@
         <p:cNvGrpSpPr/>
         <p:nvPr/>
       </p:nvGrpSpPr>
-      <p:grpSpPr/>
+      <p:grpSpPr>
+        <a:xfrm>
+          <a:off x="0" y="0"/>
+          <a:ext cx="0" cy="0"/>
+          <a:chOff x="0" y="0"/>
+          <a:chExt cx="0" cy="0"/>
+        </a:xfrm>
+      </p:grpSpPr>
       <p:sp>
         <p:nvSpPr>
           <p:cNvPr id="2" name="TextBox 1"/>
@@ -6852,7 +6729,7 @@
           <a:noFill/>
         </p:spPr>
         <p:txBody>
-          <a:bodyPr wrap="square" lIns="0" rIns="0" tIns="0" bIns="0" anchor="t">
+          <a:bodyPr wrap="square" lIns="0" tIns="0" rIns="0" bIns="0" anchor="t">
             <a:spAutoFit/>
           </a:bodyPr>
           <a:lstStyle/>
@@ -6897,7 +6774,7 @@
           <a:noFill/>
         </p:spPr>
         <p:txBody>
-          <a:bodyPr wrap="square" lIns="0" rIns="0" tIns="0" bIns="0" anchor="t">
+          <a:bodyPr wrap="square" lIns="0" tIns="0" rIns="0" bIns="0" anchor="t">
             <a:spAutoFit/>
           </a:bodyPr>
           <a:lstStyle/>
@@ -6942,7 +6819,7 @@
           <a:noFill/>
         </p:spPr>
         <p:txBody>
-          <a:bodyPr wrap="square" lIns="0" rIns="0" tIns="0" bIns="0" anchor="t">
+          <a:bodyPr wrap="square" lIns="0" tIns="0" rIns="0" bIns="0" anchor="t">
             <a:spAutoFit/>
           </a:bodyPr>
           <a:lstStyle/>
@@ -7010,6 +6887,7 @@
           <a:lstStyle/>
           <a:p>
             <a:pPr algn="ctr"/>
+            <a:endParaRPr/>
           </a:p>
         </p:txBody>
       </p:sp>
@@ -7053,6 +6931,7 @@
           <a:lstStyle/>
           <a:p>
             <a:pPr algn="ctr"/>
+            <a:endParaRPr/>
           </a:p>
         </p:txBody>
       </p:sp>
@@ -7065,15 +6944,15 @@
         <p:spPr>
           <a:xfrm>
             <a:off x="594360" y="6528816"/>
-            <a:ext cx="8046720" cy="182880"/>
-          </a:xfrm>
-          <a:prstGeom prst="rect">
-            <a:avLst/>
-          </a:prstGeom>
-          <a:noFill/>
-        </p:spPr>
-        <p:txBody>
-          <a:bodyPr wrap="square" lIns="0" rIns="0" tIns="0" bIns="0" anchor="t">
+            <a:ext cx="8046720" cy="132216"/>
+          </a:xfrm>
+          <a:prstGeom prst="rect">
+            <a:avLst/>
+          </a:prstGeom>
+          <a:noFill/>
+        </p:spPr>
+        <p:txBody>
+          <a:bodyPr wrap="square" lIns="0" tIns="0" rIns="0" bIns="0" anchor="t">
             <a:spAutoFit/>
           </a:bodyPr>
           <a:lstStyle/>
@@ -7096,7 +6975,8 @@
               </a:defRPr>
             </a:pPr>
             <a:r>
-              <a:t>QA-SRL GEN  /  DIALOGUE DATASETS</a:t>
+              <a:rPr dirty="0"/>
+              <a:t>AITETIQ  /  DIALOGUE DATASETS</a:t>
             </a:r>
           </a:p>
         </p:txBody>
@@ -7118,7 +6998,7 @@
           <a:noFill/>
         </p:spPr>
         <p:txBody>
-          <a:bodyPr wrap="square" lIns="0" rIns="0" tIns="0" bIns="0" anchor="t">
+          <a:bodyPr wrap="square" lIns="0" tIns="0" rIns="0" bIns="0" anchor="t">
             <a:spAutoFit/>
           </a:bodyPr>
           <a:lstStyle/>
@@ -7190,6 +7070,7 @@
           <a:lstStyle/>
           <a:p>
             <a:pPr algn="ctr"/>
+            <a:endParaRPr/>
           </a:p>
         </p:txBody>
       </p:sp>
@@ -7210,7 +7091,7 @@
           <a:noFill/>
         </p:spPr>
         <p:txBody>
-          <a:bodyPr wrap="square" lIns="0" rIns="0" tIns="0" bIns="0" anchor="t">
+          <a:bodyPr wrap="square" lIns="0" tIns="0" rIns="0" bIns="0" anchor="t">
             <a:spAutoFit/>
           </a:bodyPr>
           <a:lstStyle/>
@@ -7255,7 +7136,7 @@
           <a:noFill/>
         </p:spPr>
         <p:txBody>
-          <a:bodyPr wrap="square" lIns="0" rIns="0" tIns="0" bIns="0" anchor="t">
+          <a:bodyPr wrap="square" lIns="0" tIns="0" rIns="0" bIns="0" anchor="t">
             <a:spAutoFit/>
           </a:bodyPr>
           <a:lstStyle/>
@@ -7300,7 +7181,7 @@
           <a:noFill/>
         </p:spPr>
         <p:txBody>
-          <a:bodyPr wrap="square" lIns="0" rIns="0" tIns="0" bIns="0" anchor="t">
+          <a:bodyPr wrap="square" lIns="0" tIns="0" rIns="0" bIns="0" anchor="t">
             <a:spAutoFit/>
           </a:bodyPr>
           <a:lstStyle/>
@@ -7372,6 +7253,7 @@
           <a:lstStyle/>
           <a:p>
             <a:pPr algn="ctr"/>
+            <a:endParaRPr/>
           </a:p>
         </p:txBody>
       </p:sp>
@@ -7392,7 +7274,7 @@
           <a:noFill/>
         </p:spPr>
         <p:txBody>
-          <a:bodyPr wrap="square" lIns="0" rIns="0" tIns="0" bIns="0" anchor="t">
+          <a:bodyPr wrap="square" lIns="0" tIns="0" rIns="0" bIns="0" anchor="t">
             <a:spAutoFit/>
           </a:bodyPr>
           <a:lstStyle/>
@@ -7437,7 +7319,7 @@
           <a:noFill/>
         </p:spPr>
         <p:txBody>
-          <a:bodyPr wrap="square" lIns="0" rIns="0" tIns="0" bIns="0" anchor="t">
+          <a:bodyPr wrap="square" lIns="0" tIns="0" rIns="0" bIns="0" anchor="t">
             <a:spAutoFit/>
           </a:bodyPr>
           <a:lstStyle/>
@@ -7482,7 +7364,7 @@
           <a:noFill/>
         </p:spPr>
         <p:txBody>
-          <a:bodyPr wrap="square" lIns="0" rIns="0" tIns="0" bIns="0" anchor="t">
+          <a:bodyPr wrap="square" lIns="0" tIns="0" rIns="0" bIns="0" anchor="t">
             <a:spAutoFit/>
           </a:bodyPr>
           <a:lstStyle/>
@@ -7554,6 +7436,7 @@
           <a:lstStyle/>
           <a:p>
             <a:pPr algn="ctr"/>
+            <a:endParaRPr/>
           </a:p>
         </p:txBody>
       </p:sp>
@@ -7574,7 +7457,7 @@
           <a:noFill/>
         </p:spPr>
         <p:txBody>
-          <a:bodyPr wrap="square" lIns="0" rIns="0" tIns="0" bIns="0" anchor="t">
+          <a:bodyPr wrap="square" lIns="0" tIns="0" rIns="0" bIns="0" anchor="t">
             <a:spAutoFit/>
           </a:bodyPr>
           <a:lstStyle/>
@@ -7619,7 +7502,7 @@
           <a:noFill/>
         </p:spPr>
         <p:txBody>
-          <a:bodyPr wrap="square" lIns="0" rIns="0" tIns="0" bIns="0" anchor="t">
+          <a:bodyPr wrap="square" lIns="0" tIns="0" rIns="0" bIns="0" anchor="t">
             <a:spAutoFit/>
           </a:bodyPr>
           <a:lstStyle/>
@@ -7664,7 +7547,7 @@
           <a:noFill/>
         </p:spPr>
         <p:txBody>
-          <a:bodyPr wrap="square" lIns="0" rIns="0" tIns="0" bIns="0" anchor="t">
+          <a:bodyPr wrap="square" lIns="0" tIns="0" rIns="0" bIns="0" anchor="t">
             <a:spAutoFit/>
           </a:bodyPr>
           <a:lstStyle/>
@@ -7736,6 +7619,7 @@
           <a:lstStyle/>
           <a:p>
             <a:pPr algn="ctr"/>
+            <a:endParaRPr/>
           </a:p>
         </p:txBody>
       </p:sp>
@@ -7756,7 +7640,7 @@
           <a:noFill/>
         </p:spPr>
         <p:txBody>
-          <a:bodyPr wrap="square" lIns="0" rIns="0" tIns="0" bIns="0" anchor="t">
+          <a:bodyPr wrap="square" lIns="0" tIns="0" rIns="0" bIns="0" anchor="t">
             <a:spAutoFit/>
           </a:bodyPr>
           <a:lstStyle/>
@@ -7801,7 +7685,7 @@
           <a:noFill/>
         </p:spPr>
         <p:txBody>
-          <a:bodyPr wrap="square" lIns="0" rIns="0" tIns="0" bIns="0" anchor="t">
+          <a:bodyPr wrap="square" lIns="0" tIns="0" rIns="0" bIns="0" anchor="t">
             <a:spAutoFit/>
           </a:bodyPr>
           <a:lstStyle/>
@@ -7846,7 +7730,7 @@
           <a:noFill/>
         </p:spPr>
         <p:txBody>
-          <a:bodyPr wrap="square" lIns="0" rIns="0" tIns="0" bIns="0" anchor="t">
+          <a:bodyPr wrap="square" lIns="0" tIns="0" rIns="0" bIns="0" anchor="t">
             <a:spAutoFit/>
           </a:bodyPr>
           <a:lstStyle/>
@@ -7916,6 +7800,7 @@
           <a:lstStyle/>
           <a:p>
             <a:pPr algn="ctr"/>
+            <a:endParaRPr/>
           </a:p>
         </p:txBody>
       </p:sp>
@@ -7936,7 +7821,7 @@
           <a:noFill/>
         </p:spPr>
         <p:txBody>
-          <a:bodyPr wrap="square" lIns="0" rIns="0" tIns="0" bIns="0" anchor="t">
+          <a:bodyPr wrap="square" lIns="0" tIns="0" rIns="0" bIns="0" anchor="t">
             <a:spAutoFit/>
           </a:bodyPr>
           <a:lstStyle/>
@@ -7981,7 +7866,7 @@
           <a:noFill/>
         </p:spPr>
         <p:txBody>
-          <a:bodyPr wrap="square" lIns="0" rIns="0" tIns="0" bIns="0" anchor="t">
+          <a:bodyPr wrap="square" lIns="0" tIns="0" rIns="0" bIns="0" anchor="t">
             <a:spAutoFit/>
           </a:bodyPr>
           <a:lstStyle/>
@@ -8026,7 +7911,7 @@
           <a:noFill/>
         </p:spPr>
         <p:txBody>
-          <a:bodyPr wrap="square" lIns="0" rIns="0" tIns="0" bIns="0" anchor="t">
+          <a:bodyPr wrap="square" lIns="0" tIns="0" rIns="0" bIns="0" anchor="t">
             <a:spAutoFit/>
           </a:bodyPr>
           <a:lstStyle/>
@@ -8071,7 +7956,7 @@
           <a:noFill/>
         </p:spPr>
         <p:txBody>
-          <a:bodyPr wrap="square" lIns="0" rIns="0" tIns="0" bIns="0" anchor="t">
+          <a:bodyPr wrap="square" lIns="0" tIns="0" rIns="0" bIns="0" anchor="t">
             <a:spAutoFit/>
           </a:bodyPr>
           <a:lstStyle/>
@@ -8138,7 +8023,7 @@
           <a:noFill/>
         </p:spPr>
         <p:txBody>
-          <a:bodyPr wrap="square" lIns="0" rIns="0" tIns="0" bIns="0" anchor="t">
+          <a:bodyPr wrap="square" lIns="0" tIns="0" rIns="0" bIns="0" anchor="t">
             <a:spAutoFit/>
           </a:bodyPr>
           <a:lstStyle/>
@@ -8175,7 +8060,7 @@
 </file>
 
 <file path=ppt/slides/slide12.xml><?xml version="1.0" encoding="utf-8"?>
-<p:sld xmlns:a="http://schemas.openxmlformats.org/drawingml/2006/main" xmlns:p="http://schemas.openxmlformats.org/presentationml/2006/main" xmlns:r="http://schemas.openxmlformats.org/officeDocument/2006/relationships">
+<p:sld xmlns:a="http://schemas.openxmlformats.org/drawingml/2006/main" xmlns:r="http://schemas.openxmlformats.org/officeDocument/2006/relationships" xmlns:p="http://schemas.openxmlformats.org/presentationml/2006/main">
   <p:cSld>
     <p:bg>
       <p:bgPr>
@@ -8191,7 +8076,14 @@
         <p:cNvGrpSpPr/>
         <p:nvPr/>
       </p:nvGrpSpPr>
-      <p:grpSpPr/>
+      <p:grpSpPr>
+        <a:xfrm>
+          <a:off x="0" y="0"/>
+          <a:ext cx="0" cy="0"/>
+          <a:chOff x="0" y="0"/>
+          <a:chExt cx="0" cy="0"/>
+        </a:xfrm>
+      </p:grpSpPr>
       <p:sp>
         <p:nvSpPr>
           <p:cNvPr id="2" name="TextBox 1"/>
@@ -8209,7 +8101,7 @@
           <a:noFill/>
         </p:spPr>
         <p:txBody>
-          <a:bodyPr wrap="square" lIns="0" rIns="0" tIns="0" bIns="0" anchor="t">
+          <a:bodyPr wrap="square" lIns="0" tIns="0" rIns="0" bIns="0" anchor="t">
             <a:spAutoFit/>
           </a:bodyPr>
           <a:lstStyle/>
@@ -8254,7 +8146,7 @@
           <a:noFill/>
         </p:spPr>
         <p:txBody>
-          <a:bodyPr wrap="square" lIns="0" rIns="0" tIns="0" bIns="0" anchor="t">
+          <a:bodyPr wrap="square" lIns="0" tIns="0" rIns="0" bIns="0" anchor="t">
             <a:spAutoFit/>
           </a:bodyPr>
           <a:lstStyle/>
@@ -8299,7 +8191,7 @@
           <a:noFill/>
         </p:spPr>
         <p:txBody>
-          <a:bodyPr wrap="square" lIns="0" rIns="0" tIns="0" bIns="0" anchor="t">
+          <a:bodyPr wrap="square" lIns="0" tIns="0" rIns="0" bIns="0" anchor="t">
             <a:spAutoFit/>
           </a:bodyPr>
           <a:lstStyle/>
@@ -8367,6 +8259,7 @@
           <a:lstStyle/>
           <a:p>
             <a:pPr algn="ctr"/>
+            <a:endParaRPr/>
           </a:p>
         </p:txBody>
       </p:sp>
@@ -8410,6 +8303,7 @@
           <a:lstStyle/>
           <a:p>
             <a:pPr algn="ctr"/>
+            <a:endParaRPr/>
           </a:p>
         </p:txBody>
       </p:sp>
@@ -8422,15 +8316,15 @@
         <p:spPr>
           <a:xfrm>
             <a:off x="594360" y="6528816"/>
-            <a:ext cx="8046720" cy="182880"/>
-          </a:xfrm>
-          <a:prstGeom prst="rect">
-            <a:avLst/>
-          </a:prstGeom>
-          <a:noFill/>
-        </p:spPr>
-        <p:txBody>
-          <a:bodyPr wrap="square" lIns="0" rIns="0" tIns="0" bIns="0" anchor="t">
+            <a:ext cx="8046720" cy="132216"/>
+          </a:xfrm>
+          <a:prstGeom prst="rect">
+            <a:avLst/>
+          </a:prstGeom>
+          <a:noFill/>
+        </p:spPr>
+        <p:txBody>
+          <a:bodyPr wrap="square" lIns="0" tIns="0" rIns="0" bIns="0" anchor="t">
             <a:spAutoFit/>
           </a:bodyPr>
           <a:lstStyle/>
@@ -8453,7 +8347,8 @@
               </a:defRPr>
             </a:pPr>
             <a:r>
-              <a:t>QA-SRL GEN  /  DIALOGUE DATASETS</a:t>
+              <a:rPr dirty="0"/>
+              <a:t>AITETIQ  /  DIALOGUE DATASETS</a:t>
             </a:r>
           </a:p>
         </p:txBody>
@@ -8475,7 +8370,7 @@
           <a:noFill/>
         </p:spPr>
         <p:txBody>
-          <a:bodyPr wrap="square" lIns="0" rIns="0" tIns="0" bIns="0" anchor="t">
+          <a:bodyPr wrap="square" lIns="0" tIns="0" rIns="0" bIns="0" anchor="t">
             <a:spAutoFit/>
           </a:bodyPr>
           <a:lstStyle/>
@@ -8545,6 +8440,7 @@
           <a:lstStyle/>
           <a:p>
             <a:pPr algn="ctr"/>
+            <a:endParaRPr/>
           </a:p>
         </p:txBody>
       </p:sp>
@@ -8565,7 +8461,7 @@
           <a:noFill/>
         </p:spPr>
         <p:txBody>
-          <a:bodyPr wrap="square" lIns="0" rIns="0" tIns="0" bIns="0" anchor="t">
+          <a:bodyPr wrap="square" lIns="0" tIns="0" rIns="0" bIns="0" anchor="t">
             <a:spAutoFit/>
           </a:bodyPr>
           <a:lstStyle/>
@@ -8742,7 +8638,7 @@
           <a:noFill/>
         </p:spPr>
         <p:txBody>
-          <a:bodyPr wrap="square" lIns="0" rIns="0" tIns="0" bIns="0" anchor="t">
+          <a:bodyPr wrap="square" lIns="0" tIns="0" rIns="0" bIns="0" anchor="t">
             <a:spAutoFit/>
           </a:bodyPr>
           <a:lstStyle/>
@@ -8787,7 +8683,7 @@
           <a:noFill/>
         </p:spPr>
         <p:txBody>
-          <a:bodyPr wrap="square" lIns="0" rIns="0" tIns="0" bIns="0" anchor="t">
+          <a:bodyPr wrap="square" lIns="0" tIns="0" rIns="0" bIns="0" anchor="t">
             <a:spAutoFit/>
           </a:bodyPr>
           <a:lstStyle/>
@@ -8832,7 +8728,7 @@
           <a:noFill/>
         </p:spPr>
         <p:txBody>
-          <a:bodyPr wrap="square" lIns="0" rIns="0" tIns="0" bIns="0" anchor="t">
+          <a:bodyPr wrap="square" lIns="0" tIns="0" rIns="0" bIns="0" anchor="t">
             <a:spAutoFit/>
           </a:bodyPr>
           <a:lstStyle/>
@@ -8877,7 +8773,7 @@
           <a:noFill/>
         </p:spPr>
         <p:txBody>
-          <a:bodyPr wrap="square" lIns="0" rIns="0" tIns="0" bIns="0" anchor="t">
+          <a:bodyPr wrap="square" lIns="0" tIns="0" rIns="0" bIns="0" anchor="t">
             <a:spAutoFit/>
           </a:bodyPr>
           <a:lstStyle/>
@@ -8922,7 +8818,7 @@
           <a:noFill/>
         </p:spPr>
         <p:txBody>
-          <a:bodyPr wrap="square" lIns="0" rIns="0" tIns="0" bIns="0" anchor="t">
+          <a:bodyPr wrap="square" lIns="0" tIns="0" rIns="0" bIns="0" anchor="t">
             <a:spAutoFit/>
           </a:bodyPr>
           <a:lstStyle/>
@@ -8967,7 +8863,7 @@
           <a:noFill/>
         </p:spPr>
         <p:txBody>
-          <a:bodyPr wrap="square" lIns="0" rIns="0" tIns="0" bIns="0" anchor="t">
+          <a:bodyPr wrap="square" lIns="0" tIns="0" rIns="0" bIns="0" anchor="t">
             <a:spAutoFit/>
           </a:bodyPr>
           <a:lstStyle/>
@@ -9012,7 +8908,7 @@
           <a:noFill/>
         </p:spPr>
         <p:txBody>
-          <a:bodyPr wrap="square" lIns="0" rIns="0" tIns="0" bIns="0" anchor="t">
+          <a:bodyPr wrap="square" lIns="0" tIns="0" rIns="0" bIns="0" anchor="t">
             <a:spAutoFit/>
           </a:bodyPr>
           <a:lstStyle/>
@@ -9057,7 +8953,7 @@
           <a:noFill/>
         </p:spPr>
         <p:txBody>
-          <a:bodyPr wrap="square" lIns="0" rIns="0" tIns="0" bIns="0" anchor="t">
+          <a:bodyPr wrap="square" lIns="0" tIns="0" rIns="0" bIns="0" anchor="t">
             <a:spAutoFit/>
           </a:bodyPr>
           <a:lstStyle/>
@@ -9102,7 +8998,7 @@
           <a:noFill/>
         </p:spPr>
         <p:txBody>
-          <a:bodyPr wrap="square" lIns="0" rIns="0" tIns="0" bIns="0" anchor="t">
+          <a:bodyPr wrap="square" lIns="0" tIns="0" rIns="0" bIns="0" anchor="t">
             <a:spAutoFit/>
           </a:bodyPr>
           <a:lstStyle/>
@@ -9139,7 +9035,7 @@
 </file>
 
 <file path=ppt/slides/slide13.xml><?xml version="1.0" encoding="utf-8"?>
-<p:sld xmlns:a="http://schemas.openxmlformats.org/drawingml/2006/main" xmlns:p="http://schemas.openxmlformats.org/presentationml/2006/main" xmlns:r="http://schemas.openxmlformats.org/officeDocument/2006/relationships">
+<p:sld xmlns:a="http://schemas.openxmlformats.org/drawingml/2006/main" xmlns:r="http://schemas.openxmlformats.org/officeDocument/2006/relationships" xmlns:p="http://schemas.openxmlformats.org/presentationml/2006/main">
   <p:cSld>
     <p:bg>
       <p:bgPr>
@@ -9155,7 +9051,14 @@
         <p:cNvGrpSpPr/>
         <p:nvPr/>
       </p:nvGrpSpPr>
-      <p:grpSpPr/>
+      <p:grpSpPr>
+        <a:xfrm>
+          <a:off x="0" y="0"/>
+          <a:ext cx="0" cy="0"/>
+          <a:chOff x="0" y="0"/>
+          <a:chExt cx="0" cy="0"/>
+        </a:xfrm>
+      </p:grpSpPr>
       <p:sp>
         <p:nvSpPr>
           <p:cNvPr id="2" name="TextBox 1"/>
@@ -9173,7 +9076,7 @@
           <a:noFill/>
         </p:spPr>
         <p:txBody>
-          <a:bodyPr wrap="square" lIns="0" rIns="0" tIns="0" bIns="0" anchor="t">
+          <a:bodyPr wrap="square" lIns="0" tIns="0" rIns="0" bIns="0" anchor="t">
             <a:spAutoFit/>
           </a:bodyPr>
           <a:lstStyle/>
@@ -9218,7 +9121,7 @@
           <a:noFill/>
         </p:spPr>
         <p:txBody>
-          <a:bodyPr wrap="square" lIns="0" rIns="0" tIns="0" bIns="0" anchor="t">
+          <a:bodyPr wrap="square" lIns="0" tIns="0" rIns="0" bIns="0" anchor="t">
             <a:spAutoFit/>
           </a:bodyPr>
           <a:lstStyle/>
@@ -9263,7 +9166,7 @@
           <a:noFill/>
         </p:spPr>
         <p:txBody>
-          <a:bodyPr wrap="square" lIns="0" rIns="0" tIns="0" bIns="0" anchor="t">
+          <a:bodyPr wrap="square" lIns="0" tIns="0" rIns="0" bIns="0" anchor="t">
             <a:spAutoFit/>
           </a:bodyPr>
           <a:lstStyle/>
@@ -9331,6 +9234,7 @@
           <a:lstStyle/>
           <a:p>
             <a:pPr algn="ctr"/>
+            <a:endParaRPr/>
           </a:p>
         </p:txBody>
       </p:sp>
@@ -9374,6 +9278,7 @@
           <a:lstStyle/>
           <a:p>
             <a:pPr algn="ctr"/>
+            <a:endParaRPr/>
           </a:p>
         </p:txBody>
       </p:sp>
@@ -9386,15 +9291,15 @@
         <p:spPr>
           <a:xfrm>
             <a:off x="594360" y="6528816"/>
-            <a:ext cx="8046720" cy="182880"/>
-          </a:xfrm>
-          <a:prstGeom prst="rect">
-            <a:avLst/>
-          </a:prstGeom>
-          <a:noFill/>
-        </p:spPr>
-        <p:txBody>
-          <a:bodyPr wrap="square" lIns="0" rIns="0" tIns="0" bIns="0" anchor="t">
+            <a:ext cx="8046720" cy="132216"/>
+          </a:xfrm>
+          <a:prstGeom prst="rect">
+            <a:avLst/>
+          </a:prstGeom>
+          <a:noFill/>
+        </p:spPr>
+        <p:txBody>
+          <a:bodyPr wrap="square" lIns="0" tIns="0" rIns="0" bIns="0" anchor="t">
             <a:spAutoFit/>
           </a:bodyPr>
           <a:lstStyle/>
@@ -9417,7 +9322,8 @@
               </a:defRPr>
             </a:pPr>
             <a:r>
-              <a:t>QA-SRL GEN  /  DIALOGUE DATASETS</a:t>
+              <a:rPr dirty="0"/>
+              <a:t>AITETIQ  /  DIALOGUE DATASETS</a:t>
             </a:r>
           </a:p>
         </p:txBody>
@@ -9439,7 +9345,7 @@
           <a:noFill/>
         </p:spPr>
         <p:txBody>
-          <a:bodyPr wrap="square" lIns="0" rIns="0" tIns="0" bIns="0" anchor="t">
+          <a:bodyPr wrap="square" lIns="0" tIns="0" rIns="0" bIns="0" anchor="t">
             <a:spAutoFit/>
           </a:bodyPr>
           <a:lstStyle/>
@@ -9511,6 +9417,7 @@
           <a:lstStyle/>
           <a:p>
             <a:pPr algn="ctr"/>
+            <a:endParaRPr/>
           </a:p>
         </p:txBody>
       </p:sp>
@@ -9554,6 +9461,7 @@
           <a:lstStyle/>
           <a:p>
             <a:pPr algn="ctr"/>
+            <a:endParaRPr/>
           </a:p>
         </p:txBody>
       </p:sp>
@@ -9574,7 +9482,7 @@
           <a:noFill/>
         </p:spPr>
         <p:txBody>
-          <a:bodyPr wrap="square" lIns="0" rIns="0" tIns="0" bIns="0" anchor="t">
+          <a:bodyPr wrap="square" lIns="0" tIns="0" rIns="0" bIns="0" anchor="t">
             <a:spAutoFit/>
           </a:bodyPr>
           <a:lstStyle/>
@@ -9619,7 +9527,7 @@
           <a:noFill/>
         </p:spPr>
         <p:txBody>
-          <a:bodyPr wrap="square" lIns="0" rIns="0" tIns="0" bIns="0" anchor="t">
+          <a:bodyPr wrap="square" lIns="0" tIns="0" rIns="0" bIns="0" anchor="t">
             <a:spAutoFit/>
           </a:bodyPr>
           <a:lstStyle/>
@@ -9664,7 +9572,7 @@
           <a:noFill/>
         </p:spPr>
         <p:txBody>
-          <a:bodyPr wrap="square" lIns="0" rIns="0" tIns="0" bIns="0" anchor="t">
+          <a:bodyPr wrap="square" lIns="0" tIns="0" rIns="0" bIns="0" anchor="t">
             <a:spAutoFit/>
           </a:bodyPr>
           <a:lstStyle/>
@@ -9736,6 +9644,7 @@
           <a:lstStyle/>
           <a:p>
             <a:pPr algn="ctr"/>
+            <a:endParaRPr/>
           </a:p>
         </p:txBody>
       </p:sp>
@@ -9779,6 +9688,7 @@
           <a:lstStyle/>
           <a:p>
             <a:pPr algn="ctr"/>
+            <a:endParaRPr/>
           </a:p>
         </p:txBody>
       </p:sp>
@@ -9799,7 +9709,7 @@
           <a:noFill/>
         </p:spPr>
         <p:txBody>
-          <a:bodyPr wrap="square" lIns="0" rIns="0" tIns="0" bIns="0" anchor="t">
+          <a:bodyPr wrap="square" lIns="0" tIns="0" rIns="0" bIns="0" anchor="t">
             <a:spAutoFit/>
           </a:bodyPr>
           <a:lstStyle/>
@@ -9844,7 +9754,7 @@
           <a:noFill/>
         </p:spPr>
         <p:txBody>
-          <a:bodyPr wrap="square" lIns="0" rIns="0" tIns="0" bIns="0" anchor="t">
+          <a:bodyPr wrap="square" lIns="0" tIns="0" rIns="0" bIns="0" anchor="t">
             <a:spAutoFit/>
           </a:bodyPr>
           <a:lstStyle/>
@@ -9889,7 +9799,7 @@
           <a:noFill/>
         </p:spPr>
         <p:txBody>
-          <a:bodyPr wrap="square" lIns="0" rIns="0" tIns="0" bIns="0" anchor="t">
+          <a:bodyPr wrap="square" lIns="0" tIns="0" rIns="0" bIns="0" anchor="t">
             <a:spAutoFit/>
           </a:bodyPr>
           <a:lstStyle/>
@@ -9961,6 +9871,7 @@
           <a:lstStyle/>
           <a:p>
             <a:pPr algn="ctr"/>
+            <a:endParaRPr/>
           </a:p>
         </p:txBody>
       </p:sp>
@@ -10004,6 +9915,7 @@
           <a:lstStyle/>
           <a:p>
             <a:pPr algn="ctr"/>
+            <a:endParaRPr/>
           </a:p>
         </p:txBody>
       </p:sp>
@@ -10024,7 +9936,7 @@
           <a:noFill/>
         </p:spPr>
         <p:txBody>
-          <a:bodyPr wrap="square" lIns="0" rIns="0" tIns="0" bIns="0" anchor="t">
+          <a:bodyPr wrap="square" lIns="0" tIns="0" rIns="0" bIns="0" anchor="t">
             <a:spAutoFit/>
           </a:bodyPr>
           <a:lstStyle/>
@@ -10069,7 +9981,7 @@
           <a:noFill/>
         </p:spPr>
         <p:txBody>
-          <a:bodyPr wrap="square" lIns="0" rIns="0" tIns="0" bIns="0" anchor="t">
+          <a:bodyPr wrap="square" lIns="0" tIns="0" rIns="0" bIns="0" anchor="t">
             <a:spAutoFit/>
           </a:bodyPr>
           <a:lstStyle/>
@@ -10114,7 +10026,7 @@
           <a:noFill/>
         </p:spPr>
         <p:txBody>
-          <a:bodyPr wrap="square" lIns="0" rIns="0" tIns="0" bIns="0" anchor="t">
+          <a:bodyPr wrap="square" lIns="0" tIns="0" rIns="0" bIns="0" anchor="t">
             <a:spAutoFit/>
           </a:bodyPr>
           <a:lstStyle/>
@@ -10186,6 +10098,7 @@
           <a:lstStyle/>
           <a:p>
             <a:pPr algn="ctr"/>
+            <a:endParaRPr/>
           </a:p>
         </p:txBody>
       </p:sp>
@@ -10229,6 +10142,7 @@
           <a:lstStyle/>
           <a:p>
             <a:pPr algn="ctr"/>
+            <a:endParaRPr/>
           </a:p>
         </p:txBody>
       </p:sp>
@@ -10249,7 +10163,7 @@
           <a:noFill/>
         </p:spPr>
         <p:txBody>
-          <a:bodyPr wrap="square" lIns="0" rIns="0" tIns="0" bIns="0" anchor="t">
+          <a:bodyPr wrap="square" lIns="0" tIns="0" rIns="0" bIns="0" anchor="t">
             <a:spAutoFit/>
           </a:bodyPr>
           <a:lstStyle/>
@@ -10294,7 +10208,7 @@
           <a:noFill/>
         </p:spPr>
         <p:txBody>
-          <a:bodyPr wrap="square" lIns="0" rIns="0" tIns="0" bIns="0" anchor="t">
+          <a:bodyPr wrap="square" lIns="0" tIns="0" rIns="0" bIns="0" anchor="t">
             <a:spAutoFit/>
           </a:bodyPr>
           <a:lstStyle/>
@@ -10339,7 +10253,7 @@
           <a:noFill/>
         </p:spPr>
         <p:txBody>
-          <a:bodyPr wrap="square" lIns="0" rIns="0" tIns="0" bIns="0" anchor="t">
+          <a:bodyPr wrap="square" lIns="0" tIns="0" rIns="0" bIns="0" anchor="t">
             <a:spAutoFit/>
           </a:bodyPr>
           <a:lstStyle/>
@@ -10384,7 +10298,7 @@
           <a:noFill/>
         </p:spPr>
         <p:txBody>
-          <a:bodyPr wrap="square" lIns="0" rIns="0" tIns="0" bIns="0" anchor="t">
+          <a:bodyPr wrap="square" lIns="0" tIns="0" rIns="0" bIns="0" anchor="t">
             <a:spAutoFit/>
           </a:bodyPr>
           <a:lstStyle/>
@@ -10421,7 +10335,7 @@
 </file>
 
 <file path=ppt/slides/slide14.xml><?xml version="1.0" encoding="utf-8"?>
-<p:sld xmlns:a="http://schemas.openxmlformats.org/drawingml/2006/main" xmlns:p="http://schemas.openxmlformats.org/presentationml/2006/main" xmlns:r="http://schemas.openxmlformats.org/officeDocument/2006/relationships">
+<p:sld xmlns:a="http://schemas.openxmlformats.org/drawingml/2006/main" xmlns:r="http://schemas.openxmlformats.org/officeDocument/2006/relationships" xmlns:p="http://schemas.openxmlformats.org/presentationml/2006/main">
   <p:cSld>
     <p:bg>
       <p:bgPr>
@@ -10437,7 +10351,14 @@
         <p:cNvGrpSpPr/>
         <p:nvPr/>
       </p:nvGrpSpPr>
-      <p:grpSpPr/>
+      <p:grpSpPr>
+        <a:xfrm>
+          <a:off x="0" y="0"/>
+          <a:ext cx="0" cy="0"/>
+          <a:chOff x="0" y="0"/>
+          <a:chExt cx="0" cy="0"/>
+        </a:xfrm>
+      </p:grpSpPr>
       <p:sp>
         <p:nvSpPr>
           <p:cNvPr id="2" name="TextBox 1"/>
@@ -10455,7 +10376,7 @@
           <a:noFill/>
         </p:spPr>
         <p:txBody>
-          <a:bodyPr wrap="square" lIns="0" rIns="0" tIns="0" bIns="0" anchor="t">
+          <a:bodyPr wrap="square" lIns="0" tIns="0" rIns="0" bIns="0" anchor="t">
             <a:spAutoFit/>
           </a:bodyPr>
           <a:lstStyle/>
@@ -10500,7 +10421,7 @@
           <a:noFill/>
         </p:spPr>
         <p:txBody>
-          <a:bodyPr wrap="square" lIns="0" rIns="0" tIns="0" bIns="0" anchor="t">
+          <a:bodyPr wrap="square" lIns="0" tIns="0" rIns="0" bIns="0" anchor="t">
             <a:spAutoFit/>
           </a:bodyPr>
           <a:lstStyle/>
@@ -10545,7 +10466,7 @@
           <a:noFill/>
         </p:spPr>
         <p:txBody>
-          <a:bodyPr wrap="square" lIns="0" rIns="0" tIns="0" bIns="0" anchor="t">
+          <a:bodyPr wrap="square" lIns="0" tIns="0" rIns="0" bIns="0" anchor="t">
             <a:spAutoFit/>
           </a:bodyPr>
           <a:lstStyle/>
@@ -10613,6 +10534,7 @@
           <a:lstStyle/>
           <a:p>
             <a:pPr algn="ctr"/>
+            <a:endParaRPr/>
           </a:p>
         </p:txBody>
       </p:sp>
@@ -10656,6 +10578,7 @@
           <a:lstStyle/>
           <a:p>
             <a:pPr algn="ctr"/>
+            <a:endParaRPr/>
           </a:p>
         </p:txBody>
       </p:sp>
@@ -10668,15 +10591,15 @@
         <p:spPr>
           <a:xfrm>
             <a:off x="594360" y="6528816"/>
-            <a:ext cx="8046720" cy="182880"/>
-          </a:xfrm>
-          <a:prstGeom prst="rect">
-            <a:avLst/>
-          </a:prstGeom>
-          <a:noFill/>
-        </p:spPr>
-        <p:txBody>
-          <a:bodyPr wrap="square" lIns="0" rIns="0" tIns="0" bIns="0" anchor="t">
+            <a:ext cx="8046720" cy="132216"/>
+          </a:xfrm>
+          <a:prstGeom prst="rect">
+            <a:avLst/>
+          </a:prstGeom>
+          <a:noFill/>
+        </p:spPr>
+        <p:txBody>
+          <a:bodyPr wrap="square" lIns="0" tIns="0" rIns="0" bIns="0" anchor="t">
             <a:spAutoFit/>
           </a:bodyPr>
           <a:lstStyle/>
@@ -10699,7 +10622,8 @@
               </a:defRPr>
             </a:pPr>
             <a:r>
-              <a:t>QA-SRL GEN  /  DIALOGUE DATASETS</a:t>
+              <a:rPr dirty="0"/>
+              <a:t>AITETIQ  /  DIALOGUE DATASETS</a:t>
             </a:r>
           </a:p>
         </p:txBody>
@@ -10721,7 +10645,7 @@
           <a:noFill/>
         </p:spPr>
         <p:txBody>
-          <a:bodyPr wrap="square" lIns="0" rIns="0" tIns="0" bIns="0" anchor="t">
+          <a:bodyPr wrap="square" lIns="0" tIns="0" rIns="0" bIns="0" anchor="t">
             <a:spAutoFit/>
           </a:bodyPr>
           <a:lstStyle/>
@@ -10791,6 +10715,7 @@
           <a:lstStyle/>
           <a:p>
             <a:pPr algn="ctr"/>
+            <a:endParaRPr/>
           </a:p>
         </p:txBody>
       </p:sp>
@@ -10811,7 +10736,7 @@
           <a:noFill/>
         </p:spPr>
         <p:txBody>
-          <a:bodyPr wrap="square" lIns="0" rIns="0" tIns="0" bIns="0" anchor="t">
+          <a:bodyPr wrap="square" lIns="0" tIns="0" rIns="0" bIns="0" anchor="t">
             <a:spAutoFit/>
           </a:bodyPr>
           <a:lstStyle/>
@@ -10856,7 +10781,7 @@
           <a:noFill/>
         </p:spPr>
         <p:txBody>
-          <a:bodyPr wrap="square" lIns="0" rIns="0" tIns="0" bIns="0" anchor="t">
+          <a:bodyPr wrap="square" lIns="0" tIns="0" rIns="0" bIns="0" anchor="t">
             <a:spAutoFit/>
           </a:bodyPr>
           <a:lstStyle/>
@@ -11011,7 +10936,7 @@
           <a:noFill/>
         </p:spPr>
         <p:txBody>
-          <a:bodyPr wrap="square" lIns="0" rIns="0" tIns="0" bIns="0" anchor="t">
+          <a:bodyPr wrap="square" lIns="0" tIns="0" rIns="0" bIns="0" anchor="t">
             <a:spAutoFit/>
           </a:bodyPr>
           <a:lstStyle/>
@@ -11056,7 +10981,7 @@
           <a:noFill/>
         </p:spPr>
         <p:txBody>
-          <a:bodyPr wrap="square" lIns="0" rIns="0" tIns="0" bIns="0" anchor="t">
+          <a:bodyPr wrap="square" lIns="0" tIns="0" rIns="0" bIns="0" anchor="t">
             <a:spAutoFit/>
           </a:bodyPr>
           <a:lstStyle/>
@@ -11101,7 +11026,7 @@
           <a:noFill/>
         </p:spPr>
         <p:txBody>
-          <a:bodyPr wrap="square" lIns="0" rIns="0" tIns="0" bIns="0" anchor="t">
+          <a:bodyPr wrap="square" lIns="0" tIns="0" rIns="0" bIns="0" anchor="t">
             <a:spAutoFit/>
           </a:bodyPr>
           <a:lstStyle/>
@@ -11146,7 +11071,7 @@
           <a:noFill/>
         </p:spPr>
         <p:txBody>
-          <a:bodyPr wrap="square" lIns="0" rIns="0" tIns="0" bIns="0" anchor="t">
+          <a:bodyPr wrap="square" lIns="0" tIns="0" rIns="0" bIns="0" anchor="t">
             <a:spAutoFit/>
           </a:bodyPr>
           <a:lstStyle/>
@@ -11191,7 +11116,7 @@
           <a:noFill/>
         </p:spPr>
         <p:txBody>
-          <a:bodyPr wrap="square" lIns="0" rIns="0" tIns="0" bIns="0" anchor="t">
+          <a:bodyPr wrap="square" lIns="0" tIns="0" rIns="0" bIns="0" anchor="t">
             <a:spAutoFit/>
           </a:bodyPr>
           <a:lstStyle/>
@@ -11236,7 +11161,7 @@
           <a:noFill/>
         </p:spPr>
         <p:txBody>
-          <a:bodyPr wrap="square" lIns="0" rIns="0" tIns="0" bIns="0" anchor="t">
+          <a:bodyPr wrap="square" lIns="0" tIns="0" rIns="0" bIns="0" anchor="t">
             <a:spAutoFit/>
           </a:bodyPr>
           <a:lstStyle/>
@@ -11281,7 +11206,7 @@
           <a:noFill/>
         </p:spPr>
         <p:txBody>
-          <a:bodyPr wrap="square" lIns="0" rIns="0" tIns="0" bIns="0" anchor="t">
+          <a:bodyPr wrap="square" lIns="0" tIns="0" rIns="0" bIns="0" anchor="t">
             <a:spAutoFit/>
           </a:bodyPr>
           <a:lstStyle/>
@@ -11318,7 +11243,7 @@
 </file>
 
 <file path=ppt/slides/slide15.xml><?xml version="1.0" encoding="utf-8"?>
-<p:sld xmlns:a="http://schemas.openxmlformats.org/drawingml/2006/main" xmlns:p="http://schemas.openxmlformats.org/presentationml/2006/main" xmlns:r="http://schemas.openxmlformats.org/officeDocument/2006/relationships">
+<p:sld xmlns:a="http://schemas.openxmlformats.org/drawingml/2006/main" xmlns:r="http://schemas.openxmlformats.org/officeDocument/2006/relationships" xmlns:p="http://schemas.openxmlformats.org/presentationml/2006/main">
   <p:cSld>
     <p:bg>
       <p:bgPr>
@@ -11334,7 +11259,14 @@
         <p:cNvGrpSpPr/>
         <p:nvPr/>
       </p:nvGrpSpPr>
-      <p:grpSpPr/>
+      <p:grpSpPr>
+        <a:xfrm>
+          <a:off x="0" y="0"/>
+          <a:ext cx="0" cy="0"/>
+          <a:chOff x="0" y="0"/>
+          <a:chExt cx="0" cy="0"/>
+        </a:xfrm>
+      </p:grpSpPr>
       <p:sp>
         <p:nvSpPr>
           <p:cNvPr id="2" name="TextBox 1"/>
@@ -11352,7 +11284,7 @@
           <a:noFill/>
         </p:spPr>
         <p:txBody>
-          <a:bodyPr wrap="square" lIns="0" rIns="0" tIns="0" bIns="0" anchor="t">
+          <a:bodyPr wrap="square" lIns="0" tIns="0" rIns="0" bIns="0" anchor="t">
             <a:spAutoFit/>
           </a:bodyPr>
           <a:lstStyle/>
@@ -11397,7 +11329,7 @@
           <a:noFill/>
         </p:spPr>
         <p:txBody>
-          <a:bodyPr wrap="square" lIns="0" rIns="0" tIns="0" bIns="0" anchor="t">
+          <a:bodyPr wrap="square" lIns="0" tIns="0" rIns="0" bIns="0" anchor="t">
             <a:spAutoFit/>
           </a:bodyPr>
           <a:lstStyle/>
@@ -11442,7 +11374,7 @@
           <a:noFill/>
         </p:spPr>
         <p:txBody>
-          <a:bodyPr wrap="square" lIns="0" rIns="0" tIns="0" bIns="0" anchor="t">
+          <a:bodyPr wrap="square" lIns="0" tIns="0" rIns="0" bIns="0" anchor="t">
             <a:spAutoFit/>
           </a:bodyPr>
           <a:lstStyle/>
@@ -11510,6 +11442,7 @@
           <a:lstStyle/>
           <a:p>
             <a:pPr algn="ctr"/>
+            <a:endParaRPr/>
           </a:p>
         </p:txBody>
       </p:sp>
@@ -11553,6 +11486,7 @@
           <a:lstStyle/>
           <a:p>
             <a:pPr algn="ctr"/>
+            <a:endParaRPr/>
           </a:p>
         </p:txBody>
       </p:sp>
@@ -11565,15 +11499,15 @@
         <p:spPr>
           <a:xfrm>
             <a:off x="594360" y="6528816"/>
-            <a:ext cx="8046720" cy="182880"/>
-          </a:xfrm>
-          <a:prstGeom prst="rect">
-            <a:avLst/>
-          </a:prstGeom>
-          <a:noFill/>
-        </p:spPr>
-        <p:txBody>
-          <a:bodyPr wrap="square" lIns="0" rIns="0" tIns="0" bIns="0" anchor="t">
+            <a:ext cx="8046720" cy="132216"/>
+          </a:xfrm>
+          <a:prstGeom prst="rect">
+            <a:avLst/>
+          </a:prstGeom>
+          <a:noFill/>
+        </p:spPr>
+        <p:txBody>
+          <a:bodyPr wrap="square" lIns="0" tIns="0" rIns="0" bIns="0" anchor="t">
             <a:spAutoFit/>
           </a:bodyPr>
           <a:lstStyle/>
@@ -11596,7 +11530,8 @@
               </a:defRPr>
             </a:pPr>
             <a:r>
-              <a:t>QA-SRL GEN  /  DIALOGUE DATASETS</a:t>
+              <a:rPr dirty="0"/>
+              <a:t>AITETIQ  /  DIALOGUE DATASETS</a:t>
             </a:r>
           </a:p>
         </p:txBody>
@@ -11618,7 +11553,7 @@
           <a:noFill/>
         </p:spPr>
         <p:txBody>
-          <a:bodyPr wrap="square" lIns="0" rIns="0" tIns="0" bIns="0" anchor="t">
+          <a:bodyPr wrap="square" lIns="0" tIns="0" rIns="0" bIns="0" anchor="t">
             <a:spAutoFit/>
           </a:bodyPr>
           <a:lstStyle/>
@@ -11690,6 +11625,7 @@
           <a:lstStyle/>
           <a:p>
             <a:pPr algn="ctr"/>
+            <a:endParaRPr/>
           </a:p>
         </p:txBody>
       </p:sp>
@@ -11737,6 +11673,7 @@
           <a:lstStyle/>
           <a:p>
             <a:pPr algn="ctr"/>
+            <a:endParaRPr/>
           </a:p>
         </p:txBody>
       </p:sp>
@@ -11757,7 +11694,7 @@
           <a:noFill/>
         </p:spPr>
         <p:txBody>
-          <a:bodyPr wrap="square" lIns="0" rIns="0" tIns="0" bIns="0" anchor="t">
+          <a:bodyPr wrap="square" lIns="0" tIns="0" rIns="0" bIns="0" anchor="t">
             <a:spAutoFit/>
           </a:bodyPr>
           <a:lstStyle/>
@@ -11802,7 +11739,7 @@
           <a:noFill/>
         </p:spPr>
         <p:txBody>
-          <a:bodyPr wrap="square" lIns="0" rIns="0" tIns="0" bIns="0" anchor="t">
+          <a:bodyPr wrap="square" lIns="0" tIns="0" rIns="0" bIns="0" anchor="t">
             <a:spAutoFit/>
           </a:bodyPr>
           <a:lstStyle/>
@@ -11891,7 +11828,7 @@
           <a:noFill/>
         </p:spPr>
         <p:txBody>
-          <a:bodyPr wrap="square" lIns="0" rIns="0" tIns="0" bIns="0" anchor="t">
+          <a:bodyPr wrap="square" lIns="0" tIns="0" rIns="0" bIns="0" anchor="t">
             <a:spAutoFit/>
           </a:bodyPr>
           <a:lstStyle/>
@@ -11936,7 +11873,7 @@
           <a:noFill/>
         </p:spPr>
         <p:txBody>
-          <a:bodyPr wrap="square" lIns="0" rIns="0" tIns="0" bIns="0" anchor="t">
+          <a:bodyPr wrap="square" lIns="0" tIns="0" rIns="0" bIns="0" anchor="t">
             <a:spAutoFit/>
           </a:bodyPr>
           <a:lstStyle/>
@@ -12050,6 +11987,7 @@
           <a:lstStyle/>
           <a:p>
             <a:pPr algn="ctr"/>
+            <a:endParaRPr/>
           </a:p>
         </p:txBody>
       </p:sp>
@@ -12070,7 +12008,7 @@
           <a:noFill/>
         </p:spPr>
         <p:txBody>
-          <a:bodyPr wrap="square" lIns="0" rIns="0" tIns="0" bIns="0" anchor="t">
+          <a:bodyPr wrap="square" lIns="0" tIns="0" rIns="0" bIns="0" anchor="t">
             <a:spAutoFit/>
           </a:bodyPr>
           <a:lstStyle/>
@@ -12115,7 +12053,7 @@
           <a:noFill/>
         </p:spPr>
         <p:txBody>
-          <a:bodyPr wrap="square" lIns="0" rIns="0" tIns="0" bIns="0" anchor="t">
+          <a:bodyPr wrap="square" lIns="0" tIns="0" rIns="0" bIns="0" anchor="t">
             <a:spAutoFit/>
           </a:bodyPr>
           <a:lstStyle/>
@@ -12152,7 +12090,7 @@
 </file>
 
 <file path=ppt/slides/slide2.xml><?xml version="1.0" encoding="utf-8"?>
-<p:sld xmlns:a="http://schemas.openxmlformats.org/drawingml/2006/main" xmlns:p="http://schemas.openxmlformats.org/presentationml/2006/main" xmlns:r="http://schemas.openxmlformats.org/officeDocument/2006/relationships">
+<p:sld xmlns:a="http://schemas.openxmlformats.org/drawingml/2006/main" xmlns:r="http://schemas.openxmlformats.org/officeDocument/2006/relationships" xmlns:p="http://schemas.openxmlformats.org/presentationml/2006/main">
   <p:cSld>
     <p:bg>
       <p:bgPr>
@@ -12168,7 +12106,14 @@
         <p:cNvGrpSpPr/>
         <p:nvPr/>
       </p:nvGrpSpPr>
-      <p:grpSpPr/>
+      <p:grpSpPr>
+        <a:xfrm>
+          <a:off x="0" y="0"/>
+          <a:ext cx="0" cy="0"/>
+          <a:chOff x="0" y="0"/>
+          <a:chExt cx="0" cy="0"/>
+        </a:xfrm>
+      </p:grpSpPr>
       <p:sp>
         <p:nvSpPr>
           <p:cNvPr id="2" name="TextBox 1"/>
@@ -12186,7 +12131,7 @@
           <a:noFill/>
         </p:spPr>
         <p:txBody>
-          <a:bodyPr wrap="square" lIns="0" rIns="0" tIns="0" bIns="0" anchor="t">
+          <a:bodyPr wrap="square" lIns="0" tIns="0" rIns="0" bIns="0" anchor="t">
             <a:spAutoFit/>
           </a:bodyPr>
           <a:lstStyle/>
@@ -12231,7 +12176,7 @@
           <a:noFill/>
         </p:spPr>
         <p:txBody>
-          <a:bodyPr wrap="square" lIns="0" rIns="0" tIns="0" bIns="0" anchor="t">
+          <a:bodyPr wrap="square" lIns="0" tIns="0" rIns="0" bIns="0" anchor="t">
             <a:spAutoFit/>
           </a:bodyPr>
           <a:lstStyle/>
@@ -12276,7 +12221,7 @@
           <a:noFill/>
         </p:spPr>
         <p:txBody>
-          <a:bodyPr wrap="square" lIns="0" rIns="0" tIns="0" bIns="0" anchor="t">
+          <a:bodyPr wrap="square" lIns="0" tIns="0" rIns="0" bIns="0" anchor="t">
             <a:spAutoFit/>
           </a:bodyPr>
           <a:lstStyle/>
@@ -12344,6 +12289,7 @@
           <a:lstStyle/>
           <a:p>
             <a:pPr algn="ctr"/>
+            <a:endParaRPr/>
           </a:p>
         </p:txBody>
       </p:sp>
@@ -12387,6 +12333,7 @@
           <a:lstStyle/>
           <a:p>
             <a:pPr algn="ctr"/>
+            <a:endParaRPr/>
           </a:p>
         </p:txBody>
       </p:sp>
@@ -12399,15 +12346,15 @@
         <p:spPr>
           <a:xfrm>
             <a:off x="594360" y="6528816"/>
-            <a:ext cx="8046720" cy="182880"/>
-          </a:xfrm>
-          <a:prstGeom prst="rect">
-            <a:avLst/>
-          </a:prstGeom>
-          <a:noFill/>
-        </p:spPr>
-        <p:txBody>
-          <a:bodyPr wrap="square" lIns="0" rIns="0" tIns="0" bIns="0" anchor="t">
+            <a:ext cx="8046720" cy="132216"/>
+          </a:xfrm>
+          <a:prstGeom prst="rect">
+            <a:avLst/>
+          </a:prstGeom>
+          <a:noFill/>
+        </p:spPr>
+        <p:txBody>
+          <a:bodyPr wrap="square" lIns="0" tIns="0" rIns="0" bIns="0" anchor="t">
             <a:spAutoFit/>
           </a:bodyPr>
           <a:lstStyle/>
@@ -12430,7 +12377,8 @@
               </a:defRPr>
             </a:pPr>
             <a:r>
-              <a:t>QA-SRL GEN  /  DIALOGUE DATASETS</a:t>
+              <a:rPr dirty="0"/>
+              <a:t>AITETIQ  /  DIALOGUE DATASETS</a:t>
             </a:r>
           </a:p>
         </p:txBody>
@@ -12452,7 +12400,7 @@
           <a:noFill/>
         </p:spPr>
         <p:txBody>
-          <a:bodyPr wrap="square" lIns="0" rIns="0" tIns="0" bIns="0" anchor="t">
+          <a:bodyPr wrap="square" lIns="0" tIns="0" rIns="0" bIns="0" anchor="t">
             <a:spAutoFit/>
           </a:bodyPr>
           <a:lstStyle/>
@@ -12524,6 +12472,7 @@
           <a:lstStyle/>
           <a:p>
             <a:pPr algn="ctr"/>
+            <a:endParaRPr/>
           </a:p>
         </p:txBody>
       </p:sp>
@@ -12544,7 +12493,7 @@
           <a:noFill/>
         </p:spPr>
         <p:txBody>
-          <a:bodyPr wrap="square" lIns="0" rIns="0" tIns="0" bIns="0" anchor="t">
+          <a:bodyPr wrap="square" lIns="0" tIns="0" rIns="0" bIns="0" anchor="t">
             <a:spAutoFit/>
           </a:bodyPr>
           <a:lstStyle/>
@@ -12589,7 +12538,7 @@
           <a:noFill/>
         </p:spPr>
         <p:txBody>
-          <a:bodyPr wrap="square" lIns="0" rIns="0" tIns="0" bIns="0" anchor="t">
+          <a:bodyPr wrap="square" lIns="0" tIns="0" rIns="0" bIns="0" anchor="t">
             <a:spAutoFit/>
           </a:bodyPr>
           <a:lstStyle/>
@@ -12656,7 +12605,7 @@
           <a:noFill/>
         </p:spPr>
         <p:txBody>
-          <a:bodyPr wrap="square" lIns="0" rIns="0" tIns="0" bIns="0" anchor="t">
+          <a:bodyPr wrap="square" lIns="0" tIns="0" rIns="0" bIns="0" anchor="t">
             <a:spAutoFit/>
           </a:bodyPr>
           <a:lstStyle/>
@@ -12748,6 +12697,7 @@
           <a:lstStyle/>
           <a:p>
             <a:pPr algn="ctr"/>
+            <a:endParaRPr/>
           </a:p>
         </p:txBody>
       </p:sp>
@@ -12768,7 +12718,7 @@
           <a:noFill/>
         </p:spPr>
         <p:txBody>
-          <a:bodyPr wrap="square" lIns="0" rIns="0" tIns="0" bIns="0" anchor="ctr">
+          <a:bodyPr wrap="square" lIns="0" tIns="0" rIns="0" bIns="0" anchor="ctr">
             <a:noAutofit/>
           </a:bodyPr>
           <a:lstStyle/>
@@ -12840,6 +12790,7 @@
           <a:lstStyle/>
           <a:p>
             <a:pPr algn="ctr"/>
+            <a:endParaRPr/>
           </a:p>
         </p:txBody>
       </p:sp>
@@ -12860,7 +12811,7 @@
           <a:noFill/>
         </p:spPr>
         <p:txBody>
-          <a:bodyPr wrap="square" lIns="0" rIns="0" tIns="0" bIns="0" anchor="t">
+          <a:bodyPr wrap="square" lIns="0" tIns="0" rIns="0" bIns="0" anchor="t">
             <a:spAutoFit/>
           </a:bodyPr>
           <a:lstStyle/>
@@ -12905,7 +12856,7 @@
           <a:noFill/>
         </p:spPr>
         <p:txBody>
-          <a:bodyPr wrap="square" lIns="0" rIns="0" tIns="0" bIns="0" anchor="t">
+          <a:bodyPr wrap="square" lIns="0" tIns="0" rIns="0" bIns="0" anchor="t">
             <a:spAutoFit/>
           </a:bodyPr>
           <a:lstStyle/>
@@ -12972,7 +12923,7 @@
           <a:noFill/>
         </p:spPr>
         <p:txBody>
-          <a:bodyPr wrap="square" lIns="0" rIns="0" tIns="0" bIns="0" anchor="t">
+          <a:bodyPr wrap="square" lIns="0" tIns="0" rIns="0" bIns="0" anchor="t">
             <a:spAutoFit/>
           </a:bodyPr>
           <a:lstStyle/>
@@ -13064,6 +13015,7 @@
           <a:lstStyle/>
           <a:p>
             <a:pPr algn="ctr"/>
+            <a:endParaRPr/>
           </a:p>
         </p:txBody>
       </p:sp>
@@ -13084,7 +13036,7 @@
           <a:noFill/>
         </p:spPr>
         <p:txBody>
-          <a:bodyPr wrap="square" lIns="0" rIns="0" tIns="0" bIns="0" anchor="ctr">
+          <a:bodyPr wrap="square" lIns="0" tIns="0" rIns="0" bIns="0" anchor="ctr">
             <a:noAutofit/>
           </a:bodyPr>
           <a:lstStyle/>
@@ -13156,6 +13108,7 @@
           <a:lstStyle/>
           <a:p>
             <a:pPr algn="ctr"/>
+            <a:endParaRPr/>
           </a:p>
         </p:txBody>
       </p:sp>
@@ -13176,7 +13129,7 @@
           <a:noFill/>
         </p:spPr>
         <p:txBody>
-          <a:bodyPr wrap="square" lIns="0" rIns="0" tIns="0" bIns="0" anchor="t">
+          <a:bodyPr wrap="square" lIns="0" tIns="0" rIns="0" bIns="0" anchor="t">
             <a:spAutoFit/>
           </a:bodyPr>
           <a:lstStyle/>
@@ -13221,7 +13174,7 @@
           <a:noFill/>
         </p:spPr>
         <p:txBody>
-          <a:bodyPr wrap="square" lIns="0" rIns="0" tIns="0" bIns="0" anchor="t">
+          <a:bodyPr wrap="square" lIns="0" tIns="0" rIns="0" bIns="0" anchor="t">
             <a:spAutoFit/>
           </a:bodyPr>
           <a:lstStyle/>
@@ -13288,7 +13241,7 @@
           <a:noFill/>
         </p:spPr>
         <p:txBody>
-          <a:bodyPr wrap="square" lIns="0" rIns="0" tIns="0" bIns="0" anchor="t">
+          <a:bodyPr wrap="square" lIns="0" tIns="0" rIns="0" bIns="0" anchor="t">
             <a:spAutoFit/>
           </a:bodyPr>
           <a:lstStyle/>
@@ -13380,6 +13333,7 @@
           <a:lstStyle/>
           <a:p>
             <a:pPr algn="ctr"/>
+            <a:endParaRPr/>
           </a:p>
         </p:txBody>
       </p:sp>
@@ -13400,7 +13354,7 @@
           <a:noFill/>
         </p:spPr>
         <p:txBody>
-          <a:bodyPr wrap="square" lIns="0" rIns="0" tIns="0" bIns="0" anchor="ctr">
+          <a:bodyPr wrap="square" lIns="0" tIns="0" rIns="0" bIns="0" anchor="ctr">
             <a:noAutofit/>
           </a:bodyPr>
           <a:lstStyle/>
@@ -13445,7 +13399,7 @@
           <a:noFill/>
         </p:spPr>
         <p:txBody>
-          <a:bodyPr wrap="square" lIns="0" rIns="0" tIns="0" bIns="0" anchor="t">
+          <a:bodyPr wrap="square" lIns="0" tIns="0" rIns="0" bIns="0" anchor="t">
             <a:spAutoFit/>
           </a:bodyPr>
           <a:lstStyle/>
@@ -13482,7 +13436,7 @@
 </file>
 
 <file path=ppt/slides/slide3.xml><?xml version="1.0" encoding="utf-8"?>
-<p:sld xmlns:a="http://schemas.openxmlformats.org/drawingml/2006/main" xmlns:p="http://schemas.openxmlformats.org/presentationml/2006/main" xmlns:r="http://schemas.openxmlformats.org/officeDocument/2006/relationships">
+<p:sld xmlns:a="http://schemas.openxmlformats.org/drawingml/2006/main" xmlns:r="http://schemas.openxmlformats.org/officeDocument/2006/relationships" xmlns:p="http://schemas.openxmlformats.org/presentationml/2006/main">
   <p:cSld>
     <p:bg>
       <p:bgPr>
@@ -13498,7 +13452,14 @@
         <p:cNvGrpSpPr/>
         <p:nvPr/>
       </p:nvGrpSpPr>
-      <p:grpSpPr/>
+      <p:grpSpPr>
+        <a:xfrm>
+          <a:off x="0" y="0"/>
+          <a:ext cx="0" cy="0"/>
+          <a:chOff x="0" y="0"/>
+          <a:chExt cx="0" cy="0"/>
+        </a:xfrm>
+      </p:grpSpPr>
       <p:sp>
         <p:nvSpPr>
           <p:cNvPr id="2" name="TextBox 1"/>
@@ -13516,7 +13477,7 @@
           <a:noFill/>
         </p:spPr>
         <p:txBody>
-          <a:bodyPr wrap="square" lIns="0" rIns="0" tIns="0" bIns="0" anchor="t">
+          <a:bodyPr wrap="square" lIns="0" tIns="0" rIns="0" bIns="0" anchor="t">
             <a:spAutoFit/>
           </a:bodyPr>
           <a:lstStyle/>
@@ -13561,7 +13522,7 @@
           <a:noFill/>
         </p:spPr>
         <p:txBody>
-          <a:bodyPr wrap="square" lIns="0" rIns="0" tIns="0" bIns="0" anchor="t">
+          <a:bodyPr wrap="square" lIns="0" tIns="0" rIns="0" bIns="0" anchor="t">
             <a:spAutoFit/>
           </a:bodyPr>
           <a:lstStyle/>
@@ -13606,7 +13567,7 @@
           <a:noFill/>
         </p:spPr>
         <p:txBody>
-          <a:bodyPr wrap="square" lIns="0" rIns="0" tIns="0" bIns="0" anchor="t">
+          <a:bodyPr wrap="square" lIns="0" tIns="0" rIns="0" bIns="0" anchor="t">
             <a:spAutoFit/>
           </a:bodyPr>
           <a:lstStyle/>
@@ -13674,6 +13635,7 @@
           <a:lstStyle/>
           <a:p>
             <a:pPr algn="ctr"/>
+            <a:endParaRPr/>
           </a:p>
         </p:txBody>
       </p:sp>
@@ -13717,6 +13679,7 @@
           <a:lstStyle/>
           <a:p>
             <a:pPr algn="ctr"/>
+            <a:endParaRPr/>
           </a:p>
         </p:txBody>
       </p:sp>
@@ -13729,15 +13692,15 @@
         <p:spPr>
           <a:xfrm>
             <a:off x="594360" y="6528816"/>
-            <a:ext cx="8046720" cy="182880"/>
-          </a:xfrm>
-          <a:prstGeom prst="rect">
-            <a:avLst/>
-          </a:prstGeom>
-          <a:noFill/>
-        </p:spPr>
-        <p:txBody>
-          <a:bodyPr wrap="square" lIns="0" rIns="0" tIns="0" bIns="0" anchor="t">
+            <a:ext cx="8046720" cy="132216"/>
+          </a:xfrm>
+          <a:prstGeom prst="rect">
+            <a:avLst/>
+          </a:prstGeom>
+          <a:noFill/>
+        </p:spPr>
+        <p:txBody>
+          <a:bodyPr wrap="square" lIns="0" tIns="0" rIns="0" bIns="0" anchor="t">
             <a:spAutoFit/>
           </a:bodyPr>
           <a:lstStyle/>
@@ -13760,7 +13723,8 @@
               </a:defRPr>
             </a:pPr>
             <a:r>
-              <a:t>QA-SRL GEN  /  DIALOGUE DATASETS</a:t>
+              <a:rPr dirty="0"/>
+              <a:t>AITETIQ  /  DIALOGUE DATASETS</a:t>
             </a:r>
           </a:p>
         </p:txBody>
@@ -13782,7 +13746,7 @@
           <a:noFill/>
         </p:spPr>
         <p:txBody>
-          <a:bodyPr wrap="square" lIns="0" rIns="0" tIns="0" bIns="0" anchor="t">
+          <a:bodyPr wrap="square" lIns="0" tIns="0" rIns="0" bIns="0" anchor="t">
             <a:spAutoFit/>
           </a:bodyPr>
           <a:lstStyle/>
@@ -13854,6 +13818,7 @@
           <a:lstStyle/>
           <a:p>
             <a:pPr algn="ctr"/>
+            <a:endParaRPr/>
           </a:p>
         </p:txBody>
       </p:sp>
@@ -13897,6 +13862,7 @@
           <a:lstStyle/>
           <a:p>
             <a:pPr algn="ctr"/>
+            <a:endParaRPr/>
           </a:p>
         </p:txBody>
       </p:sp>
@@ -13917,7 +13883,7 @@
           <a:noFill/>
         </p:spPr>
         <p:txBody>
-          <a:bodyPr wrap="square" lIns="0" rIns="0" tIns="0" bIns="0" anchor="t">
+          <a:bodyPr wrap="square" lIns="0" tIns="0" rIns="0" bIns="0" anchor="t">
             <a:spAutoFit/>
           </a:bodyPr>
           <a:lstStyle/>
@@ -13962,7 +13928,7 @@
           <a:noFill/>
         </p:spPr>
         <p:txBody>
-          <a:bodyPr wrap="square" lIns="0" rIns="0" tIns="0" bIns="0" anchor="t">
+          <a:bodyPr wrap="square" lIns="0" tIns="0" rIns="0" bIns="0" anchor="t">
             <a:spAutoFit/>
           </a:bodyPr>
           <a:lstStyle/>
@@ -14007,7 +13973,7 @@
           <a:noFill/>
         </p:spPr>
         <p:txBody>
-          <a:bodyPr wrap="square" lIns="0" rIns="0" tIns="0" bIns="0" anchor="t">
+          <a:bodyPr wrap="square" lIns="0" tIns="0" rIns="0" bIns="0" anchor="t">
             <a:spAutoFit/>
           </a:bodyPr>
           <a:lstStyle/>
@@ -14119,6 +14085,7 @@
           <a:lstStyle/>
           <a:p>
             <a:pPr algn="ctr"/>
+            <a:endParaRPr/>
           </a:p>
         </p:txBody>
       </p:sp>
@@ -14166,6 +14133,7 @@
           <a:lstStyle/>
           <a:p>
             <a:pPr algn="ctr"/>
+            <a:endParaRPr/>
           </a:p>
         </p:txBody>
       </p:sp>
@@ -14209,6 +14177,7 @@
           <a:lstStyle/>
           <a:p>
             <a:pPr algn="ctr"/>
+            <a:endParaRPr/>
           </a:p>
         </p:txBody>
       </p:sp>
@@ -14229,7 +14198,7 @@
           <a:noFill/>
         </p:spPr>
         <p:txBody>
-          <a:bodyPr wrap="square" lIns="0" rIns="0" tIns="0" bIns="0" anchor="t">
+          <a:bodyPr wrap="square" lIns="0" tIns="0" rIns="0" bIns="0" anchor="t">
             <a:spAutoFit/>
           </a:bodyPr>
           <a:lstStyle/>
@@ -14274,7 +14243,7 @@
           <a:noFill/>
         </p:spPr>
         <p:txBody>
-          <a:bodyPr wrap="square" lIns="0" rIns="0" tIns="0" bIns="0" anchor="t">
+          <a:bodyPr wrap="square" lIns="0" tIns="0" rIns="0" bIns="0" anchor="t">
             <a:spAutoFit/>
           </a:bodyPr>
           <a:lstStyle/>
@@ -14319,7 +14288,7 @@
           <a:noFill/>
         </p:spPr>
         <p:txBody>
-          <a:bodyPr wrap="square" lIns="0" rIns="0" tIns="0" bIns="0" anchor="t">
+          <a:bodyPr wrap="square" lIns="0" tIns="0" rIns="0" bIns="0" anchor="t">
             <a:spAutoFit/>
           </a:bodyPr>
           <a:lstStyle/>
@@ -14431,6 +14400,7 @@
           <a:lstStyle/>
           <a:p>
             <a:pPr algn="ctr"/>
+            <a:endParaRPr/>
           </a:p>
         </p:txBody>
       </p:sp>
@@ -14478,6 +14448,7 @@
           <a:lstStyle/>
           <a:p>
             <a:pPr algn="ctr"/>
+            <a:endParaRPr/>
           </a:p>
         </p:txBody>
       </p:sp>
@@ -14521,6 +14492,7 @@
           <a:lstStyle/>
           <a:p>
             <a:pPr algn="ctr"/>
+            <a:endParaRPr/>
           </a:p>
         </p:txBody>
       </p:sp>
@@ -14541,7 +14513,7 @@
           <a:noFill/>
         </p:spPr>
         <p:txBody>
-          <a:bodyPr wrap="square" lIns="0" rIns="0" tIns="0" bIns="0" anchor="t">
+          <a:bodyPr wrap="square" lIns="0" tIns="0" rIns="0" bIns="0" anchor="t">
             <a:spAutoFit/>
           </a:bodyPr>
           <a:lstStyle/>
@@ -14586,7 +14558,7 @@
           <a:noFill/>
         </p:spPr>
         <p:txBody>
-          <a:bodyPr wrap="square" lIns="0" rIns="0" tIns="0" bIns="0" anchor="t">
+          <a:bodyPr wrap="square" lIns="0" tIns="0" rIns="0" bIns="0" anchor="t">
             <a:spAutoFit/>
           </a:bodyPr>
           <a:lstStyle/>
@@ -14631,7 +14603,7 @@
           <a:noFill/>
         </p:spPr>
         <p:txBody>
-          <a:bodyPr wrap="square" lIns="0" rIns="0" tIns="0" bIns="0" anchor="t">
+          <a:bodyPr wrap="square" lIns="0" tIns="0" rIns="0" bIns="0" anchor="t">
             <a:spAutoFit/>
           </a:bodyPr>
           <a:lstStyle/>
@@ -14743,6 +14715,7 @@
           <a:lstStyle/>
           <a:p>
             <a:pPr algn="ctr"/>
+            <a:endParaRPr/>
           </a:p>
         </p:txBody>
       </p:sp>
@@ -14790,6 +14763,7 @@
           <a:lstStyle/>
           <a:p>
             <a:pPr algn="ctr"/>
+            <a:endParaRPr/>
           </a:p>
         </p:txBody>
       </p:sp>
@@ -14833,6 +14807,7 @@
           <a:lstStyle/>
           <a:p>
             <a:pPr algn="ctr"/>
+            <a:endParaRPr/>
           </a:p>
         </p:txBody>
       </p:sp>
@@ -14853,7 +14828,7 @@
           <a:noFill/>
         </p:spPr>
         <p:txBody>
-          <a:bodyPr wrap="square" lIns="0" rIns="0" tIns="0" bIns="0" anchor="t">
+          <a:bodyPr wrap="square" lIns="0" tIns="0" rIns="0" bIns="0" anchor="t">
             <a:spAutoFit/>
           </a:bodyPr>
           <a:lstStyle/>
@@ -14898,7 +14873,7 @@
           <a:noFill/>
         </p:spPr>
         <p:txBody>
-          <a:bodyPr wrap="square" lIns="0" rIns="0" tIns="0" bIns="0" anchor="t">
+          <a:bodyPr wrap="square" lIns="0" tIns="0" rIns="0" bIns="0" anchor="t">
             <a:spAutoFit/>
           </a:bodyPr>
           <a:lstStyle/>
@@ -14943,7 +14918,7 @@
           <a:noFill/>
         </p:spPr>
         <p:txBody>
-          <a:bodyPr wrap="square" lIns="0" rIns="0" tIns="0" bIns="0" anchor="t">
+          <a:bodyPr wrap="square" lIns="0" tIns="0" rIns="0" bIns="0" anchor="t">
             <a:spAutoFit/>
           </a:bodyPr>
           <a:lstStyle/>
@@ -15055,6 +15030,7 @@
           <a:lstStyle/>
           <a:p>
             <a:pPr algn="ctr"/>
+            <a:endParaRPr/>
           </a:p>
         </p:txBody>
       </p:sp>
@@ -15102,6 +15078,7 @@
           <a:lstStyle/>
           <a:p>
             <a:pPr algn="ctr"/>
+            <a:endParaRPr/>
           </a:p>
         </p:txBody>
       </p:sp>
@@ -15145,6 +15122,7 @@
           <a:lstStyle/>
           <a:p>
             <a:pPr algn="ctr"/>
+            <a:endParaRPr/>
           </a:p>
         </p:txBody>
       </p:sp>
@@ -15165,7 +15143,7 @@
           <a:noFill/>
         </p:spPr>
         <p:txBody>
-          <a:bodyPr wrap="square" lIns="0" rIns="0" tIns="0" bIns="0" anchor="t">
+          <a:bodyPr wrap="square" lIns="0" tIns="0" rIns="0" bIns="0" anchor="t">
             <a:spAutoFit/>
           </a:bodyPr>
           <a:lstStyle/>
@@ -15210,7 +15188,7 @@
           <a:noFill/>
         </p:spPr>
         <p:txBody>
-          <a:bodyPr wrap="square" lIns="0" rIns="0" tIns="0" bIns="0" anchor="t">
+          <a:bodyPr wrap="square" lIns="0" tIns="0" rIns="0" bIns="0" anchor="t">
             <a:spAutoFit/>
           </a:bodyPr>
           <a:lstStyle/>
@@ -15255,7 +15233,7 @@
           <a:noFill/>
         </p:spPr>
         <p:txBody>
-          <a:bodyPr wrap="square" lIns="0" rIns="0" tIns="0" bIns="0" anchor="t">
+          <a:bodyPr wrap="square" lIns="0" tIns="0" rIns="0" bIns="0" anchor="t">
             <a:spAutoFit/>
           </a:bodyPr>
           <a:lstStyle/>
@@ -15369,6 +15347,7 @@
           <a:lstStyle/>
           <a:p>
             <a:pPr algn="ctr"/>
+            <a:endParaRPr/>
           </a:p>
         </p:txBody>
       </p:sp>
@@ -15389,7 +15368,7 @@
           <a:noFill/>
         </p:spPr>
         <p:txBody>
-          <a:bodyPr wrap="square" lIns="0" rIns="0" tIns="0" bIns="0" anchor="t">
+          <a:bodyPr wrap="square" lIns="0" tIns="0" rIns="0" bIns="0" anchor="t">
             <a:spAutoFit/>
           </a:bodyPr>
           <a:lstStyle/>
@@ -15426,7 +15405,7 @@
 </file>
 
 <file path=ppt/slides/slide4.xml><?xml version="1.0" encoding="utf-8"?>
-<p:sld xmlns:a="http://schemas.openxmlformats.org/drawingml/2006/main" xmlns:p="http://schemas.openxmlformats.org/presentationml/2006/main" xmlns:r="http://schemas.openxmlformats.org/officeDocument/2006/relationships">
+<p:sld xmlns:a="http://schemas.openxmlformats.org/drawingml/2006/main" xmlns:r="http://schemas.openxmlformats.org/officeDocument/2006/relationships" xmlns:p="http://schemas.openxmlformats.org/presentationml/2006/main">
   <p:cSld>
     <p:bg>
       <p:bgPr>
@@ -15442,7 +15421,14 @@
         <p:cNvGrpSpPr/>
         <p:nvPr/>
       </p:nvGrpSpPr>
-      <p:grpSpPr/>
+      <p:grpSpPr>
+        <a:xfrm>
+          <a:off x="0" y="0"/>
+          <a:ext cx="0" cy="0"/>
+          <a:chOff x="0" y="0"/>
+          <a:chExt cx="0" cy="0"/>
+        </a:xfrm>
+      </p:grpSpPr>
       <p:sp>
         <p:nvSpPr>
           <p:cNvPr id="2" name="TextBox 1"/>
@@ -15460,7 +15446,7 @@
           <a:noFill/>
         </p:spPr>
         <p:txBody>
-          <a:bodyPr wrap="square" lIns="0" rIns="0" tIns="0" bIns="0" anchor="t">
+          <a:bodyPr wrap="square" lIns="0" tIns="0" rIns="0" bIns="0" anchor="t">
             <a:spAutoFit/>
           </a:bodyPr>
           <a:lstStyle/>
@@ -15505,7 +15491,7 @@
           <a:noFill/>
         </p:spPr>
         <p:txBody>
-          <a:bodyPr wrap="square" lIns="0" rIns="0" tIns="0" bIns="0" anchor="t">
+          <a:bodyPr wrap="square" lIns="0" tIns="0" rIns="0" bIns="0" anchor="t">
             <a:spAutoFit/>
           </a:bodyPr>
           <a:lstStyle/>
@@ -15550,7 +15536,7 @@
           <a:noFill/>
         </p:spPr>
         <p:txBody>
-          <a:bodyPr wrap="square" lIns="0" rIns="0" tIns="0" bIns="0" anchor="t">
+          <a:bodyPr wrap="square" lIns="0" tIns="0" rIns="0" bIns="0" anchor="t">
             <a:spAutoFit/>
           </a:bodyPr>
           <a:lstStyle/>
@@ -15618,6 +15604,7 @@
           <a:lstStyle/>
           <a:p>
             <a:pPr algn="ctr"/>
+            <a:endParaRPr/>
           </a:p>
         </p:txBody>
       </p:sp>
@@ -15661,6 +15648,7 @@
           <a:lstStyle/>
           <a:p>
             <a:pPr algn="ctr"/>
+            <a:endParaRPr/>
           </a:p>
         </p:txBody>
       </p:sp>
@@ -15673,15 +15661,15 @@
         <p:spPr>
           <a:xfrm>
             <a:off x="594360" y="6528816"/>
-            <a:ext cx="8046720" cy="182880"/>
-          </a:xfrm>
-          <a:prstGeom prst="rect">
-            <a:avLst/>
-          </a:prstGeom>
-          <a:noFill/>
-        </p:spPr>
-        <p:txBody>
-          <a:bodyPr wrap="square" lIns="0" rIns="0" tIns="0" bIns="0" anchor="t">
+            <a:ext cx="8046720" cy="132216"/>
+          </a:xfrm>
+          <a:prstGeom prst="rect">
+            <a:avLst/>
+          </a:prstGeom>
+          <a:noFill/>
+        </p:spPr>
+        <p:txBody>
+          <a:bodyPr wrap="square" lIns="0" tIns="0" rIns="0" bIns="0" anchor="t">
             <a:spAutoFit/>
           </a:bodyPr>
           <a:lstStyle/>
@@ -15704,7 +15692,8 @@
               </a:defRPr>
             </a:pPr>
             <a:r>
-              <a:t>QA-SRL GEN  /  DIALOGUE DATASETS</a:t>
+              <a:rPr dirty="0"/>
+              <a:t>AITETIQ  /  DIALOGUE DATASETS</a:t>
             </a:r>
           </a:p>
         </p:txBody>
@@ -15726,7 +15715,7 @@
           <a:noFill/>
         </p:spPr>
         <p:txBody>
-          <a:bodyPr wrap="square" lIns="0" rIns="0" tIns="0" bIns="0" anchor="t">
+          <a:bodyPr wrap="square" lIns="0" tIns="0" rIns="0" bIns="0" anchor="t">
             <a:spAutoFit/>
           </a:bodyPr>
           <a:lstStyle/>
@@ -15798,6 +15787,7 @@
           <a:lstStyle/>
           <a:p>
             <a:pPr algn="ctr"/>
+            <a:endParaRPr/>
           </a:p>
         </p:txBody>
       </p:sp>
@@ -15841,6 +15831,7 @@
           <a:lstStyle/>
           <a:p>
             <a:pPr algn="ctr"/>
+            <a:endParaRPr/>
           </a:p>
         </p:txBody>
       </p:sp>
@@ -15861,7 +15852,7 @@
           <a:noFill/>
         </p:spPr>
         <p:txBody>
-          <a:bodyPr wrap="square" lIns="0" rIns="0" tIns="0" bIns="0" anchor="t">
+          <a:bodyPr wrap="square" lIns="0" tIns="0" rIns="0" bIns="0" anchor="t">
             <a:spAutoFit/>
           </a:bodyPr>
           <a:lstStyle/>
@@ -15906,7 +15897,7 @@
           <a:noFill/>
         </p:spPr>
         <p:txBody>
-          <a:bodyPr wrap="square" lIns="0" rIns="0" tIns="0" bIns="0" anchor="t">
+          <a:bodyPr wrap="square" lIns="0" tIns="0" rIns="0" bIns="0" anchor="t">
             <a:spAutoFit/>
           </a:bodyPr>
           <a:lstStyle/>
@@ -15951,7 +15942,7 @@
           <a:noFill/>
         </p:spPr>
         <p:txBody>
-          <a:bodyPr wrap="square" lIns="0" rIns="0" tIns="0" bIns="0" anchor="t">
+          <a:bodyPr wrap="square" lIns="0" tIns="0" rIns="0" bIns="0" anchor="t">
             <a:spAutoFit/>
           </a:bodyPr>
           <a:lstStyle/>
@@ -16067,6 +16058,7 @@
           <a:lstStyle/>
           <a:p>
             <a:pPr algn="ctr"/>
+            <a:endParaRPr/>
           </a:p>
         </p:txBody>
       </p:sp>
@@ -16110,6 +16102,7 @@
           <a:lstStyle/>
           <a:p>
             <a:pPr algn="ctr"/>
+            <a:endParaRPr/>
           </a:p>
         </p:txBody>
       </p:sp>
@@ -16130,7 +16123,7 @@
           <a:noFill/>
         </p:spPr>
         <p:txBody>
-          <a:bodyPr wrap="square" lIns="0" rIns="0" tIns="0" bIns="0" anchor="t">
+          <a:bodyPr wrap="square" lIns="0" tIns="0" rIns="0" bIns="0" anchor="t">
             <a:spAutoFit/>
           </a:bodyPr>
           <a:lstStyle/>
@@ -16175,7 +16168,7 @@
           <a:noFill/>
         </p:spPr>
         <p:txBody>
-          <a:bodyPr wrap="square" lIns="0" rIns="0" tIns="0" bIns="0" anchor="t">
+          <a:bodyPr wrap="square" lIns="0" tIns="0" rIns="0" bIns="0" anchor="t">
             <a:spAutoFit/>
           </a:bodyPr>
           <a:lstStyle/>
@@ -16220,7 +16213,7 @@
           <a:noFill/>
         </p:spPr>
         <p:txBody>
-          <a:bodyPr wrap="square" lIns="0" rIns="0" tIns="0" bIns="0" anchor="t">
+          <a:bodyPr wrap="square" lIns="0" tIns="0" rIns="0" bIns="0" anchor="t">
             <a:spAutoFit/>
           </a:bodyPr>
           <a:lstStyle/>
@@ -16336,6 +16329,7 @@
           <a:lstStyle/>
           <a:p>
             <a:pPr algn="ctr"/>
+            <a:endParaRPr/>
           </a:p>
         </p:txBody>
       </p:sp>
@@ -16379,6 +16373,7 @@
           <a:lstStyle/>
           <a:p>
             <a:pPr algn="ctr"/>
+            <a:endParaRPr/>
           </a:p>
         </p:txBody>
       </p:sp>
@@ -16399,7 +16394,7 @@
           <a:noFill/>
         </p:spPr>
         <p:txBody>
-          <a:bodyPr wrap="square" lIns="0" rIns="0" tIns="0" bIns="0" anchor="t">
+          <a:bodyPr wrap="square" lIns="0" tIns="0" rIns="0" bIns="0" anchor="t">
             <a:spAutoFit/>
           </a:bodyPr>
           <a:lstStyle/>
@@ -16444,7 +16439,7 @@
           <a:noFill/>
         </p:spPr>
         <p:txBody>
-          <a:bodyPr wrap="square" lIns="0" rIns="0" tIns="0" bIns="0" anchor="t">
+          <a:bodyPr wrap="square" lIns="0" tIns="0" rIns="0" bIns="0" anchor="t">
             <a:spAutoFit/>
           </a:bodyPr>
           <a:lstStyle/>
@@ -16489,7 +16484,7 @@
           <a:noFill/>
         </p:spPr>
         <p:txBody>
-          <a:bodyPr wrap="square" lIns="0" rIns="0" tIns="0" bIns="0" anchor="t">
+          <a:bodyPr wrap="square" lIns="0" tIns="0" rIns="0" bIns="0" anchor="t">
             <a:spAutoFit/>
           </a:bodyPr>
           <a:lstStyle/>
@@ -16603,6 +16598,7 @@
           <a:lstStyle/>
           <a:p>
             <a:pPr algn="ctr"/>
+            <a:endParaRPr/>
           </a:p>
         </p:txBody>
       </p:sp>
@@ -16623,7 +16619,7 @@
           <a:noFill/>
         </p:spPr>
         <p:txBody>
-          <a:bodyPr wrap="square" lIns="0" rIns="0" tIns="0" bIns="0" anchor="t">
+          <a:bodyPr wrap="square" lIns="0" tIns="0" rIns="0" bIns="0" anchor="t">
             <a:spAutoFit/>
           </a:bodyPr>
           <a:lstStyle/>
@@ -16668,7 +16664,7 @@
           <a:noFill/>
         </p:spPr>
         <p:txBody>
-          <a:bodyPr wrap="square" lIns="0" rIns="0" tIns="0" bIns="0" anchor="t">
+          <a:bodyPr wrap="square" lIns="0" tIns="0" rIns="0" bIns="0" anchor="t">
             <a:spAutoFit/>
           </a:bodyPr>
           <a:lstStyle/>
@@ -16705,7 +16701,7 @@
 </file>
 
 <file path=ppt/slides/slide5.xml><?xml version="1.0" encoding="utf-8"?>
-<p:sld xmlns:a="http://schemas.openxmlformats.org/drawingml/2006/main" xmlns:p="http://schemas.openxmlformats.org/presentationml/2006/main" xmlns:r="http://schemas.openxmlformats.org/officeDocument/2006/relationships">
+<p:sld xmlns:a="http://schemas.openxmlformats.org/drawingml/2006/main" xmlns:r="http://schemas.openxmlformats.org/officeDocument/2006/relationships" xmlns:p="http://schemas.openxmlformats.org/presentationml/2006/main">
   <p:cSld>
     <p:bg>
       <p:bgPr>
@@ -16721,7 +16717,14 @@
         <p:cNvGrpSpPr/>
         <p:nvPr/>
       </p:nvGrpSpPr>
-      <p:grpSpPr/>
+      <p:grpSpPr>
+        <a:xfrm>
+          <a:off x="0" y="0"/>
+          <a:ext cx="0" cy="0"/>
+          <a:chOff x="0" y="0"/>
+          <a:chExt cx="0" cy="0"/>
+        </a:xfrm>
+      </p:grpSpPr>
       <p:sp>
         <p:nvSpPr>
           <p:cNvPr id="2" name="TextBox 1"/>
@@ -16739,7 +16742,7 @@
           <a:noFill/>
         </p:spPr>
         <p:txBody>
-          <a:bodyPr wrap="square" lIns="0" rIns="0" tIns="0" bIns="0" anchor="t">
+          <a:bodyPr wrap="square" lIns="0" tIns="0" rIns="0" bIns="0" anchor="t">
             <a:spAutoFit/>
           </a:bodyPr>
           <a:lstStyle/>
@@ -16784,7 +16787,7 @@
           <a:noFill/>
         </p:spPr>
         <p:txBody>
-          <a:bodyPr wrap="square" lIns="0" rIns="0" tIns="0" bIns="0" anchor="t">
+          <a:bodyPr wrap="square" lIns="0" tIns="0" rIns="0" bIns="0" anchor="t">
             <a:spAutoFit/>
           </a:bodyPr>
           <a:lstStyle/>
@@ -16829,7 +16832,7 @@
           <a:noFill/>
         </p:spPr>
         <p:txBody>
-          <a:bodyPr wrap="square" lIns="0" rIns="0" tIns="0" bIns="0" anchor="t">
+          <a:bodyPr wrap="square" lIns="0" tIns="0" rIns="0" bIns="0" anchor="t">
             <a:spAutoFit/>
           </a:bodyPr>
           <a:lstStyle/>
@@ -16897,6 +16900,7 @@
           <a:lstStyle/>
           <a:p>
             <a:pPr algn="ctr"/>
+            <a:endParaRPr/>
           </a:p>
         </p:txBody>
       </p:sp>
@@ -16940,6 +16944,7 @@
           <a:lstStyle/>
           <a:p>
             <a:pPr algn="ctr"/>
+            <a:endParaRPr/>
           </a:p>
         </p:txBody>
       </p:sp>
@@ -16952,15 +16957,15 @@
         <p:spPr>
           <a:xfrm>
             <a:off x="594360" y="6528816"/>
-            <a:ext cx="8046720" cy="182880"/>
-          </a:xfrm>
-          <a:prstGeom prst="rect">
-            <a:avLst/>
-          </a:prstGeom>
-          <a:noFill/>
-        </p:spPr>
-        <p:txBody>
-          <a:bodyPr wrap="square" lIns="0" rIns="0" tIns="0" bIns="0" anchor="t">
+            <a:ext cx="8046720" cy="132216"/>
+          </a:xfrm>
+          <a:prstGeom prst="rect">
+            <a:avLst/>
+          </a:prstGeom>
+          <a:noFill/>
+        </p:spPr>
+        <p:txBody>
+          <a:bodyPr wrap="square" lIns="0" tIns="0" rIns="0" bIns="0" anchor="t">
             <a:spAutoFit/>
           </a:bodyPr>
           <a:lstStyle/>
@@ -16983,7 +16988,8 @@
               </a:defRPr>
             </a:pPr>
             <a:r>
-              <a:t>QA-SRL GEN  /  DIALOGUE DATASETS</a:t>
+              <a:rPr dirty="0"/>
+              <a:t>AITETIQ  /  DIALOGUE DATASETS</a:t>
             </a:r>
           </a:p>
         </p:txBody>
@@ -17005,7 +17011,7 @@
           <a:noFill/>
         </p:spPr>
         <p:txBody>
-          <a:bodyPr wrap="square" lIns="0" rIns="0" tIns="0" bIns="0" anchor="t">
+          <a:bodyPr wrap="square" lIns="0" tIns="0" rIns="0" bIns="0" anchor="t">
             <a:spAutoFit/>
           </a:bodyPr>
           <a:lstStyle/>
@@ -17077,6 +17083,7 @@
           <a:lstStyle/>
           <a:p>
             <a:pPr algn="ctr"/>
+            <a:endParaRPr/>
           </a:p>
         </p:txBody>
       </p:sp>
@@ -17120,6 +17127,7 @@
           <a:lstStyle/>
           <a:p>
             <a:pPr algn="ctr"/>
+            <a:endParaRPr/>
           </a:p>
         </p:txBody>
       </p:sp>
@@ -17140,7 +17148,7 @@
           <a:noFill/>
         </p:spPr>
         <p:txBody>
-          <a:bodyPr wrap="square" lIns="0" rIns="0" tIns="0" bIns="0" anchor="t">
+          <a:bodyPr wrap="square" lIns="0" tIns="0" rIns="0" bIns="0" anchor="t">
             <a:spAutoFit/>
           </a:bodyPr>
           <a:lstStyle/>
@@ -17185,7 +17193,7 @@
           <a:noFill/>
         </p:spPr>
         <p:txBody>
-          <a:bodyPr wrap="square" lIns="0" rIns="0" tIns="0" bIns="0" anchor="t">
+          <a:bodyPr wrap="square" lIns="0" tIns="0" rIns="0" bIns="0" anchor="t">
             <a:spAutoFit/>
           </a:bodyPr>
           <a:lstStyle/>
@@ -17230,7 +17238,7 @@
           <a:noFill/>
         </p:spPr>
         <p:txBody>
-          <a:bodyPr wrap="square" lIns="0" rIns="0" tIns="0" bIns="0" anchor="t">
+          <a:bodyPr wrap="square" lIns="0" tIns="0" rIns="0" bIns="0" anchor="t">
             <a:spAutoFit/>
           </a:bodyPr>
           <a:lstStyle/>
@@ -17412,6 +17420,7 @@
           <a:lstStyle/>
           <a:p>
             <a:pPr algn="ctr"/>
+            <a:endParaRPr/>
           </a:p>
         </p:txBody>
       </p:sp>
@@ -17455,6 +17464,7 @@
           <a:lstStyle/>
           <a:p>
             <a:pPr algn="ctr"/>
+            <a:endParaRPr/>
           </a:p>
         </p:txBody>
       </p:sp>
@@ -17475,7 +17485,7 @@
           <a:noFill/>
         </p:spPr>
         <p:txBody>
-          <a:bodyPr wrap="square" lIns="0" rIns="0" tIns="0" bIns="0" anchor="t">
+          <a:bodyPr wrap="square" lIns="0" tIns="0" rIns="0" bIns="0" anchor="t">
             <a:spAutoFit/>
           </a:bodyPr>
           <a:lstStyle/>
@@ -17520,7 +17530,7 @@
           <a:noFill/>
         </p:spPr>
         <p:txBody>
-          <a:bodyPr wrap="square" lIns="0" rIns="0" tIns="0" bIns="0" anchor="t">
+          <a:bodyPr wrap="square" lIns="0" tIns="0" rIns="0" bIns="0" anchor="t">
             <a:spAutoFit/>
           </a:bodyPr>
           <a:lstStyle/>
@@ -17565,7 +17575,7 @@
           <a:noFill/>
         </p:spPr>
         <p:txBody>
-          <a:bodyPr wrap="square" lIns="0" rIns="0" tIns="0" bIns="0" anchor="t">
+          <a:bodyPr wrap="square" lIns="0" tIns="0" rIns="0" bIns="0" anchor="t">
             <a:spAutoFit/>
           </a:bodyPr>
           <a:lstStyle/>
@@ -17725,6 +17735,7 @@
           <a:lstStyle/>
           <a:p>
             <a:pPr algn="ctr"/>
+            <a:endParaRPr/>
           </a:p>
         </p:txBody>
       </p:sp>
@@ -17768,6 +17779,7 @@
           <a:lstStyle/>
           <a:p>
             <a:pPr algn="ctr"/>
+            <a:endParaRPr/>
           </a:p>
         </p:txBody>
       </p:sp>
@@ -17788,7 +17800,7 @@
           <a:noFill/>
         </p:spPr>
         <p:txBody>
-          <a:bodyPr wrap="square" lIns="0" rIns="0" tIns="0" bIns="0" anchor="t">
+          <a:bodyPr wrap="square" lIns="0" tIns="0" rIns="0" bIns="0" anchor="t">
             <a:spAutoFit/>
           </a:bodyPr>
           <a:lstStyle/>
@@ -17833,7 +17845,7 @@
           <a:noFill/>
         </p:spPr>
         <p:txBody>
-          <a:bodyPr wrap="square" lIns="0" rIns="0" tIns="0" bIns="0" anchor="t">
+          <a:bodyPr wrap="square" lIns="0" tIns="0" rIns="0" bIns="0" anchor="t">
             <a:spAutoFit/>
           </a:bodyPr>
           <a:lstStyle/>
@@ -17878,7 +17890,7 @@
           <a:noFill/>
         </p:spPr>
         <p:txBody>
-          <a:bodyPr wrap="square" lIns="0" rIns="0" tIns="0" bIns="0" anchor="t">
+          <a:bodyPr wrap="square" lIns="0" tIns="0" rIns="0" bIns="0" anchor="t">
             <a:spAutoFit/>
           </a:bodyPr>
           <a:lstStyle/>
@@ -18025,7 +18037,7 @@
 </file>
 
 <file path=ppt/slides/slide6.xml><?xml version="1.0" encoding="utf-8"?>
-<p:sld xmlns:a="http://schemas.openxmlformats.org/drawingml/2006/main" xmlns:p="http://schemas.openxmlformats.org/presentationml/2006/main" xmlns:r="http://schemas.openxmlformats.org/officeDocument/2006/relationships">
+<p:sld xmlns:a="http://schemas.openxmlformats.org/drawingml/2006/main" xmlns:r="http://schemas.openxmlformats.org/officeDocument/2006/relationships" xmlns:p="http://schemas.openxmlformats.org/presentationml/2006/main">
   <p:cSld>
     <p:bg>
       <p:bgPr>
@@ -18041,7 +18053,14 @@
         <p:cNvGrpSpPr/>
         <p:nvPr/>
       </p:nvGrpSpPr>
-      <p:grpSpPr/>
+      <p:grpSpPr>
+        <a:xfrm>
+          <a:off x="0" y="0"/>
+          <a:ext cx="0" cy="0"/>
+          <a:chOff x="0" y="0"/>
+          <a:chExt cx="0" cy="0"/>
+        </a:xfrm>
+      </p:grpSpPr>
       <p:sp>
         <p:nvSpPr>
           <p:cNvPr id="2" name="TextBox 1"/>
@@ -18059,7 +18078,7 @@
           <a:noFill/>
         </p:spPr>
         <p:txBody>
-          <a:bodyPr wrap="square" lIns="0" rIns="0" tIns="0" bIns="0" anchor="t">
+          <a:bodyPr wrap="square" lIns="0" tIns="0" rIns="0" bIns="0" anchor="t">
             <a:spAutoFit/>
           </a:bodyPr>
           <a:lstStyle/>
@@ -18104,7 +18123,7 @@
           <a:noFill/>
         </p:spPr>
         <p:txBody>
-          <a:bodyPr wrap="square" lIns="0" rIns="0" tIns="0" bIns="0" anchor="t">
+          <a:bodyPr wrap="square" lIns="0" tIns="0" rIns="0" bIns="0" anchor="t">
             <a:spAutoFit/>
           </a:bodyPr>
           <a:lstStyle/>
@@ -18149,7 +18168,7 @@
           <a:noFill/>
         </p:spPr>
         <p:txBody>
-          <a:bodyPr wrap="square" lIns="0" rIns="0" tIns="0" bIns="0" anchor="t">
+          <a:bodyPr wrap="square" lIns="0" tIns="0" rIns="0" bIns="0" anchor="t">
             <a:spAutoFit/>
           </a:bodyPr>
           <a:lstStyle/>
@@ -18217,6 +18236,7 @@
           <a:lstStyle/>
           <a:p>
             <a:pPr algn="ctr"/>
+            <a:endParaRPr/>
           </a:p>
         </p:txBody>
       </p:sp>
@@ -18260,6 +18280,7 @@
           <a:lstStyle/>
           <a:p>
             <a:pPr algn="ctr"/>
+            <a:endParaRPr/>
           </a:p>
         </p:txBody>
       </p:sp>
@@ -18272,15 +18293,15 @@
         <p:spPr>
           <a:xfrm>
             <a:off x="594360" y="6528816"/>
-            <a:ext cx="8046720" cy="182880"/>
-          </a:xfrm>
-          <a:prstGeom prst="rect">
-            <a:avLst/>
-          </a:prstGeom>
-          <a:noFill/>
-        </p:spPr>
-        <p:txBody>
-          <a:bodyPr wrap="square" lIns="0" rIns="0" tIns="0" bIns="0" anchor="t">
+            <a:ext cx="8046720" cy="132216"/>
+          </a:xfrm>
+          <a:prstGeom prst="rect">
+            <a:avLst/>
+          </a:prstGeom>
+          <a:noFill/>
+        </p:spPr>
+        <p:txBody>
+          <a:bodyPr wrap="square" lIns="0" tIns="0" rIns="0" bIns="0" anchor="t">
             <a:spAutoFit/>
           </a:bodyPr>
           <a:lstStyle/>
@@ -18303,7 +18324,8 @@
               </a:defRPr>
             </a:pPr>
             <a:r>
-              <a:t>QA-SRL GEN  /  DIALOGUE DATASETS</a:t>
+              <a:rPr dirty="0"/>
+              <a:t>AITETIQ  /  DIALOGUE DATASETS</a:t>
             </a:r>
           </a:p>
         </p:txBody>
@@ -18325,7 +18347,7 @@
           <a:noFill/>
         </p:spPr>
         <p:txBody>
-          <a:bodyPr wrap="square" lIns="0" rIns="0" tIns="0" bIns="0" anchor="t">
+          <a:bodyPr wrap="square" lIns="0" tIns="0" rIns="0" bIns="0" anchor="t">
             <a:spAutoFit/>
           </a:bodyPr>
           <a:lstStyle/>
@@ -18395,6 +18417,7 @@
           <a:lstStyle/>
           <a:p>
             <a:pPr algn="ctr"/>
+            <a:endParaRPr/>
           </a:p>
         </p:txBody>
       </p:sp>
@@ -18415,7 +18438,7 @@
           <a:noFill/>
         </p:spPr>
         <p:txBody>
-          <a:bodyPr wrap="square" lIns="0" rIns="0" tIns="0" bIns="0" anchor="t">
+          <a:bodyPr wrap="square" lIns="0" tIns="0" rIns="0" bIns="0" anchor="t">
             <a:spAutoFit/>
           </a:bodyPr>
           <a:lstStyle/>
@@ -18460,7 +18483,7 @@
           <a:noFill/>
         </p:spPr>
         <p:txBody>
-          <a:bodyPr wrap="square" lIns="0" rIns="0" tIns="0" bIns="0" anchor="t">
+          <a:bodyPr wrap="square" lIns="0" tIns="0" rIns="0" bIns="0" anchor="t">
             <a:spAutoFit/>
           </a:bodyPr>
           <a:lstStyle/>
@@ -18505,7 +18528,7 @@
           <a:noFill/>
         </p:spPr>
         <p:txBody>
-          <a:bodyPr wrap="square" lIns="0" rIns="0" tIns="0" bIns="0" anchor="t">
+          <a:bodyPr wrap="square" lIns="0" tIns="0" rIns="0" bIns="0" anchor="t">
             <a:spAutoFit/>
           </a:bodyPr>
           <a:lstStyle/>
@@ -18575,6 +18598,7 @@
           <a:lstStyle/>
           <a:p>
             <a:pPr algn="ctr"/>
+            <a:endParaRPr/>
           </a:p>
         </p:txBody>
       </p:sp>
@@ -18595,7 +18619,7 @@
           <a:noFill/>
         </p:spPr>
         <p:txBody>
-          <a:bodyPr wrap="square" lIns="0" rIns="0" tIns="0" bIns="0" anchor="t">
+          <a:bodyPr wrap="square" lIns="0" tIns="0" rIns="0" bIns="0" anchor="t">
             <a:spAutoFit/>
           </a:bodyPr>
           <a:lstStyle/>
@@ -18640,7 +18664,7 @@
           <a:noFill/>
         </p:spPr>
         <p:txBody>
-          <a:bodyPr wrap="square" lIns="0" rIns="0" tIns="0" bIns="0" anchor="t">
+          <a:bodyPr wrap="square" lIns="0" tIns="0" rIns="0" bIns="0" anchor="t">
             <a:spAutoFit/>
           </a:bodyPr>
           <a:lstStyle/>
@@ -18685,7 +18709,7 @@
           <a:noFill/>
         </p:spPr>
         <p:txBody>
-          <a:bodyPr wrap="square" lIns="0" rIns="0" tIns="0" bIns="0" anchor="t">
+          <a:bodyPr wrap="square" lIns="0" tIns="0" rIns="0" bIns="0" anchor="t">
             <a:spAutoFit/>
           </a:bodyPr>
           <a:lstStyle/>
@@ -18755,6 +18779,7 @@
           <a:lstStyle/>
           <a:p>
             <a:pPr algn="ctr"/>
+            <a:endParaRPr/>
           </a:p>
         </p:txBody>
       </p:sp>
@@ -18775,7 +18800,7 @@
           <a:noFill/>
         </p:spPr>
         <p:txBody>
-          <a:bodyPr wrap="square" lIns="0" rIns="0" tIns="0" bIns="0" anchor="t">
+          <a:bodyPr wrap="square" lIns="0" tIns="0" rIns="0" bIns="0" anchor="t">
             <a:spAutoFit/>
           </a:bodyPr>
           <a:lstStyle/>
@@ -18820,7 +18845,7 @@
           <a:noFill/>
         </p:spPr>
         <p:txBody>
-          <a:bodyPr wrap="square" lIns="0" rIns="0" tIns="0" bIns="0" anchor="t">
+          <a:bodyPr wrap="square" lIns="0" tIns="0" rIns="0" bIns="0" anchor="t">
             <a:spAutoFit/>
           </a:bodyPr>
           <a:lstStyle/>
@@ -18865,7 +18890,7 @@
           <a:noFill/>
         </p:spPr>
         <p:txBody>
-          <a:bodyPr wrap="square" lIns="0" rIns="0" tIns="0" bIns="0" anchor="t">
+          <a:bodyPr wrap="square" lIns="0" tIns="0" rIns="0" bIns="0" anchor="t">
             <a:spAutoFit/>
           </a:bodyPr>
           <a:lstStyle/>
@@ -18935,6 +18960,7 @@
           <a:lstStyle/>
           <a:p>
             <a:pPr algn="ctr"/>
+            <a:endParaRPr/>
           </a:p>
         </p:txBody>
       </p:sp>
@@ -18955,7 +18981,7 @@
           <a:noFill/>
         </p:spPr>
         <p:txBody>
-          <a:bodyPr wrap="square" lIns="0" rIns="0" tIns="0" bIns="0" anchor="t">
+          <a:bodyPr wrap="square" lIns="0" tIns="0" rIns="0" bIns="0" anchor="t">
             <a:spAutoFit/>
           </a:bodyPr>
           <a:lstStyle/>
@@ -19000,7 +19026,7 @@
           <a:noFill/>
         </p:spPr>
         <p:txBody>
-          <a:bodyPr wrap="square" lIns="0" rIns="0" tIns="0" bIns="0" anchor="t">
+          <a:bodyPr wrap="square" lIns="0" tIns="0" rIns="0" bIns="0" anchor="t">
             <a:spAutoFit/>
           </a:bodyPr>
           <a:lstStyle/>
@@ -19045,7 +19071,7 @@
           <a:noFill/>
         </p:spPr>
         <p:txBody>
-          <a:bodyPr wrap="square" lIns="0" rIns="0" tIns="0" bIns="0" anchor="t">
+          <a:bodyPr wrap="square" lIns="0" tIns="0" rIns="0" bIns="0" anchor="t">
             <a:spAutoFit/>
           </a:bodyPr>
           <a:lstStyle/>
@@ -19115,6 +19141,7 @@
           <a:lstStyle/>
           <a:p>
             <a:pPr algn="ctr"/>
+            <a:endParaRPr/>
           </a:p>
         </p:txBody>
       </p:sp>
@@ -19135,7 +19162,7 @@
           <a:noFill/>
         </p:spPr>
         <p:txBody>
-          <a:bodyPr wrap="square" lIns="0" rIns="0" tIns="0" bIns="0" anchor="t">
+          <a:bodyPr wrap="square" lIns="0" tIns="0" rIns="0" bIns="0" anchor="t">
             <a:spAutoFit/>
           </a:bodyPr>
           <a:lstStyle/>
@@ -19180,7 +19207,7 @@
           <a:noFill/>
         </p:spPr>
         <p:txBody>
-          <a:bodyPr wrap="square" lIns="0" rIns="0" tIns="0" bIns="0" anchor="t">
+          <a:bodyPr wrap="square" lIns="0" tIns="0" rIns="0" bIns="0" anchor="t">
             <a:spAutoFit/>
           </a:bodyPr>
           <a:lstStyle/>
@@ -19225,7 +19252,7 @@
           <a:noFill/>
         </p:spPr>
         <p:txBody>
-          <a:bodyPr wrap="square" lIns="0" rIns="0" tIns="0" bIns="0" anchor="t">
+          <a:bodyPr wrap="square" lIns="0" tIns="0" rIns="0" bIns="0" anchor="t">
             <a:spAutoFit/>
           </a:bodyPr>
           <a:lstStyle/>
@@ -19295,6 +19322,7 @@
           <a:lstStyle/>
           <a:p>
             <a:pPr algn="ctr"/>
+            <a:endParaRPr/>
           </a:p>
         </p:txBody>
       </p:sp>
@@ -19315,7 +19343,7 @@
           <a:noFill/>
         </p:spPr>
         <p:txBody>
-          <a:bodyPr wrap="square" lIns="0" rIns="0" tIns="0" bIns="0" anchor="t">
+          <a:bodyPr wrap="square" lIns="0" tIns="0" rIns="0" bIns="0" anchor="t">
             <a:spAutoFit/>
           </a:bodyPr>
           <a:lstStyle/>
@@ -19360,7 +19388,7 @@
           <a:noFill/>
         </p:spPr>
         <p:txBody>
-          <a:bodyPr wrap="square" lIns="0" rIns="0" tIns="0" bIns="0" anchor="t">
+          <a:bodyPr wrap="square" lIns="0" tIns="0" rIns="0" bIns="0" anchor="t">
             <a:spAutoFit/>
           </a:bodyPr>
           <a:lstStyle/>
@@ -19405,7 +19433,7 @@
           <a:noFill/>
         </p:spPr>
         <p:txBody>
-          <a:bodyPr wrap="square" lIns="0" rIns="0" tIns="0" bIns="0" anchor="t">
+          <a:bodyPr wrap="square" lIns="0" tIns="0" rIns="0" bIns="0" anchor="t">
             <a:spAutoFit/>
           </a:bodyPr>
           <a:lstStyle/>
@@ -19450,7 +19478,7 @@
           <a:noFill/>
         </p:spPr>
         <p:txBody>
-          <a:bodyPr wrap="square" lIns="0" rIns="0" tIns="0" bIns="0" anchor="t">
+          <a:bodyPr wrap="square" lIns="0" tIns="0" rIns="0" bIns="0" anchor="t">
             <a:spAutoFit/>
           </a:bodyPr>
           <a:lstStyle/>
@@ -19487,7 +19515,7 @@
 </file>
 
 <file path=ppt/slides/slide7.xml><?xml version="1.0" encoding="utf-8"?>
-<p:sld xmlns:a="http://schemas.openxmlformats.org/drawingml/2006/main" xmlns:p="http://schemas.openxmlformats.org/presentationml/2006/main" xmlns:r="http://schemas.openxmlformats.org/officeDocument/2006/relationships">
+<p:sld xmlns:a="http://schemas.openxmlformats.org/drawingml/2006/main" xmlns:r="http://schemas.openxmlformats.org/officeDocument/2006/relationships" xmlns:p="http://schemas.openxmlformats.org/presentationml/2006/main">
   <p:cSld>
     <p:bg>
       <p:bgPr>
@@ -19503,7 +19531,14 @@
         <p:cNvGrpSpPr/>
         <p:nvPr/>
       </p:nvGrpSpPr>
-      <p:grpSpPr/>
+      <p:grpSpPr>
+        <a:xfrm>
+          <a:off x="0" y="0"/>
+          <a:ext cx="0" cy="0"/>
+          <a:chOff x="0" y="0"/>
+          <a:chExt cx="0" cy="0"/>
+        </a:xfrm>
+      </p:grpSpPr>
       <p:sp>
         <p:nvSpPr>
           <p:cNvPr id="2" name="TextBox 1"/>
@@ -19521,7 +19556,7 @@
           <a:noFill/>
         </p:spPr>
         <p:txBody>
-          <a:bodyPr wrap="square" lIns="0" rIns="0" tIns="0" bIns="0" anchor="t">
+          <a:bodyPr wrap="square" lIns="0" tIns="0" rIns="0" bIns="0" anchor="t">
             <a:spAutoFit/>
           </a:bodyPr>
           <a:lstStyle/>
@@ -19566,7 +19601,7 @@
           <a:noFill/>
         </p:spPr>
         <p:txBody>
-          <a:bodyPr wrap="square" lIns="0" rIns="0" tIns="0" bIns="0" anchor="t">
+          <a:bodyPr wrap="square" lIns="0" tIns="0" rIns="0" bIns="0" anchor="t">
             <a:spAutoFit/>
           </a:bodyPr>
           <a:lstStyle/>
@@ -19611,7 +19646,7 @@
           <a:noFill/>
         </p:spPr>
         <p:txBody>
-          <a:bodyPr wrap="square" lIns="0" rIns="0" tIns="0" bIns="0" anchor="t">
+          <a:bodyPr wrap="square" lIns="0" tIns="0" rIns="0" bIns="0" anchor="t">
             <a:spAutoFit/>
           </a:bodyPr>
           <a:lstStyle/>
@@ -19679,6 +19714,7 @@
           <a:lstStyle/>
           <a:p>
             <a:pPr algn="ctr"/>
+            <a:endParaRPr/>
           </a:p>
         </p:txBody>
       </p:sp>
@@ -19722,6 +19758,7 @@
           <a:lstStyle/>
           <a:p>
             <a:pPr algn="ctr"/>
+            <a:endParaRPr/>
           </a:p>
         </p:txBody>
       </p:sp>
@@ -19734,15 +19771,15 @@
         <p:spPr>
           <a:xfrm>
             <a:off x="594360" y="6528816"/>
-            <a:ext cx="8046720" cy="182880"/>
-          </a:xfrm>
-          <a:prstGeom prst="rect">
-            <a:avLst/>
-          </a:prstGeom>
-          <a:noFill/>
-        </p:spPr>
-        <p:txBody>
-          <a:bodyPr wrap="square" lIns="0" rIns="0" tIns="0" bIns="0" anchor="t">
+            <a:ext cx="8046720" cy="132216"/>
+          </a:xfrm>
+          <a:prstGeom prst="rect">
+            <a:avLst/>
+          </a:prstGeom>
+          <a:noFill/>
+        </p:spPr>
+        <p:txBody>
+          <a:bodyPr wrap="square" lIns="0" tIns="0" rIns="0" bIns="0" anchor="t">
             <a:spAutoFit/>
           </a:bodyPr>
           <a:lstStyle/>
@@ -19765,7 +19802,8 @@
               </a:defRPr>
             </a:pPr>
             <a:r>
-              <a:t>QA-SRL GEN  /  DIALOGUE DATASETS</a:t>
+              <a:rPr dirty="0"/>
+              <a:t>AITETIQ  /  DIALOGUE DATASETS</a:t>
             </a:r>
           </a:p>
         </p:txBody>
@@ -19787,7 +19825,7 @@
           <a:noFill/>
         </p:spPr>
         <p:txBody>
-          <a:bodyPr wrap="square" lIns="0" rIns="0" tIns="0" bIns="0" anchor="t">
+          <a:bodyPr wrap="square" lIns="0" tIns="0" rIns="0" bIns="0" anchor="t">
             <a:spAutoFit/>
           </a:bodyPr>
           <a:lstStyle/>
@@ -19857,6 +19895,7 @@
           <a:lstStyle/>
           <a:p>
             <a:pPr algn="ctr"/>
+            <a:endParaRPr/>
           </a:p>
         </p:txBody>
       </p:sp>
@@ -19900,6 +19939,7 @@
           <a:lstStyle/>
           <a:p>
             <a:pPr algn="ctr"/>
+            <a:endParaRPr/>
           </a:p>
         </p:txBody>
       </p:sp>
@@ -19920,7 +19960,7 @@
           <a:noFill/>
         </p:spPr>
         <p:txBody>
-          <a:bodyPr wrap="square" lIns="0" rIns="0" tIns="0" bIns="0" anchor="t">
+          <a:bodyPr wrap="square" lIns="0" tIns="0" rIns="0" bIns="0" anchor="t">
             <a:spAutoFit/>
           </a:bodyPr>
           <a:lstStyle/>
@@ -19965,7 +20005,7 @@
           <a:noFill/>
         </p:spPr>
         <p:txBody>
-          <a:bodyPr wrap="square" lIns="0" rIns="0" tIns="0" bIns="0" anchor="t">
+          <a:bodyPr wrap="square" lIns="0" tIns="0" rIns="0" bIns="0" anchor="t">
             <a:spAutoFit/>
           </a:bodyPr>
           <a:lstStyle/>
@@ -20035,6 +20075,7 @@
           <a:lstStyle/>
           <a:p>
             <a:pPr algn="ctr"/>
+            <a:endParaRPr/>
           </a:p>
         </p:txBody>
       </p:sp>
@@ -20078,6 +20119,7 @@
           <a:lstStyle/>
           <a:p>
             <a:pPr algn="ctr"/>
+            <a:endParaRPr/>
           </a:p>
         </p:txBody>
       </p:sp>
@@ -20098,7 +20140,7 @@
           <a:noFill/>
         </p:spPr>
         <p:txBody>
-          <a:bodyPr wrap="square" lIns="0" rIns="0" tIns="0" bIns="0" anchor="t">
+          <a:bodyPr wrap="square" lIns="0" tIns="0" rIns="0" bIns="0" anchor="t">
             <a:spAutoFit/>
           </a:bodyPr>
           <a:lstStyle/>
@@ -20143,7 +20185,7 @@
           <a:noFill/>
         </p:spPr>
         <p:txBody>
-          <a:bodyPr wrap="square" lIns="0" rIns="0" tIns="0" bIns="0" anchor="t">
+          <a:bodyPr wrap="square" lIns="0" tIns="0" rIns="0" bIns="0" anchor="t">
             <a:spAutoFit/>
           </a:bodyPr>
           <a:lstStyle/>
@@ -20213,6 +20255,7 @@
           <a:lstStyle/>
           <a:p>
             <a:pPr algn="ctr"/>
+            <a:endParaRPr/>
           </a:p>
         </p:txBody>
       </p:sp>
@@ -20256,6 +20299,7 @@
           <a:lstStyle/>
           <a:p>
             <a:pPr algn="ctr"/>
+            <a:endParaRPr/>
           </a:p>
         </p:txBody>
       </p:sp>
@@ -20276,7 +20320,7 @@
           <a:noFill/>
         </p:spPr>
         <p:txBody>
-          <a:bodyPr wrap="square" lIns="0" rIns="0" tIns="0" bIns="0" anchor="t">
+          <a:bodyPr wrap="square" lIns="0" tIns="0" rIns="0" bIns="0" anchor="t">
             <a:spAutoFit/>
           </a:bodyPr>
           <a:lstStyle/>
@@ -20321,7 +20365,7 @@
           <a:noFill/>
         </p:spPr>
         <p:txBody>
-          <a:bodyPr wrap="square" lIns="0" rIns="0" tIns="0" bIns="0" anchor="t">
+          <a:bodyPr wrap="square" lIns="0" tIns="0" rIns="0" bIns="0" anchor="t">
             <a:spAutoFit/>
           </a:bodyPr>
           <a:lstStyle/>
@@ -20391,6 +20435,7 @@
           <a:lstStyle/>
           <a:p>
             <a:pPr algn="ctr"/>
+            <a:endParaRPr/>
           </a:p>
         </p:txBody>
       </p:sp>
@@ -20434,6 +20479,7 @@
           <a:lstStyle/>
           <a:p>
             <a:pPr algn="ctr"/>
+            <a:endParaRPr/>
           </a:p>
         </p:txBody>
       </p:sp>
@@ -20454,7 +20500,7 @@
           <a:noFill/>
         </p:spPr>
         <p:txBody>
-          <a:bodyPr wrap="square" lIns="0" rIns="0" tIns="0" bIns="0" anchor="t">
+          <a:bodyPr wrap="square" lIns="0" tIns="0" rIns="0" bIns="0" anchor="t">
             <a:spAutoFit/>
           </a:bodyPr>
           <a:lstStyle/>
@@ -20499,7 +20545,7 @@
           <a:noFill/>
         </p:spPr>
         <p:txBody>
-          <a:bodyPr wrap="square" lIns="0" rIns="0" tIns="0" bIns="0" anchor="t">
+          <a:bodyPr wrap="square" lIns="0" tIns="0" rIns="0" bIns="0" anchor="t">
             <a:spAutoFit/>
           </a:bodyPr>
           <a:lstStyle/>
@@ -20569,6 +20615,7 @@
           <a:lstStyle/>
           <a:p>
             <a:pPr algn="ctr"/>
+            <a:endParaRPr/>
           </a:p>
         </p:txBody>
       </p:sp>
@@ -20612,6 +20659,7 @@
           <a:lstStyle/>
           <a:p>
             <a:pPr algn="ctr"/>
+            <a:endParaRPr/>
           </a:p>
         </p:txBody>
       </p:sp>
@@ -20632,7 +20680,7 @@
           <a:noFill/>
         </p:spPr>
         <p:txBody>
-          <a:bodyPr wrap="square" lIns="0" rIns="0" tIns="0" bIns="0" anchor="t">
+          <a:bodyPr wrap="square" lIns="0" tIns="0" rIns="0" bIns="0" anchor="t">
             <a:spAutoFit/>
           </a:bodyPr>
           <a:lstStyle/>
@@ -20677,7 +20725,7 @@
           <a:noFill/>
         </p:spPr>
         <p:txBody>
-          <a:bodyPr wrap="square" lIns="0" rIns="0" tIns="0" bIns="0" anchor="t">
+          <a:bodyPr wrap="square" lIns="0" tIns="0" rIns="0" bIns="0" anchor="t">
             <a:spAutoFit/>
           </a:bodyPr>
           <a:lstStyle/>
@@ -20747,6 +20795,7 @@
           <a:lstStyle/>
           <a:p>
             <a:pPr algn="ctr"/>
+            <a:endParaRPr/>
           </a:p>
         </p:txBody>
       </p:sp>
@@ -20767,7 +20816,7 @@
           <a:noFill/>
         </p:spPr>
         <p:txBody>
-          <a:bodyPr wrap="square" lIns="0" rIns="0" tIns="0" bIns="0" anchor="t">
+          <a:bodyPr wrap="square" lIns="0" tIns="0" rIns="0" bIns="0" anchor="t">
             <a:spAutoFit/>
           </a:bodyPr>
           <a:lstStyle/>
@@ -20804,7 +20853,7 @@
 </file>
 
 <file path=ppt/slides/slide8.xml><?xml version="1.0" encoding="utf-8"?>
-<p:sld xmlns:a="http://schemas.openxmlformats.org/drawingml/2006/main" xmlns:p="http://schemas.openxmlformats.org/presentationml/2006/main" xmlns:r="http://schemas.openxmlformats.org/officeDocument/2006/relationships">
+<p:sld xmlns:a="http://schemas.openxmlformats.org/drawingml/2006/main" xmlns:r="http://schemas.openxmlformats.org/officeDocument/2006/relationships" xmlns:p="http://schemas.openxmlformats.org/presentationml/2006/main">
   <p:cSld>
     <p:bg>
       <p:bgPr>
@@ -20820,7 +20869,14 @@
         <p:cNvGrpSpPr/>
         <p:nvPr/>
       </p:nvGrpSpPr>
-      <p:grpSpPr/>
+      <p:grpSpPr>
+        <a:xfrm>
+          <a:off x="0" y="0"/>
+          <a:ext cx="0" cy="0"/>
+          <a:chOff x="0" y="0"/>
+          <a:chExt cx="0" cy="0"/>
+        </a:xfrm>
+      </p:grpSpPr>
       <p:sp>
         <p:nvSpPr>
           <p:cNvPr id="2" name="TextBox 1"/>
@@ -20838,7 +20894,7 @@
           <a:noFill/>
         </p:spPr>
         <p:txBody>
-          <a:bodyPr wrap="square" lIns="0" rIns="0" tIns="0" bIns="0" anchor="t">
+          <a:bodyPr wrap="square" lIns="0" tIns="0" rIns="0" bIns="0" anchor="t">
             <a:spAutoFit/>
           </a:bodyPr>
           <a:lstStyle/>
@@ -20883,7 +20939,7 @@
           <a:noFill/>
         </p:spPr>
         <p:txBody>
-          <a:bodyPr wrap="square" lIns="0" rIns="0" tIns="0" bIns="0" anchor="t">
+          <a:bodyPr wrap="square" lIns="0" tIns="0" rIns="0" bIns="0" anchor="t">
             <a:spAutoFit/>
           </a:bodyPr>
           <a:lstStyle/>
@@ -20928,7 +20984,7 @@
           <a:noFill/>
         </p:spPr>
         <p:txBody>
-          <a:bodyPr wrap="square" lIns="0" rIns="0" tIns="0" bIns="0" anchor="t">
+          <a:bodyPr wrap="square" lIns="0" tIns="0" rIns="0" bIns="0" anchor="t">
             <a:spAutoFit/>
           </a:bodyPr>
           <a:lstStyle/>
@@ -20996,6 +21052,7 @@
           <a:lstStyle/>
           <a:p>
             <a:pPr algn="ctr"/>
+            <a:endParaRPr/>
           </a:p>
         </p:txBody>
       </p:sp>
@@ -21039,6 +21096,7 @@
           <a:lstStyle/>
           <a:p>
             <a:pPr algn="ctr"/>
+            <a:endParaRPr/>
           </a:p>
         </p:txBody>
       </p:sp>
@@ -21051,15 +21109,15 @@
         <p:spPr>
           <a:xfrm>
             <a:off x="594360" y="6528816"/>
-            <a:ext cx="8046720" cy="182880"/>
-          </a:xfrm>
-          <a:prstGeom prst="rect">
-            <a:avLst/>
-          </a:prstGeom>
-          <a:noFill/>
-        </p:spPr>
-        <p:txBody>
-          <a:bodyPr wrap="square" lIns="0" rIns="0" tIns="0" bIns="0" anchor="t">
+            <a:ext cx="8046720" cy="132216"/>
+          </a:xfrm>
+          <a:prstGeom prst="rect">
+            <a:avLst/>
+          </a:prstGeom>
+          <a:noFill/>
+        </p:spPr>
+        <p:txBody>
+          <a:bodyPr wrap="square" lIns="0" tIns="0" rIns="0" bIns="0" anchor="t">
             <a:spAutoFit/>
           </a:bodyPr>
           <a:lstStyle/>
@@ -21082,7 +21140,8 @@
               </a:defRPr>
             </a:pPr>
             <a:r>
-              <a:t>QA-SRL GEN  /  DIALOGUE DATASETS</a:t>
+              <a:rPr dirty="0"/>
+              <a:t>AITETIQ  /  DIALOGUE DATASETS</a:t>
             </a:r>
           </a:p>
         </p:txBody>
@@ -21104,7 +21163,7 @@
           <a:noFill/>
         </p:spPr>
         <p:txBody>
-          <a:bodyPr wrap="square" lIns="0" rIns="0" tIns="0" bIns="0" anchor="t">
+          <a:bodyPr wrap="square" lIns="0" tIns="0" rIns="0" bIns="0" anchor="t">
             <a:spAutoFit/>
           </a:bodyPr>
           <a:lstStyle/>
@@ -21176,6 +21235,7 @@
           <a:lstStyle/>
           <a:p>
             <a:pPr algn="ctr"/>
+            <a:endParaRPr/>
           </a:p>
         </p:txBody>
       </p:sp>
@@ -21219,6 +21279,7 @@
           <a:lstStyle/>
           <a:p>
             <a:pPr algn="ctr"/>
+            <a:endParaRPr/>
           </a:p>
         </p:txBody>
       </p:sp>
@@ -21239,7 +21300,7 @@
           <a:noFill/>
         </p:spPr>
         <p:txBody>
-          <a:bodyPr wrap="square" lIns="0" rIns="0" tIns="0" bIns="0" anchor="t">
+          <a:bodyPr wrap="square" lIns="0" tIns="0" rIns="0" bIns="0" anchor="t">
             <a:spAutoFit/>
           </a:bodyPr>
           <a:lstStyle/>
@@ -21284,7 +21345,7 @@
           <a:noFill/>
         </p:spPr>
         <p:txBody>
-          <a:bodyPr wrap="square" lIns="0" rIns="0" tIns="0" bIns="0" anchor="t">
+          <a:bodyPr wrap="square" lIns="0" tIns="0" rIns="0" bIns="0" anchor="t">
             <a:spAutoFit/>
           </a:bodyPr>
           <a:lstStyle/>
@@ -21329,7 +21390,7 @@
           <a:noFill/>
         </p:spPr>
         <p:txBody>
-          <a:bodyPr wrap="square" lIns="0" rIns="0" tIns="0" bIns="0" anchor="t">
+          <a:bodyPr wrap="square" lIns="0" tIns="0" rIns="0" bIns="0" anchor="t">
             <a:spAutoFit/>
           </a:bodyPr>
           <a:lstStyle/>
@@ -21395,6 +21456,7 @@
                 <a:latin typeface="Segoe UI"/>
               </a:defRPr>
             </a:pPr>
+            <a:endParaRPr/>
           </a:p>
           <a:p>
             <a:pPr algn="l">
@@ -21464,6 +21526,7 @@
           <a:lstStyle/>
           <a:p>
             <a:pPr algn="ctr"/>
+            <a:endParaRPr/>
           </a:p>
         </p:txBody>
       </p:sp>
@@ -21507,6 +21570,7 @@
           <a:lstStyle/>
           <a:p>
             <a:pPr algn="ctr"/>
+            <a:endParaRPr/>
           </a:p>
         </p:txBody>
       </p:sp>
@@ -21527,7 +21591,7 @@
           <a:noFill/>
         </p:spPr>
         <p:txBody>
-          <a:bodyPr wrap="square" lIns="0" rIns="0" tIns="0" bIns="0" anchor="t">
+          <a:bodyPr wrap="square" lIns="0" tIns="0" rIns="0" bIns="0" anchor="t">
             <a:spAutoFit/>
           </a:bodyPr>
           <a:lstStyle/>
@@ -21572,7 +21636,7 @@
           <a:noFill/>
         </p:spPr>
         <p:txBody>
-          <a:bodyPr wrap="square" lIns="0" rIns="0" tIns="0" bIns="0" anchor="t">
+          <a:bodyPr wrap="square" lIns="0" tIns="0" rIns="0" bIns="0" anchor="t">
             <a:spAutoFit/>
           </a:bodyPr>
           <a:lstStyle/>
@@ -21617,7 +21681,7 @@
           <a:noFill/>
         </p:spPr>
         <p:txBody>
-          <a:bodyPr wrap="square" lIns="0" rIns="0" tIns="0" bIns="0" anchor="t">
+          <a:bodyPr wrap="square" lIns="0" tIns="0" rIns="0" bIns="0" anchor="t">
             <a:spAutoFit/>
           </a:bodyPr>
           <a:lstStyle/>
@@ -21683,6 +21747,7 @@
                 <a:latin typeface="Segoe UI"/>
               </a:defRPr>
             </a:pPr>
+            <a:endParaRPr/>
           </a:p>
           <a:p>
             <a:pPr algn="l">
@@ -21752,6 +21817,7 @@
           <a:lstStyle/>
           <a:p>
             <a:pPr algn="ctr"/>
+            <a:endParaRPr/>
           </a:p>
         </p:txBody>
       </p:sp>
@@ -21795,6 +21861,7 @@
           <a:lstStyle/>
           <a:p>
             <a:pPr algn="ctr"/>
+            <a:endParaRPr/>
           </a:p>
         </p:txBody>
       </p:sp>
@@ -21815,7 +21882,7 @@
           <a:noFill/>
         </p:spPr>
         <p:txBody>
-          <a:bodyPr wrap="square" lIns="0" rIns="0" tIns="0" bIns="0" anchor="t">
+          <a:bodyPr wrap="square" lIns="0" tIns="0" rIns="0" bIns="0" anchor="t">
             <a:spAutoFit/>
           </a:bodyPr>
           <a:lstStyle/>
@@ -21860,7 +21927,7 @@
           <a:noFill/>
         </p:spPr>
         <p:txBody>
-          <a:bodyPr wrap="square" lIns="0" rIns="0" tIns="0" bIns="0" anchor="t">
+          <a:bodyPr wrap="square" lIns="0" tIns="0" rIns="0" bIns="0" anchor="t">
             <a:spAutoFit/>
           </a:bodyPr>
           <a:lstStyle/>
@@ -21905,7 +21972,7 @@
           <a:noFill/>
         </p:spPr>
         <p:txBody>
-          <a:bodyPr wrap="square" lIns="0" rIns="0" tIns="0" bIns="0" anchor="t">
+          <a:bodyPr wrap="square" lIns="0" tIns="0" rIns="0" bIns="0" anchor="t">
             <a:spAutoFit/>
           </a:bodyPr>
           <a:lstStyle/>
@@ -21971,6 +22038,7 @@
                 <a:latin typeface="Segoe UI"/>
               </a:defRPr>
             </a:pPr>
+            <a:endParaRPr/>
           </a:p>
           <a:p>
             <a:pPr algn="l">
@@ -22013,7 +22081,7 @@
           <a:noFill/>
         </p:spPr>
         <p:txBody>
-          <a:bodyPr wrap="square" lIns="0" rIns="0" tIns="0" bIns="0" anchor="t">
+          <a:bodyPr wrap="square" lIns="0" tIns="0" rIns="0" bIns="0" anchor="t">
             <a:spAutoFit/>
           </a:bodyPr>
           <a:lstStyle/>
@@ -22050,7 +22118,7 @@
 </file>
 
 <file path=ppt/slides/slide9.xml><?xml version="1.0" encoding="utf-8"?>
-<p:sld xmlns:a="http://schemas.openxmlformats.org/drawingml/2006/main" xmlns:p="http://schemas.openxmlformats.org/presentationml/2006/main" xmlns:r="http://schemas.openxmlformats.org/officeDocument/2006/relationships">
+<p:sld xmlns:a="http://schemas.openxmlformats.org/drawingml/2006/main" xmlns:r="http://schemas.openxmlformats.org/officeDocument/2006/relationships" xmlns:p="http://schemas.openxmlformats.org/presentationml/2006/main">
   <p:cSld>
     <p:bg>
       <p:bgPr>
@@ -22066,7 +22134,14 @@
         <p:cNvGrpSpPr/>
         <p:nvPr/>
       </p:nvGrpSpPr>
-      <p:grpSpPr/>
+      <p:grpSpPr>
+        <a:xfrm>
+          <a:off x="0" y="0"/>
+          <a:ext cx="0" cy="0"/>
+          <a:chOff x="0" y="0"/>
+          <a:chExt cx="0" cy="0"/>
+        </a:xfrm>
+      </p:grpSpPr>
       <p:sp>
         <p:nvSpPr>
           <p:cNvPr id="2" name="TextBox 1"/>
@@ -22084,7 +22159,7 @@
           <a:noFill/>
         </p:spPr>
         <p:txBody>
-          <a:bodyPr wrap="square" lIns="0" rIns="0" tIns="0" bIns="0" anchor="t">
+          <a:bodyPr wrap="square" lIns="0" tIns="0" rIns="0" bIns="0" anchor="t">
             <a:spAutoFit/>
           </a:bodyPr>
           <a:lstStyle/>
@@ -22129,7 +22204,7 @@
           <a:noFill/>
         </p:spPr>
         <p:txBody>
-          <a:bodyPr wrap="square" lIns="0" rIns="0" tIns="0" bIns="0" anchor="t">
+          <a:bodyPr wrap="square" lIns="0" tIns="0" rIns="0" bIns="0" anchor="t">
             <a:spAutoFit/>
           </a:bodyPr>
           <a:lstStyle/>
@@ -22174,7 +22249,7 @@
           <a:noFill/>
         </p:spPr>
         <p:txBody>
-          <a:bodyPr wrap="square" lIns="0" rIns="0" tIns="0" bIns="0" anchor="t">
+          <a:bodyPr wrap="square" lIns="0" tIns="0" rIns="0" bIns="0" anchor="t">
             <a:spAutoFit/>
           </a:bodyPr>
           <a:lstStyle/>
@@ -22242,6 +22317,7 @@
           <a:lstStyle/>
           <a:p>
             <a:pPr algn="ctr"/>
+            <a:endParaRPr/>
           </a:p>
         </p:txBody>
       </p:sp>
@@ -22285,6 +22361,7 @@
           <a:lstStyle/>
           <a:p>
             <a:pPr algn="ctr"/>
+            <a:endParaRPr/>
           </a:p>
         </p:txBody>
       </p:sp>
@@ -22297,15 +22374,15 @@
         <p:spPr>
           <a:xfrm>
             <a:off x="594360" y="6528816"/>
-            <a:ext cx="8046720" cy="182880"/>
-          </a:xfrm>
-          <a:prstGeom prst="rect">
-            <a:avLst/>
-          </a:prstGeom>
-          <a:noFill/>
-        </p:spPr>
-        <p:txBody>
-          <a:bodyPr wrap="square" lIns="0" rIns="0" tIns="0" bIns="0" anchor="t">
+            <a:ext cx="8046720" cy="132216"/>
+          </a:xfrm>
+          <a:prstGeom prst="rect">
+            <a:avLst/>
+          </a:prstGeom>
+          <a:noFill/>
+        </p:spPr>
+        <p:txBody>
+          <a:bodyPr wrap="square" lIns="0" tIns="0" rIns="0" bIns="0" anchor="t">
             <a:spAutoFit/>
           </a:bodyPr>
           <a:lstStyle/>
@@ -22328,7 +22405,8 @@
               </a:defRPr>
             </a:pPr>
             <a:r>
-              <a:t>QA-SRL GEN  /  DIALOGUE DATASETS</a:t>
+              <a:rPr dirty="0"/>
+              <a:t>AITETIQ  /  DIALOGUE DATASETS</a:t>
             </a:r>
           </a:p>
         </p:txBody>
@@ -22350,7 +22428,7 @@
           <a:noFill/>
         </p:spPr>
         <p:txBody>
-          <a:bodyPr wrap="square" lIns="0" rIns="0" tIns="0" bIns="0" anchor="t">
+          <a:bodyPr wrap="square" lIns="0" tIns="0" rIns="0" bIns="0" anchor="t">
             <a:spAutoFit/>
           </a:bodyPr>
           <a:lstStyle/>
@@ -22422,6 +22500,7 @@
           <a:lstStyle/>
           <a:p>
             <a:pPr algn="ctr"/>
+            <a:endParaRPr/>
           </a:p>
         </p:txBody>
       </p:sp>
@@ -22442,7 +22521,7 @@
           <a:noFill/>
         </p:spPr>
         <p:txBody>
-          <a:bodyPr wrap="square" lIns="0" rIns="0" tIns="0" bIns="0" anchor="t">
+          <a:bodyPr wrap="square" lIns="0" tIns="0" rIns="0" bIns="0" anchor="t">
             <a:spAutoFit/>
           </a:bodyPr>
           <a:lstStyle/>
@@ -22487,7 +22566,7 @@
           <a:noFill/>
         </p:spPr>
         <p:txBody>
-          <a:bodyPr wrap="square" lIns="0" rIns="0" tIns="0" bIns="0" anchor="t">
+          <a:bodyPr wrap="square" lIns="0" tIns="0" rIns="0" bIns="0" anchor="t">
             <a:spAutoFit/>
           </a:bodyPr>
           <a:lstStyle/>
@@ -22555,6 +22634,7 @@
           <a:lstStyle/>
           <a:p>
             <a:pPr algn="ctr"/>
+            <a:endParaRPr/>
           </a:p>
         </p:txBody>
       </p:sp>
@@ -22600,6 +22680,7 @@
           <a:lstStyle/>
           <a:p>
             <a:pPr algn="ctr"/>
+            <a:endParaRPr/>
           </a:p>
         </p:txBody>
       </p:sp>
@@ -22620,7 +22701,7 @@
           <a:noFill/>
         </p:spPr>
         <p:txBody>
-          <a:bodyPr wrap="square" lIns="0" rIns="0" tIns="0" bIns="0" anchor="t">
+          <a:bodyPr wrap="square" lIns="0" tIns="0" rIns="0" bIns="0" anchor="t">
             <a:spAutoFit/>
           </a:bodyPr>
           <a:lstStyle/>
@@ -22665,7 +22746,7 @@
           <a:noFill/>
         </p:spPr>
         <p:txBody>
-          <a:bodyPr wrap="square" lIns="0" rIns="0" tIns="0" bIns="0" anchor="t">
+          <a:bodyPr wrap="square" lIns="0" tIns="0" rIns="0" bIns="0" anchor="t">
             <a:spAutoFit/>
           </a:bodyPr>
           <a:lstStyle/>
@@ -22735,6 +22816,7 @@
           <a:lstStyle/>
           <a:p>
             <a:pPr algn="ctr"/>
+            <a:endParaRPr/>
           </a:p>
         </p:txBody>
       </p:sp>
@@ -22755,7 +22837,7 @@
           <a:noFill/>
         </p:spPr>
         <p:txBody>
-          <a:bodyPr wrap="square" lIns="0" rIns="0" tIns="0" bIns="0" anchor="t">
+          <a:bodyPr wrap="square" lIns="0" tIns="0" rIns="0" bIns="0" anchor="t">
             <a:spAutoFit/>
           </a:bodyPr>
           <a:lstStyle/>
@@ -22800,7 +22882,7 @@
           <a:noFill/>
         </p:spPr>
         <p:txBody>
-          <a:bodyPr wrap="square" lIns="0" rIns="0" tIns="0" bIns="0" anchor="t">
+          <a:bodyPr wrap="square" lIns="0" tIns="0" rIns="0" bIns="0" anchor="t">
             <a:spAutoFit/>
           </a:bodyPr>
           <a:lstStyle/>
@@ -22845,7 +22927,7 @@
           <a:noFill/>
         </p:spPr>
         <p:txBody>
-          <a:bodyPr wrap="square" lIns="0" rIns="0" tIns="0" bIns="0" anchor="t">
+          <a:bodyPr wrap="square" lIns="0" tIns="0" rIns="0" bIns="0" anchor="t">
             <a:spAutoFit/>
           </a:bodyPr>
           <a:lstStyle/>
@@ -22913,6 +22995,7 @@
           <a:lstStyle/>
           <a:p>
             <a:pPr algn="ctr"/>
+            <a:endParaRPr/>
           </a:p>
         </p:txBody>
       </p:sp>
@@ -22933,7 +23016,7 @@
           <a:noFill/>
         </p:spPr>
         <p:txBody>
-          <a:bodyPr wrap="square" lIns="0" rIns="0" tIns="0" bIns="0" anchor="t">
+          <a:bodyPr wrap="square" lIns="0" tIns="0" rIns="0" bIns="0" anchor="t">
             <a:spAutoFit/>
           </a:bodyPr>
           <a:lstStyle/>
@@ -22978,7 +23061,7 @@
           <a:noFill/>
         </p:spPr>
         <p:txBody>
-          <a:bodyPr wrap="square" lIns="0" rIns="0" tIns="0" bIns="0" anchor="t">
+          <a:bodyPr wrap="square" lIns="0" tIns="0" rIns="0" bIns="0" anchor="t">
             <a:spAutoFit/>
           </a:bodyPr>
           <a:lstStyle/>
@@ -23046,6 +23129,7 @@
           <a:lstStyle/>
           <a:p>
             <a:pPr algn="ctr"/>
+            <a:endParaRPr/>
           </a:p>
         </p:txBody>
       </p:sp>
@@ -23066,7 +23150,7 @@
           <a:noFill/>
         </p:spPr>
         <p:txBody>
-          <a:bodyPr wrap="square" lIns="0" rIns="0" tIns="0" bIns="0" anchor="t">
+          <a:bodyPr wrap="square" lIns="0" tIns="0" rIns="0" bIns="0" anchor="t">
             <a:spAutoFit/>
           </a:bodyPr>
           <a:lstStyle/>
@@ -23111,7 +23195,7 @@
           <a:noFill/>
         </p:spPr>
         <p:txBody>
-          <a:bodyPr wrap="square" lIns="0" rIns="0" tIns="0" bIns="0" anchor="t">
+          <a:bodyPr wrap="square" lIns="0" tIns="0" rIns="0" bIns="0" anchor="t">
             <a:spAutoFit/>
           </a:bodyPr>
           <a:lstStyle/>
@@ -23179,6 +23263,7 @@
           <a:lstStyle/>
           <a:p>
             <a:pPr algn="ctr"/>
+            <a:endParaRPr/>
           </a:p>
         </p:txBody>
       </p:sp>
@@ -23199,7 +23284,7 @@
           <a:noFill/>
         </p:spPr>
         <p:txBody>
-          <a:bodyPr wrap="square" lIns="0" rIns="0" tIns="0" bIns="0" anchor="t">
+          <a:bodyPr wrap="square" lIns="0" tIns="0" rIns="0" bIns="0" anchor="t">
             <a:spAutoFit/>
           </a:bodyPr>
           <a:lstStyle/>
@@ -23566,44 +23651,44 @@
         <a:sysClr val="window" lastClr="FFFFFF"/>
       </a:lt1>
       <a:dk2>
-        <a:srgbClr val="1F497D"/>
+        <a:srgbClr val="0E2841"/>
       </a:dk2>
       <a:lt2>
-        <a:srgbClr val="EEECE1"/>
+        <a:srgbClr val="E8E8E8"/>
       </a:lt2>
       <a:accent1>
-        <a:srgbClr val="4F81BD"/>
+        <a:srgbClr val="156082"/>
       </a:accent1>
       <a:accent2>
-        <a:srgbClr val="C0504D"/>
+        <a:srgbClr val="E97132"/>
       </a:accent2>
       <a:accent3>
-        <a:srgbClr val="9BBB59"/>
+        <a:srgbClr val="196B24"/>
       </a:accent3>
       <a:accent4>
-        <a:srgbClr val="8064A2"/>
+        <a:srgbClr val="0F9ED5"/>
       </a:accent4>
       <a:accent5>
-        <a:srgbClr val="4BACC6"/>
+        <a:srgbClr val="A02B93"/>
       </a:accent5>
       <a:accent6>
-        <a:srgbClr val="F79646"/>
+        <a:srgbClr val="4EA72E"/>
       </a:accent6>
       <a:hlink>
-        <a:srgbClr val="0000FF"/>
+        <a:srgbClr val="467886"/>
       </a:hlink>
       <a:folHlink>
-        <a:srgbClr val="800080"/>
+        <a:srgbClr val="96607D"/>
       </a:folHlink>
     </a:clrScheme>
     <a:fontScheme name="Office">
       <a:majorFont>
-        <a:latin typeface="Calibri"/>
+        <a:latin typeface="Aptos Display" panose="02110004020202020204"/>
         <a:ea typeface=""/>
         <a:cs typeface=""/>
-        <a:font script="Jpan" typeface="ＭＳ Ｐゴシック"/>
+        <a:font script="Jpan" typeface="游ゴシック Light"/>
         <a:font script="Hang" typeface="맑은 고딕"/>
-        <a:font script="Hans" typeface="宋体"/>
+        <a:font script="Hans" typeface="等线 Light"/>
         <a:font script="Hant" typeface="新細明體"/>
         <a:font script="Arab" typeface="Times New Roman"/>
         <a:font script="Hebr" typeface="Times New Roman"/>
@@ -23631,14 +23716,31 @@
         <a:font script="Viet" typeface="Times New Roman"/>
         <a:font script="Uigh" typeface="Microsoft Uighur"/>
         <a:font script="Geor" typeface="Sylfaen"/>
+        <a:font script="Armn" typeface="Arial"/>
+        <a:font script="Bugi" typeface="Leelawadee UI"/>
+        <a:font script="Bopo" typeface="Microsoft JhengHei"/>
+        <a:font script="Java" typeface="Javanese Text"/>
+        <a:font script="Lisu" typeface="Segoe UI"/>
+        <a:font script="Mymr" typeface="Myanmar Text"/>
+        <a:font script="Nkoo" typeface="Ebrima"/>
+        <a:font script="Olck" typeface="Nirmala UI"/>
+        <a:font script="Osma" typeface="Ebrima"/>
+        <a:font script="Phag" typeface="Phagspa"/>
+        <a:font script="Syrn" typeface="Estrangelo Edessa"/>
+        <a:font script="Syrj" typeface="Estrangelo Edessa"/>
+        <a:font script="Syre" typeface="Estrangelo Edessa"/>
+        <a:font script="Sora" typeface="Nirmala UI"/>
+        <a:font script="Tale" typeface="Microsoft Tai Le"/>
+        <a:font script="Talu" typeface="Microsoft New Tai Lue"/>
+        <a:font script="Tfng" typeface="Ebrima"/>
       </a:majorFont>
       <a:minorFont>
-        <a:latin typeface="Calibri"/>
+        <a:latin typeface="Aptos" panose="02110004020202020204"/>
         <a:ea typeface=""/>
         <a:cs typeface=""/>
-        <a:font script="Jpan" typeface="ＭＳ Ｐゴシック"/>
+        <a:font script="Jpan" typeface="游ゴシック"/>
         <a:font script="Hang" typeface="맑은 고딕"/>
-        <a:font script="Hans" typeface="宋体"/>
+        <a:font script="Hans" typeface="等线"/>
         <a:font script="Hant" typeface="新細明體"/>
         <a:font script="Arab" typeface="Arial"/>
         <a:font script="Hebr" typeface="Arial"/>
@@ -23666,6 +23768,23 @@
         <a:font script="Viet" typeface="Arial"/>
         <a:font script="Uigh" typeface="Microsoft Uighur"/>
         <a:font script="Geor" typeface="Sylfaen"/>
+        <a:font script="Armn" typeface="Arial"/>
+        <a:font script="Bugi" typeface="Leelawadee UI"/>
+        <a:font script="Bopo" typeface="Microsoft JhengHei"/>
+        <a:font script="Java" typeface="Javanese Text"/>
+        <a:font script="Lisu" typeface="Segoe UI"/>
+        <a:font script="Mymr" typeface="Myanmar Text"/>
+        <a:font script="Nkoo" typeface="Ebrima"/>
+        <a:font script="Olck" typeface="Nirmala UI"/>
+        <a:font script="Osma" typeface="Ebrima"/>
+        <a:font script="Phag" typeface="Phagspa"/>
+        <a:font script="Syrn" typeface="Estrangelo Edessa"/>
+        <a:font script="Syrj" typeface="Estrangelo Edessa"/>
+        <a:font script="Syre" typeface="Estrangelo Edessa"/>
+        <a:font script="Sora" typeface="Nirmala UI"/>
+        <a:font script="Tale" typeface="Microsoft Tai Le"/>
+        <a:font script="Talu" typeface="Microsoft New Tai Lue"/>
+        <a:font script="Tfng" typeface="Ebrima"/>
       </a:minorFont>
     </a:fontScheme>
     <a:fmtScheme name="Office">
@@ -23677,180 +23796,136 @@
           <a:gsLst>
             <a:gs pos="0">
               <a:schemeClr val="phClr">
-                <a:tint val="50000"/>
-                <a:satMod val="300000"/>
+                <a:lumMod val="110000"/>
+                <a:satMod val="105000"/>
+                <a:tint val="67000"/>
               </a:schemeClr>
             </a:gs>
-            <a:gs pos="35000">
+            <a:gs pos="50000">
               <a:schemeClr val="phClr">
-                <a:tint val="37000"/>
-                <a:satMod val="300000"/>
+                <a:lumMod val="105000"/>
+                <a:satMod val="103000"/>
+                <a:tint val="73000"/>
               </a:schemeClr>
             </a:gs>
             <a:gs pos="100000">
               <a:schemeClr val="phClr">
-                <a:tint val="15000"/>
-                <a:satMod val="350000"/>
+                <a:lumMod val="105000"/>
+                <a:satMod val="109000"/>
+                <a:tint val="81000"/>
               </a:schemeClr>
             </a:gs>
           </a:gsLst>
-          <a:lin ang="16200000" scaled="1"/>
+          <a:lin ang="5400000" scaled="0"/>
         </a:gradFill>
         <a:gradFill rotWithShape="1">
           <a:gsLst>
             <a:gs pos="0">
               <a:schemeClr val="phClr">
-                <a:tint val="100000"/>
+                <a:satMod val="103000"/>
+                <a:lumMod val="102000"/>
+                <a:tint val="94000"/>
+              </a:schemeClr>
+            </a:gs>
+            <a:gs pos="50000">
+              <a:schemeClr val="phClr">
+                <a:satMod val="110000"/>
+                <a:lumMod val="100000"/>
                 <a:shade val="100000"/>
-                <a:satMod val="130000"/>
               </a:schemeClr>
             </a:gs>
             <a:gs pos="100000">
               <a:schemeClr val="phClr">
-                <a:tint val="50000"/>
-                <a:shade val="100000"/>
-                <a:satMod val="350000"/>
+                <a:lumMod val="99000"/>
+                <a:satMod val="120000"/>
+                <a:shade val="78000"/>
               </a:schemeClr>
             </a:gs>
           </a:gsLst>
-          <a:lin ang="16200000" scaled="0"/>
+          <a:lin ang="5400000" scaled="0"/>
         </a:gradFill>
       </a:fillStyleLst>
       <a:lnStyleLst>
-        <a:ln w="9525" cap="flat" cmpd="sng" algn="ctr">
+        <a:ln w="12700" cap="flat" cmpd="sng" algn="ctr">
           <a:solidFill>
-            <a:schemeClr val="phClr">
-              <a:shade val="95000"/>
-              <a:satMod val="105000"/>
-            </a:schemeClr>
+            <a:schemeClr val="phClr"/>
           </a:solidFill>
           <a:prstDash val="solid"/>
+          <a:miter lim="800000"/>
+        </a:ln>
+        <a:ln w="19050" cap="flat" cmpd="sng" algn="ctr">
+          <a:solidFill>
+            <a:schemeClr val="phClr"/>
+          </a:solidFill>
+          <a:prstDash val="solid"/>
+          <a:miter lim="800000"/>
         </a:ln>
         <a:ln w="25400" cap="flat" cmpd="sng" algn="ctr">
           <a:solidFill>
             <a:schemeClr val="phClr"/>
           </a:solidFill>
           <a:prstDash val="solid"/>
-        </a:ln>
-        <a:ln w="38100" cap="flat" cmpd="sng" algn="ctr">
-          <a:solidFill>
-            <a:schemeClr val="phClr"/>
-          </a:solidFill>
-          <a:prstDash val="solid"/>
+          <a:miter lim="800000"/>
         </a:ln>
       </a:lnStyleLst>
       <a:effectStyleLst>
         <a:effectStyle>
+          <a:effectLst/>
+        </a:effectStyle>
+        <a:effectStyle>
+          <a:effectLst/>
+        </a:effectStyle>
+        <a:effectStyle>
           <a:effectLst>
-            <a:outerShdw blurRad="40000" dist="20000" dir="5400000" rotWithShape="0">
+            <a:outerShdw blurRad="57150" dist="19050" dir="5400000" algn="ctr" rotWithShape="0">
               <a:srgbClr val="000000">
-                <a:alpha val="38000"/>
+                <a:alpha val="63000"/>
               </a:srgbClr>
             </a:outerShdw>
           </a:effectLst>
-        </a:effectStyle>
-        <a:effectStyle>
-          <a:effectLst>
-            <a:outerShdw blurRad="40000" dist="23000" dir="5400000" rotWithShape="0">
-              <a:srgbClr val="000000">
-                <a:alpha val="35000"/>
-              </a:srgbClr>
-            </a:outerShdw>
-          </a:effectLst>
-        </a:effectStyle>
-        <a:effectStyle>
-          <a:effectLst>
-            <a:outerShdw blurRad="40000" dist="23000" dir="5400000" rotWithShape="0">
-              <a:srgbClr val="000000">
-                <a:alpha val="35000"/>
-              </a:srgbClr>
-            </a:outerShdw>
-          </a:effectLst>
-          <a:scene3d>
-            <a:camera prst="orthographicFront">
-              <a:rot lat="0" lon="0" rev="0"/>
-            </a:camera>
-            <a:lightRig rig="threePt" dir="t">
-              <a:rot lat="0" lon="0" rev="1200000"/>
-            </a:lightRig>
-          </a:scene3d>
-          <a:sp3d>
-            <a:bevelT w="63500" h="25400"/>
-          </a:sp3d>
         </a:effectStyle>
       </a:effectStyleLst>
       <a:bgFillStyleLst>
         <a:solidFill>
           <a:schemeClr val="phClr"/>
         </a:solidFill>
+        <a:solidFill>
+          <a:schemeClr val="phClr">
+            <a:tint val="95000"/>
+            <a:satMod val="170000"/>
+          </a:schemeClr>
+        </a:solidFill>
         <a:gradFill rotWithShape="1">
           <a:gsLst>
             <a:gs pos="0">
               <a:schemeClr val="phClr">
-                <a:tint val="40000"/>
-                <a:satMod val="350000"/>
+                <a:tint val="93000"/>
+                <a:satMod val="150000"/>
+                <a:shade val="98000"/>
+                <a:lumMod val="102000"/>
               </a:schemeClr>
             </a:gs>
-            <a:gs pos="40000">
+            <a:gs pos="50000">
               <a:schemeClr val="phClr">
-                <a:tint val="45000"/>
-                <a:shade val="99000"/>
-                <a:satMod val="350000"/>
+                <a:tint val="98000"/>
+                <a:satMod val="130000"/>
+                <a:shade val="90000"/>
+                <a:lumMod val="103000"/>
               </a:schemeClr>
             </a:gs>
             <a:gs pos="100000">
               <a:schemeClr val="phClr">
-                <a:shade val="20000"/>
-                <a:satMod val="255000"/>
+                <a:shade val="63000"/>
+                <a:satMod val="120000"/>
               </a:schemeClr>
             </a:gs>
           </a:gsLst>
-          <a:path path="circle">
-            <a:fillToRect l="50000" t="-80000" r="50000" b="180000"/>
-          </a:path>
-        </a:gradFill>
-        <a:gradFill rotWithShape="1">
-          <a:gsLst>
-            <a:gs pos="0">
-              <a:schemeClr val="phClr">
-                <a:tint val="80000"/>
-                <a:satMod val="300000"/>
-              </a:schemeClr>
-            </a:gs>
-            <a:gs pos="100000">
-              <a:schemeClr val="phClr">
-                <a:shade val="30000"/>
-                <a:satMod val="200000"/>
-              </a:schemeClr>
-            </a:gs>
-          </a:gsLst>
-          <a:path path="circle">
-            <a:fillToRect l="50000" t="50000" r="50000" b="50000"/>
-          </a:path>
+          <a:lin ang="5400000" scaled="0"/>
         </a:gradFill>
       </a:bgFillStyleLst>
     </a:fmtScheme>
   </a:themeElements>
   <a:objectDefaults>
-    <a:spDef>
-      <a:spPr/>
-      <a:bodyPr/>
-      <a:lstStyle/>
-      <a:style>
-        <a:lnRef idx="1">
-          <a:schemeClr val="accent1"/>
-        </a:lnRef>
-        <a:fillRef idx="3">
-          <a:schemeClr val="accent1"/>
-        </a:fillRef>
-        <a:effectRef idx="2">
-          <a:schemeClr val="accent1"/>
-        </a:effectRef>
-        <a:fontRef idx="minor">
-          <a:schemeClr val="lt1"/>
-        </a:fontRef>
-      </a:style>
-    </a:spDef>
     <a:lnDef>
       <a:spPr/>
       <a:bodyPr/>
@@ -23872,5 +23947,10 @@
     </a:lnDef>
   </a:objectDefaults>
   <a:extraClrSchemeLst/>
+  <a:extLst>
+    <a:ext uri="{05A4C25C-085E-4340-85A3-A5531E510DB2}">
+      <thm15:themeFamily xmlns:thm15="http://schemas.microsoft.com/office/thememl/2012/main" name="Office Theme" id="{2E142A2C-CD16-42D6-873A-C26D2A0506FA}" vid="{1BDDFF52-6CD6-40A5-AB3C-68EB2F1E4D0A}"/>
+    </a:ext>
+  </a:extLst>
 </a:theme>
 </file>